--- a/Churn Prediction/Churn_Prediction_Deck_corrected.pptx
+++ b/Churn Prediction/Churn_Prediction_Deck_corrected.pptx
@@ -4,6 +4,9 @@
   <p:sldMasterIdLst>
     <p:sldMasterId id="2147483648" r:id="rId1"/>
   </p:sldMasterIdLst>
+  <p:notesMasterIdLst>
+    <p:notesMasterId r:id="rId13"/>
+  </p:notesMasterIdLst>
   <p:sldIdLst>
     <p:sldId id="256" r:id="rId2"/>
     <p:sldId id="257" r:id="rId3"/>
@@ -17,9 +20,6 @@
     <p:sldId id="265" r:id="rId11"/>
     <p:sldId id="266" r:id="rId12"/>
   </p:sldIdLst>
-  <p:notesMasterIdLst>
-    <p:notesMasterId r:id="rId13"/>
-  </p:notesMasterIdLst>
   <p:sldSz cx="12192000" cy="6858000"/>
   <p:notesSz cx="6858000" cy="12192000"/>
   <p:defaultTextStyle>
@@ -114,13 +114,20 @@
       </a:defRPr>
     </a:lvl9pPr>
   </p:defaultTextStyle>
+  <p:extLst>
+    <p:ext uri="{EFAFB233-063F-42B5-8137-9DF3F51BA10A}">
+      <p15:sldGuideLst xmlns:p15="http://schemas.microsoft.com/office/powerpoint/2012/main"/>
+    </p:ext>
+  </p:extLst>
 </p:presentation>
 </file>
 
 <file path=ppt/charts/chart1.xml><?xml version="1.0" encoding="utf-8"?>
-<c:chartSpace xmlns:c="http://schemas.openxmlformats.org/drawingml/2006/chart" xmlns:a="http://schemas.openxmlformats.org/drawingml/2006/main" xmlns:r="http://schemas.openxmlformats.org/officeDocument/2006/relationships">
+<c:chartSpace xmlns:c="http://schemas.openxmlformats.org/drawingml/2006/chart" xmlns:a="http://schemas.openxmlformats.org/drawingml/2006/main" xmlns:r="http://schemas.openxmlformats.org/officeDocument/2006/relationships" xmlns:c16r2="http://schemas.microsoft.com/office/drawing/2015/06/chart">
   <c:date1904 val="0"/>
+  <c:lang val="en-US"/>
   <c:roundedCorners val="1"/>
+  <c:style val="2"/>
   <c:chart>
     <c:autoTitleDeleted val="1"/>
     <c:plotArea>
@@ -150,40 +157,15 @@
             <a:effectLst/>
           </c:spPr>
           <c:invertIfNegative val="0"/>
-          <c:dLbls>
-            <c:numFmt formatCode="#,##0" sourceLinked="0"/>
-            <c:txPr>
-              <a:bodyPr/>
-              <a:lstStyle/>
-              <a:p>
-                <a:pPr>
-                  <a:defRPr b="0" i="0" strike="noStrike" sz="1200" u="none">
-                    <a:solidFill>
-                      <a:srgbClr val="000000"/>
-                    </a:solidFill>
-                    <a:latin typeface="Arial"/>
-                  </a:defRPr>
-                </a:pPr>
-              </a:p>
-            </c:txPr>
-            <c:showLegendKey val="0"/>
-            <c:showVal val="0"/>
-            <c:showCatName val="0"/>
-            <c:showSerName val="0"/>
-            <c:showPercent val="0"/>
-            <c:showBubbleSize val="0"/>
-            <c:showLeaderLines val="0"/>
-          </c:dLbls>
           <c:dPt>
             <c:idx val="0"/>
             <c:invertIfNegative val="0"/>
             <c:bubble3D val="0"/>
-            <c:spPr>
-              <a:solidFill>
-                <a:srgbClr val="0E8A78"/>
-              </a:solidFill>
-              <a:effectLst/>
-            </c:spPr>
+            <c:extLst>
+              <c:ext xmlns:c16="http://schemas.microsoft.com/office/drawing/2014/chart" uri="{C3380CC4-5D6E-409C-BE32-E72D297353CC}">
+                <c16:uniqueId val="{00000001-345A-415F-B791-DC2F758D14F8}"/>
+              </c:ext>
+            </c:extLst>
           </c:dPt>
           <c:dPt>
             <c:idx val="1"/>
@@ -195,6 +177,11 @@
               </a:solidFill>
               <a:effectLst/>
             </c:spPr>
+            <c:extLst>
+              <c:ext xmlns:c16="http://schemas.microsoft.com/office/drawing/2014/chart" uri="{C3380CC4-5D6E-409C-BE32-E72D297353CC}">
+                <c16:uniqueId val="{00000003-345A-415F-B791-DC2F758D14F8}"/>
+              </c:ext>
+            </c:extLst>
           </c:dPt>
           <c:dPt>
             <c:idx val="2"/>
@@ -206,17 +193,21 @@
               </a:solidFill>
               <a:effectLst/>
             </c:spPr>
+            <c:extLst>
+              <c:ext xmlns:c16="http://schemas.microsoft.com/office/drawing/2014/chart" uri="{C3380CC4-5D6E-409C-BE32-E72D297353CC}">
+                <c16:uniqueId val="{00000005-345A-415F-B791-DC2F758D14F8}"/>
+              </c:ext>
+            </c:extLst>
           </c:dPt>
           <c:dPt>
             <c:idx val="3"/>
             <c:invertIfNegative val="0"/>
             <c:bubble3D val="0"/>
-            <c:spPr>
-              <a:solidFill>
-                <a:srgbClr val="0E8A78"/>
-              </a:solidFill>
-              <a:effectLst/>
-            </c:spPr>
+            <c:extLst>
+              <c:ext xmlns:c16="http://schemas.microsoft.com/office/drawing/2014/chart" uri="{C3380CC4-5D6E-409C-BE32-E72D297353CC}">
+                <c16:uniqueId val="{00000007-345A-415F-B791-DC2F758D14F8}"/>
+              </c:ext>
+            </c:extLst>
           </c:dPt>
           <c:dPt>
             <c:idx val="4"/>
@@ -228,6 +219,11 @@
               </a:solidFill>
               <a:effectLst/>
             </c:spPr>
+            <c:extLst>
+              <c:ext xmlns:c16="http://schemas.microsoft.com/office/drawing/2014/chart" uri="{C3380CC4-5D6E-409C-BE32-E72D297353CC}">
+                <c16:uniqueId val="{00000009-345A-415F-B791-DC2F758D14F8}"/>
+              </c:ext>
+            </c:extLst>
           </c:dPt>
           <c:dPt>
             <c:idx val="5"/>
@@ -239,48 +235,50 @@
               </a:solidFill>
               <a:effectLst/>
             </c:spPr>
+            <c:extLst>
+              <c:ext xmlns:c16="http://schemas.microsoft.com/office/drawing/2014/chart" uri="{C3380CC4-5D6E-409C-BE32-E72D297353CC}">
+                <c16:uniqueId val="{0000000B-345A-415F-B791-DC2F758D14F8}"/>
+              </c:ext>
+            </c:extLst>
           </c:dPt>
           <c:dPt>
             <c:idx val="6"/>
             <c:invertIfNegative val="0"/>
             <c:bubble3D val="0"/>
-            <c:spPr>
-              <a:solidFill>
-                <a:srgbClr val="0E8A78"/>
-              </a:solidFill>
-              <a:effectLst/>
-            </c:spPr>
+            <c:extLst>
+              <c:ext xmlns:c16="http://schemas.microsoft.com/office/drawing/2014/chart" uri="{C3380CC4-5D6E-409C-BE32-E72D297353CC}">
+                <c16:uniqueId val="{0000000D-345A-415F-B791-DC2F758D14F8}"/>
+              </c:ext>
+            </c:extLst>
           </c:dPt>
           <c:cat>
-            <c:multiLvlStrRef>
+            <c:strRef>
               <c:f>Sheet1!$A$2:$A$8</c:f>
-              <c:multiLvlStrCache>
+              <c:strCache>
                 <c:ptCount val="7"/>
-                <c:lvl>
-                  <c:pt idx="0">
-                    <c:v>1</c:v>
-                  </c:pt>
-                  <c:pt idx="1">
-                    <c:v>2</c:v>
-                  </c:pt>
-                  <c:pt idx="2">
-                    <c:v>3</c:v>
-                  </c:pt>
-                  <c:pt idx="3">
-                    <c:v>4</c:v>
-                  </c:pt>
-                  <c:pt idx="4">
-                    <c:v>5</c:v>
-                  </c:pt>
-                  <c:pt idx="5">
-                    <c:v>6</c:v>
-                  </c:pt>
-                  <c:pt idx="6">
-                    <c:v>7</c:v>
-                  </c:pt>
-                </c:lvl>
-              </c:multiLvlStrCache>
-            </c:multiLvlStrRef>
+                <c:pt idx="0">
+                  <c:v>1</c:v>
+                </c:pt>
+                <c:pt idx="1">
+                  <c:v>2</c:v>
+                </c:pt>
+                <c:pt idx="2">
+                  <c:v>3</c:v>
+                </c:pt>
+                <c:pt idx="3">
+                  <c:v>4</c:v>
+                </c:pt>
+                <c:pt idx="4">
+                  <c:v>5</c:v>
+                </c:pt>
+                <c:pt idx="5">
+                  <c:v>6</c:v>
+                </c:pt>
+                <c:pt idx="6">
+                  <c:v>7</c:v>
+                </c:pt>
+              </c:strCache>
+            </c:strRef>
           </c:cat>
           <c:val>
             <c:numRef>
@@ -312,36 +310,23 @@
               </c:numCache>
             </c:numRef>
           </c:val>
+          <c:extLst>
+            <c:ext xmlns:c16="http://schemas.microsoft.com/office/drawing/2014/chart" uri="{C3380CC4-5D6E-409C-BE32-E72D297353CC}">
+              <c16:uniqueId val="{0000000E-345A-415F-B791-DC2F758D14F8}"/>
+            </c:ext>
+          </c:extLst>
         </c:ser>
         <c:dLbls>
-          <c:numFmt formatCode="#,##0" sourceLinked="0"/>
-          <c:txPr>
-            <a:bodyPr/>
-            <a:lstStyle/>
-            <a:p>
-              <a:pPr>
-                <a:defRPr b="0" i="0" strike="noStrike" sz="1200" u="none">
-                  <a:solidFill>
-                    <a:srgbClr val="000000"/>
-                  </a:solidFill>
-                  <a:latin typeface="Arial"/>
-                </a:defRPr>
-              </a:pPr>
-            </a:p>
-          </c:txPr>
           <c:showLegendKey val="0"/>
           <c:showVal val="0"/>
           <c:showCatName val="0"/>
           <c:showSerName val="0"/>
           <c:showPercent val="0"/>
           <c:showBubbleSize val="0"/>
-          <c:showLeaderLines val="0"/>
         </c:dLbls>
         <c:gapWidth val="40"/>
-        <c:overlap val="0"/>
         <c:axId val="2094734554"/>
         <c:axId val="2094734552"/>
-        <c:axId val="2094734556"/>
       </c:barChart>
       <c:catAx>
         <c:axId val="2094734554"/>
@@ -354,34 +339,11 @@
         <c:majorTickMark val="out"/>
         <c:minorTickMark val="none"/>
         <c:tickLblPos val="low"/>
-        <c:spPr>
-          <a:ln w="12700" cap="flat">
-            <a:solidFill>
-              <a:srgbClr val="888888"/>
-            </a:solidFill>
-            <a:prstDash val="solid"/>
-            <a:round/>
-          </a:ln>
-        </c:spPr>
-        <c:txPr>
-          <a:bodyPr/>
-          <a:lstStyle/>
-          <a:p>
-            <a:pPr>
-              <a:defRPr sz="1200" b="0" i="0" u="none" strike="noStrike">
-                <a:solidFill>
-                  <a:srgbClr val="000000"/>
-                </a:solidFill>
-                <a:latin typeface="Arial"/>
-              </a:defRPr>
-            </a:pPr>
-            <a:endParaRPr lang="en-US"/>
-          </a:p>
-        </c:txPr>
         <c:crossAx val="2094734552"/>
         <c:crosses val="autoZero"/>
         <c:auto val="1"/>
         <c:lblAlgn val="ctr"/>
+        <c:lblOffset val="100"/>
         <c:noMultiLvlLbl val="1"/>
       </c:catAx>
       <c:valAx>
@@ -395,30 +357,6 @@
         <c:majorTickMark val="out"/>
         <c:minorTickMark val="none"/>
         <c:tickLblPos val="nextTo"/>
-        <c:spPr>
-          <a:ln w="12700" cap="flat">
-            <a:solidFill>
-              <a:srgbClr val="888888"/>
-            </a:solidFill>
-            <a:prstDash val="solid"/>
-            <a:round/>
-          </a:ln>
-        </c:spPr>
-        <c:txPr>
-          <a:bodyPr/>
-          <a:lstStyle/>
-          <a:p>
-            <a:pPr>
-              <a:defRPr sz="1200" b="0" i="0" u="none" strike="noStrike">
-                <a:solidFill>
-                  <a:srgbClr val="000000"/>
-                </a:solidFill>
-                <a:latin typeface="Arial"/>
-              </a:defRPr>
-            </a:pPr>
-            <a:endParaRPr lang="en-US"/>
-          </a:p>
-        </c:txPr>
         <c:crossAx val="2094734554"/>
         <c:crosses val="autoZero"/>
         <c:crossBetween val="between"/>
@@ -433,6 +371,7 @@
     </c:plotArea>
     <c:plotVisOnly val="1"/>
     <c:dispBlanksAs val="span"/>
+    <c:showDLblsOverMax val="1"/>
   </c:chart>
   <c:spPr>
     <a:solidFill>
@@ -450,9 +389,11 @@
 </file>
 
 <file path=ppt/charts/chart2.xml><?xml version="1.0" encoding="utf-8"?>
-<c:chartSpace xmlns:c="http://schemas.openxmlformats.org/drawingml/2006/chart" xmlns:a="http://schemas.openxmlformats.org/drawingml/2006/main" xmlns:r="http://schemas.openxmlformats.org/officeDocument/2006/relationships">
+<c:chartSpace xmlns:c="http://schemas.openxmlformats.org/drawingml/2006/chart" xmlns:a="http://schemas.openxmlformats.org/drawingml/2006/main" xmlns:r="http://schemas.openxmlformats.org/officeDocument/2006/relationships" xmlns:c16r2="http://schemas.microsoft.com/office/drawing/2015/06/chart">
   <c:date1904 val="0"/>
+  <c:lang val="en-US"/>
   <c:roundedCorners val="1"/>
+  <c:style val="2"/>
   <c:chart>
     <c:autoTitleDeleted val="1"/>
     <c:plotArea>
@@ -484,18 +425,26 @@
           <c:invertIfNegative val="0"/>
           <c:dLbls>
             <c:numFmt formatCode="#,##0" sourceLinked="0"/>
+            <c:spPr>
+              <a:noFill/>
+              <a:ln>
+                <a:noFill/>
+              </a:ln>
+              <a:effectLst/>
+            </c:spPr>
             <c:txPr>
               <a:bodyPr/>
               <a:lstStyle/>
               <a:p>
                 <a:pPr>
-                  <a:defRPr b="1" i="0" strike="noStrike" sz="1300" u="none">
+                  <a:defRPr sz="1300" b="1" i="0" u="none" strike="noStrike">
                     <a:solidFill>
                       <a:srgbClr val="16263F"/>
                     </a:solidFill>
                     <a:latin typeface="Calibri"/>
                   </a:defRPr>
                 </a:pPr>
+                <a:endParaRPr lang="en-US"/>
               </a:p>
             </c:txPr>
             <c:showLegendKey val="0"/>
@@ -505,28 +454,31 @@
             <c:showPercent val="0"/>
             <c:showBubbleSize val="0"/>
             <c:showLeaderLines val="0"/>
+            <c:extLst>
+              <c:ext xmlns:c15="http://schemas.microsoft.com/office/drawing/2012/chart" uri="{CE6537A1-D6FC-4f65-9D91-7224C49458BB}">
+                <c15:showLeaderLines val="0"/>
+              </c:ext>
+            </c:extLst>
           </c:dLbls>
           <c:cat>
-            <c:multiLvlStrRef>
+            <c:strRef>
               <c:f>Sheet1!$A$2:$A$5</c:f>
-              <c:multiLvlStrCache>
+              <c:strCache>
                 <c:ptCount val="4"/>
-                <c:lvl>
-                  <c:pt idx="0">
-                    <c:v>AUC</c:v>
-                  </c:pt>
-                  <c:pt idx="1">
-                    <c:v>Recall</c:v>
-                  </c:pt>
-                  <c:pt idx="2">
-                    <c:v>Precision</c:v>
-                  </c:pt>
-                  <c:pt idx="3">
-                    <c:v>F1 Score</c:v>
-                  </c:pt>
-                </c:lvl>
-              </c:multiLvlStrCache>
-            </c:multiLvlStrRef>
+                <c:pt idx="0">
+                  <c:v>AUC</c:v>
+                </c:pt>
+                <c:pt idx="1">
+                  <c:v>Recall</c:v>
+                </c:pt>
+                <c:pt idx="2">
+                  <c:v>Precision</c:v>
+                </c:pt>
+                <c:pt idx="3">
+                  <c:v>F1 Score</c:v>
+                </c:pt>
+              </c:strCache>
+            </c:strRef>
           </c:cat>
           <c:val>
             <c:numRef>
@@ -549,36 +501,23 @@
               </c:numCache>
             </c:numRef>
           </c:val>
+          <c:extLst>
+            <c:ext xmlns:c16="http://schemas.microsoft.com/office/drawing/2014/chart" uri="{C3380CC4-5D6E-409C-BE32-E72D297353CC}">
+              <c16:uniqueId val="{00000000-60ED-4368-A4B8-8D28F058B95B}"/>
+            </c:ext>
+          </c:extLst>
         </c:ser>
         <c:dLbls>
-          <c:numFmt formatCode="#,##0" sourceLinked="0"/>
-          <c:txPr>
-            <a:bodyPr/>
-            <a:lstStyle/>
-            <a:p>
-              <a:pPr>
-                <a:defRPr b="1" i="0" strike="noStrike" sz="1300" u="none">
-                  <a:solidFill>
-                    <a:srgbClr val="16263F"/>
-                  </a:solidFill>
-                  <a:latin typeface="Calibri"/>
-                </a:defRPr>
-              </a:pPr>
-            </a:p>
-          </c:txPr>
           <c:showLegendKey val="0"/>
           <c:showVal val="1"/>
           <c:showCatName val="0"/>
           <c:showSerName val="0"/>
           <c:showPercent val="0"/>
           <c:showBubbleSize val="0"/>
-          <c:showLeaderLines val="0"/>
         </c:dLbls>
         <c:gapWidth val="55"/>
-        <c:overlap val="0"/>
         <c:axId val="2094734554"/>
         <c:axId val="2094734552"/>
-        <c:axId val="2094734556"/>
       </c:barChart>
       <c:catAx>
         <c:axId val="2094734554"/>
@@ -619,6 +558,7 @@
         <c:crosses val="autoZero"/>
         <c:auto val="1"/>
         <c:lblAlgn val="ctr"/>
+        <c:lblOffset val="100"/>
         <c:noMultiLvlLbl val="1"/>
       </c:catAx>
       <c:valAx>
@@ -684,6 +624,7 @@
     </c:plotArea>
     <c:plotVisOnly val="1"/>
     <c:dispBlanksAs val="span"/>
+    <c:showDLblsOverMax val="1"/>
   </c:chart>
   <c:spPr>
     <a:solidFill>
@@ -701,9 +642,11 @@
 </file>
 
 <file path=ppt/charts/chart3.xml><?xml version="1.0" encoding="utf-8"?>
-<c:chartSpace xmlns:c="http://schemas.openxmlformats.org/drawingml/2006/chart" xmlns:a="http://schemas.openxmlformats.org/drawingml/2006/main" xmlns:r="http://schemas.openxmlformats.org/officeDocument/2006/relationships">
+<c:chartSpace xmlns:c="http://schemas.openxmlformats.org/drawingml/2006/chart" xmlns:a="http://schemas.openxmlformats.org/drawingml/2006/main" xmlns:r="http://schemas.openxmlformats.org/officeDocument/2006/relationships" xmlns:c16r2="http://schemas.microsoft.com/office/drawing/2015/06/chart">
   <c:date1904 val="0"/>
+  <c:lang val="en-US"/>
   <c:roundedCorners val="1"/>
+  <c:style val="2"/>
   <c:chart>
     <c:autoTitleDeleted val="1"/>
     <c:plotArea>
@@ -733,62 +676,35 @@
             <a:effectLst/>
           </c:spPr>
           <c:invertIfNegative val="0"/>
-          <c:dLbls>
-            <c:numFmt formatCode="0.00" sourceLinked="0"/>
-            <c:txPr>
-              <a:bodyPr/>
-              <a:lstStyle/>
-              <a:p>
-                <a:pPr>
-                  <a:defRPr b="1" i="0" strike="noStrike" sz="1000" u="none">
-                    <a:solidFill>
-                      <a:srgbClr val="2B3440"/>
-                    </a:solidFill>
-                    <a:latin typeface="Calibri"/>
-                  </a:defRPr>
-                </a:pPr>
-              </a:p>
-            </c:txPr>
-            <c:showLegendKey val="0"/>
-            <c:showVal val="1"/>
-            <c:showCatName val="0"/>
-            <c:showSerName val="0"/>
-            <c:showPercent val="0"/>
-            <c:showBubbleSize val="0"/>
-            <c:showLeaderLines val="0"/>
-          </c:dLbls>
           <c:dPt>
             <c:idx val="0"/>
             <c:invertIfNegative val="0"/>
             <c:bubble3D val="0"/>
-            <c:spPr>
-              <a:solidFill>
-                <a:srgbClr val="0E8A78"/>
-              </a:solidFill>
-              <a:effectLst/>
-            </c:spPr>
+            <c:extLst>
+              <c:ext xmlns:c16="http://schemas.microsoft.com/office/drawing/2014/chart" uri="{C3380CC4-5D6E-409C-BE32-E72D297353CC}">
+                <c16:uniqueId val="{00000001-A3B3-42E5-A202-F3353BA37D84}"/>
+              </c:ext>
+            </c:extLst>
           </c:dPt>
           <c:dPt>
             <c:idx val="1"/>
             <c:invertIfNegative val="0"/>
             <c:bubble3D val="0"/>
-            <c:spPr>
-              <a:solidFill>
-                <a:srgbClr val="0E8A78"/>
-              </a:solidFill>
-              <a:effectLst/>
-            </c:spPr>
+            <c:extLst>
+              <c:ext xmlns:c16="http://schemas.microsoft.com/office/drawing/2014/chart" uri="{C3380CC4-5D6E-409C-BE32-E72D297353CC}">
+                <c16:uniqueId val="{00000003-A3B3-42E5-A202-F3353BA37D84}"/>
+              </c:ext>
+            </c:extLst>
           </c:dPt>
           <c:dPt>
             <c:idx val="2"/>
             <c:invertIfNegative val="0"/>
             <c:bubble3D val="0"/>
-            <c:spPr>
-              <a:solidFill>
-                <a:srgbClr val="0E8A78"/>
-              </a:solidFill>
-              <a:effectLst/>
-            </c:spPr>
+            <c:extLst>
+              <c:ext xmlns:c16="http://schemas.microsoft.com/office/drawing/2014/chart" uri="{C3380CC4-5D6E-409C-BE32-E72D297353CC}">
+                <c16:uniqueId val="{00000005-A3B3-42E5-A202-F3353BA37D84}"/>
+              </c:ext>
+            </c:extLst>
           </c:dPt>
           <c:dPt>
             <c:idx val="3"/>
@@ -800,6 +716,11 @@
               </a:solidFill>
               <a:effectLst/>
             </c:spPr>
+            <c:extLst>
+              <c:ext xmlns:c16="http://schemas.microsoft.com/office/drawing/2014/chart" uri="{C3380CC4-5D6E-409C-BE32-E72D297353CC}">
+                <c16:uniqueId val="{00000007-A3B3-42E5-A202-F3353BA37D84}"/>
+              </c:ext>
+            </c:extLst>
           </c:dPt>
           <c:dPt>
             <c:idx val="4"/>
@@ -811,6 +732,11 @@
               </a:solidFill>
               <a:effectLst/>
             </c:spPr>
+            <c:extLst>
+              <c:ext xmlns:c16="http://schemas.microsoft.com/office/drawing/2014/chart" uri="{C3380CC4-5D6E-409C-BE32-E72D297353CC}">
+                <c16:uniqueId val="{00000009-A3B3-42E5-A202-F3353BA37D84}"/>
+              </c:ext>
+            </c:extLst>
           </c:dPt>
           <c:dPt>
             <c:idx val="5"/>
@@ -822,6 +748,11 @@
               </a:solidFill>
               <a:effectLst/>
             </c:spPr>
+            <c:extLst>
+              <c:ext xmlns:c16="http://schemas.microsoft.com/office/drawing/2014/chart" uri="{C3380CC4-5D6E-409C-BE32-E72D297353CC}">
+                <c16:uniqueId val="{0000000B-A3B3-42E5-A202-F3353BA37D84}"/>
+              </c:ext>
+            </c:extLst>
           </c:dPt>
           <c:dPt>
             <c:idx val="6"/>
@@ -833,37 +764,77 @@
               </a:solidFill>
               <a:effectLst/>
             </c:spPr>
+            <c:extLst>
+              <c:ext xmlns:c16="http://schemas.microsoft.com/office/drawing/2014/chart" uri="{C3380CC4-5D6E-409C-BE32-E72D297353CC}">
+                <c16:uniqueId val="{0000000D-A3B3-42E5-A202-F3353BA37D84}"/>
+              </c:ext>
+            </c:extLst>
           </c:dPt>
+          <c:dLbls>
+            <c:numFmt formatCode="0.00" sourceLinked="0"/>
+            <c:spPr>
+              <a:noFill/>
+              <a:ln>
+                <a:noFill/>
+              </a:ln>
+              <a:effectLst/>
+            </c:spPr>
+            <c:txPr>
+              <a:bodyPr/>
+              <a:lstStyle/>
+              <a:p>
+                <a:pPr>
+                  <a:defRPr sz="1000" b="1" i="0" u="none" strike="noStrike">
+                    <a:solidFill>
+                      <a:srgbClr val="2B3440"/>
+                    </a:solidFill>
+                    <a:latin typeface="Calibri"/>
+                  </a:defRPr>
+                </a:pPr>
+                <a:endParaRPr lang="en-US"/>
+              </a:p>
+            </c:txPr>
+            <c:showLegendKey val="0"/>
+            <c:showVal val="1"/>
+            <c:showCatName val="0"/>
+            <c:showSerName val="0"/>
+            <c:showPercent val="0"/>
+            <c:showBubbleSize val="0"/>
+            <c:showLeaderLines val="0"/>
+            <c:extLst>
+              <c:ext xmlns:c15="http://schemas.microsoft.com/office/drawing/2012/chart" uri="{CE6537A1-D6FC-4f65-9D91-7224C49458BB}">
+                <c15:showLeaderLines val="0"/>
+              </c:ext>
+            </c:extLst>
+          </c:dLbls>
           <c:cat>
-            <c:multiLvlStrRef>
+            <c:strRef>
               <c:f>Sheet1!$A$2:$A$8</c:f>
-              <c:multiLvlStrCache>
+              <c:strCache>
                 <c:ptCount val="7"/>
-                <c:lvl>
-                  <c:pt idx="0">
-                    <c:v>features_used</c:v>
-                  </c:pt>
-                  <c:pt idx="1">
-                    <c:v>contract_days_left</c:v>
-                  </c:pt>
-                  <c:pt idx="2">
-                    <c:v>usage_trend</c:v>
-                  </c:pt>
-                  <c:pt idx="3">
-                    <c:v>monthly_revenue</c:v>
-                  </c:pt>
-                  <c:pt idx="4">
-                    <c:v>price_increase</c:v>
-                  </c:pt>
-                  <c:pt idx="5">
-                    <c:v>support_tickets</c:v>
-                  </c:pt>
-                  <c:pt idx="6">
-                    <c:v>days_since_login</c:v>
-                  </c:pt>
-                </c:lvl>
-              </c:multiLvlStrCache>
-            </c:multiLvlStrRef>
+                <c:pt idx="0">
+                  <c:v>features_used</c:v>
+                </c:pt>
+                <c:pt idx="1">
+                  <c:v>contract_days_left</c:v>
+                </c:pt>
+                <c:pt idx="2">
+                  <c:v>usage_trend</c:v>
+                </c:pt>
+                <c:pt idx="3">
+                  <c:v>monthly_revenue</c:v>
+                </c:pt>
+                <c:pt idx="4">
+                  <c:v>price_increase</c:v>
+                </c:pt>
+                <c:pt idx="5">
+                  <c:v>support_tickets</c:v>
+                </c:pt>
+                <c:pt idx="6">
+                  <c:v>days_since_login</c:v>
+                </c:pt>
+              </c:strCache>
+            </c:strRef>
           </c:cat>
           <c:val>
             <c:numRef>
@@ -895,36 +866,23 @@
               </c:numCache>
             </c:numRef>
           </c:val>
+          <c:extLst>
+            <c:ext xmlns:c16="http://schemas.microsoft.com/office/drawing/2014/chart" uri="{C3380CC4-5D6E-409C-BE32-E72D297353CC}">
+              <c16:uniqueId val="{0000000E-A3B3-42E5-A202-F3353BA37D84}"/>
+            </c:ext>
+          </c:extLst>
         </c:ser>
         <c:dLbls>
-          <c:numFmt formatCode="0.00" sourceLinked="0"/>
-          <c:txPr>
-            <a:bodyPr/>
-            <a:lstStyle/>
-            <a:p>
-              <a:pPr>
-                <a:defRPr b="1" i="0" strike="noStrike" sz="1000" u="none">
-                  <a:solidFill>
-                    <a:srgbClr val="2B3440"/>
-                  </a:solidFill>
-                  <a:latin typeface="Calibri"/>
-                </a:defRPr>
-              </a:pPr>
-            </a:p>
-          </c:txPr>
           <c:showLegendKey val="0"/>
           <c:showVal val="1"/>
           <c:showCatName val="0"/>
           <c:showSerName val="0"/>
           <c:showPercent val="0"/>
           <c:showBubbleSize val="0"/>
-          <c:showLeaderLines val="0"/>
         </c:dLbls>
         <c:gapWidth val="45"/>
-        <c:overlap val="0"/>
         <c:axId val="2094734554"/>
         <c:axId val="2094734552"/>
-        <c:axId val="2094734556"/>
       </c:barChart>
       <c:catAx>
         <c:axId val="2094734554"/>
@@ -965,6 +923,7 @@
         <c:crosses val="autoZero"/>
         <c:auto val="1"/>
         <c:lblAlgn val="ctr"/>
+        <c:lblOffset val="100"/>
         <c:noMultiLvlLbl val="1"/>
       </c:catAx>
       <c:valAx>
@@ -1030,6 +989,7 @@
     </c:plotArea>
     <c:plotVisOnly val="1"/>
     <c:dispBlanksAs val="span"/>
+    <c:showDLblsOverMax val="1"/>
   </c:chart>
   <c:spPr>
     <a:solidFill>
@@ -1047,9 +1007,11 @@
 </file>
 
 <file path=ppt/charts/chart4.xml><?xml version="1.0" encoding="utf-8"?>
-<c:chartSpace xmlns:c="http://schemas.openxmlformats.org/drawingml/2006/chart" xmlns:a="http://schemas.openxmlformats.org/drawingml/2006/main" xmlns:r="http://schemas.openxmlformats.org/officeDocument/2006/relationships">
+<c:chartSpace xmlns:c="http://schemas.openxmlformats.org/drawingml/2006/chart" xmlns:a="http://schemas.openxmlformats.org/drawingml/2006/main" xmlns:r="http://schemas.openxmlformats.org/officeDocument/2006/relationships" xmlns:c16r2="http://schemas.microsoft.com/office/drawing/2015/06/chart">
   <c:date1904 val="0"/>
+  <c:lang val="en-US"/>
   <c:roundedCorners val="1"/>
+  <c:style val="2"/>
   <c:chart>
     <c:autoTitleDeleted val="1"/>
     <c:plotArea>
@@ -1092,6 +1054,11 @@
               </a:solidFill>
               <a:effectLst/>
             </c:spPr>
+            <c:extLst>
+              <c:ext xmlns:c16="http://schemas.microsoft.com/office/drawing/2014/chart" uri="{C3380CC4-5D6E-409C-BE32-E72D297353CC}">
+                <c16:uniqueId val="{00000001-6427-4E3A-AD9B-6AF2872CE33A}"/>
+              </c:ext>
+            </c:extLst>
           </c:dPt>
           <c:dPt>
             <c:idx val="1"/>
@@ -1102,82 +1069,12 @@
               </a:solidFill>
               <a:effectLst/>
             </c:spPr>
+            <c:extLst>
+              <c:ext xmlns:c16="http://schemas.microsoft.com/office/drawing/2014/chart" uri="{C3380CC4-5D6E-409C-BE32-E72D297353CC}">
+                <c16:uniqueId val="{00000003-6427-4E3A-AD9B-6AF2872CE33A}"/>
+              </c:ext>
+            </c:extLst>
           </c:dPt>
-          <c:dLbls>
-            <c:dLbl>
-              <c:idx val="0"/>
-              <c:numFmt formatCode="General" sourceLinked="0"/>
-              <c:spPr/>
-              <c:txPr>
-                <a:bodyPr/>
-                <a:lstStyle/>
-                <a:p>
-                  <a:pPr>
-                    <a:defRPr sz="1300" b="1" i="0" u="none" strike="noStrike">
-                      <a:solidFill>
-                        <a:srgbClr val="16263F"/>
-                      </a:solidFill>
-                      <a:latin typeface="Arial"/>
-                    </a:defRPr>
-                  </a:pPr>
-                </a:p>
-              </c:txPr>
-              <c:showLegendKey val="0"/>
-              <c:showVal val="0"/>
-              <c:showCatName val="0"/>
-              <c:showSerName val="0"/>
-              <c:showPercent val="0"/>
-              <c:showBubbleSize val="0"/>
-            </c:dLbl>
-            <c:dLbl>
-              <c:idx val="1"/>
-              <c:numFmt formatCode="General" sourceLinked="0"/>
-              <c:spPr/>
-              <c:txPr>
-                <a:bodyPr/>
-                <a:lstStyle/>
-                <a:p>
-                  <a:pPr>
-                    <a:defRPr sz="1300" b="1" i="0" u="none" strike="noStrike">
-                      <a:solidFill>
-                        <a:srgbClr val="16263F"/>
-                      </a:solidFill>
-                      <a:latin typeface="Arial"/>
-                    </a:defRPr>
-                  </a:pPr>
-                </a:p>
-              </c:txPr>
-              <c:showLegendKey val="0"/>
-              <c:showVal val="0"/>
-              <c:showCatName val="0"/>
-              <c:showSerName val="0"/>
-              <c:showPercent val="0"/>
-              <c:showBubbleSize val="0"/>
-            </c:dLbl>
-            <c:numFmt formatCode="General" sourceLinked="0"/>
-            <c:txPr>
-              <a:bodyPr/>
-              <a:lstStyle/>
-              <a:p>
-                <a:pPr>
-                  <a:defRPr sz="1800" b="1" i="0" u="none" strike="noStrike">
-                    <a:solidFill>
-                      <a:srgbClr val="000000"/>
-                    </a:solidFill>
-                    <a:latin typeface="Arial"/>
-                  </a:defRPr>
-                </a:pPr>
-              </a:p>
-            </c:txPr>
-            <c:dLblPos val="ctr"/>
-            <c:showLegendKey val="0"/>
-            <c:showVal val="0"/>
-            <c:showCatName val="1"/>
-            <c:showSerName val="0"/>
-            <c:showPercent val="1"/>
-            <c:showBubbleSize val="0"/>
-            <c:showLeaderLines val="0"/>
-          </c:dLbls>
           <c:cat>
             <c:strRef>
               <c:f>Sheet1!$A$2:$A$3</c:f>
@@ -1196,6 +1093,7 @@
             <c:numRef>
               <c:f>Sheet1!$B$2:$B$3</c:f>
               <c:numCache>
+                <c:formatCode>General</c:formatCode>
                 <c:ptCount val="2"/>
                 <c:pt idx="0">
                   <c:v>19.8</c:v>
@@ -1206,7 +1104,21 @@
               </c:numCache>
             </c:numRef>
           </c:val>
+          <c:extLst>
+            <c:ext xmlns:c16="http://schemas.microsoft.com/office/drawing/2014/chart" uri="{C3380CC4-5D6E-409C-BE32-E72D297353CC}">
+              <c16:uniqueId val="{00000004-6427-4E3A-AD9B-6AF2872CE33A}"/>
+            </c:ext>
+          </c:extLst>
         </c:ser>
+        <c:dLbls>
+          <c:showLegendKey val="0"/>
+          <c:showVal val="0"/>
+          <c:showCatName val="0"/>
+          <c:showSerName val="0"/>
+          <c:showPercent val="0"/>
+          <c:showBubbleSize val="0"/>
+          <c:showLeaderLines val="0"/>
+        </c:dLbls>
         <c:firstSliceAng val="0"/>
       </c:pieChart>
       <c:spPr>
@@ -1239,6 +1151,7 @@
     </c:legend>
     <c:plotVisOnly val="1"/>
     <c:dispBlanksAs val="span"/>
+    <c:showDLblsOverMax val="1"/>
   </c:chart>
   <c:spPr>
     <a:solidFill>
@@ -1256,9 +1169,11 @@
 </file>
 
 <file path=ppt/charts/chart5.xml><?xml version="1.0" encoding="utf-8"?>
-<c:chartSpace xmlns:c="http://schemas.openxmlformats.org/drawingml/2006/chart" xmlns:a="http://schemas.openxmlformats.org/drawingml/2006/main" xmlns:r="http://schemas.openxmlformats.org/officeDocument/2006/relationships">
+<c:chartSpace xmlns:c="http://schemas.openxmlformats.org/drawingml/2006/chart" xmlns:a="http://schemas.openxmlformats.org/drawingml/2006/main" xmlns:r="http://schemas.openxmlformats.org/officeDocument/2006/relationships" xmlns:c16r2="http://schemas.microsoft.com/office/drawing/2015/06/chart">
   <c:date1904 val="0"/>
+  <c:lang val="en-US"/>
   <c:roundedCorners val="1"/>
+  <c:style val="2"/>
   <c:chart>
     <c:autoTitleDeleted val="1"/>
     <c:plotArea>
@@ -1290,18 +1205,26 @@
           <c:invertIfNegative val="0"/>
           <c:dLbls>
             <c:numFmt formatCode="#,##0" sourceLinked="0"/>
+            <c:spPr>
+              <a:noFill/>
+              <a:ln>
+                <a:noFill/>
+              </a:ln>
+              <a:effectLst/>
+            </c:spPr>
             <c:txPr>
               <a:bodyPr/>
               <a:lstStyle/>
               <a:p>
                 <a:pPr>
-                  <a:defRPr b="1" i="0" strike="noStrike" sz="1200" u="none">
+                  <a:defRPr sz="1200" b="1" i="0" u="none" strike="noStrike">
                     <a:solidFill>
                       <a:srgbClr val="16263F"/>
                     </a:solidFill>
                     <a:latin typeface="Calibri"/>
                   </a:defRPr>
                 </a:pPr>
+                <a:endParaRPr lang="en-US"/>
               </a:p>
             </c:txPr>
             <c:showLegendKey val="0"/>
@@ -1311,28 +1234,31 @@
             <c:showPercent val="0"/>
             <c:showBubbleSize val="0"/>
             <c:showLeaderLines val="0"/>
+            <c:extLst>
+              <c:ext xmlns:c15="http://schemas.microsoft.com/office/drawing/2012/chart" uri="{CE6537A1-D6FC-4f65-9D91-7224C49458BB}">
+                <c15:showLeaderLines val="0"/>
+              </c:ext>
+            </c:extLst>
           </c:dLbls>
           <c:cat>
-            <c:multiLvlStrRef>
+            <c:strRef>
               <c:f>Sheet1!$A$2:$A$5</c:f>
-              <c:multiLvlStrCache>
+              <c:strCache>
                 <c:ptCount val="4"/>
-                <c:lvl>
-                  <c:pt idx="0">
-                    <c:v>AUC</c:v>
-                  </c:pt>
-                  <c:pt idx="1">
-                    <c:v>Recall</c:v>
-                  </c:pt>
-                  <c:pt idx="2">
-                    <c:v>Precision</c:v>
-                  </c:pt>
-                  <c:pt idx="3">
-                    <c:v>F1</c:v>
-                  </c:pt>
-                </c:lvl>
-              </c:multiLvlStrCache>
-            </c:multiLvlStrRef>
+                <c:pt idx="0">
+                  <c:v>AUC</c:v>
+                </c:pt>
+                <c:pt idx="1">
+                  <c:v>Recall</c:v>
+                </c:pt>
+                <c:pt idx="2">
+                  <c:v>Precision</c:v>
+                </c:pt>
+                <c:pt idx="3">
+                  <c:v>F1</c:v>
+                </c:pt>
+              </c:strCache>
+            </c:strRef>
           </c:cat>
           <c:val>
             <c:numRef>
@@ -1355,36 +1281,23 @@
               </c:numCache>
             </c:numRef>
           </c:val>
+          <c:extLst>
+            <c:ext xmlns:c16="http://schemas.microsoft.com/office/drawing/2014/chart" uri="{C3380CC4-5D6E-409C-BE32-E72D297353CC}">
+              <c16:uniqueId val="{00000000-F946-4EE3-AA24-57D877206C03}"/>
+            </c:ext>
+          </c:extLst>
         </c:ser>
         <c:dLbls>
-          <c:numFmt formatCode="#,##0" sourceLinked="0"/>
-          <c:txPr>
-            <a:bodyPr/>
-            <a:lstStyle/>
-            <a:p>
-              <a:pPr>
-                <a:defRPr b="1" i="0" strike="noStrike" sz="1200" u="none">
-                  <a:solidFill>
-                    <a:srgbClr val="16263F"/>
-                  </a:solidFill>
-                  <a:latin typeface="Calibri"/>
-                </a:defRPr>
-              </a:pPr>
-            </a:p>
-          </c:txPr>
           <c:showLegendKey val="0"/>
           <c:showVal val="1"/>
           <c:showCatName val="0"/>
           <c:showSerName val="0"/>
           <c:showPercent val="0"/>
           <c:showBubbleSize val="0"/>
-          <c:showLeaderLines val="0"/>
         </c:dLbls>
         <c:gapWidth val="55"/>
-        <c:overlap val="0"/>
         <c:axId val="2094734554"/>
         <c:axId val="2094734552"/>
-        <c:axId val="2094734556"/>
       </c:barChart>
       <c:catAx>
         <c:axId val="2094734554"/>
@@ -1425,6 +1338,7 @@
         <c:crosses val="autoZero"/>
         <c:auto val="1"/>
         <c:lblAlgn val="ctr"/>
+        <c:lblOffset val="100"/>
         <c:noMultiLvlLbl val="1"/>
       </c:catAx>
       <c:valAx>
@@ -1490,6 +1404,7 @@
     </c:plotArea>
     <c:plotVisOnly val="1"/>
     <c:dispBlanksAs val="span"/>
+    <c:showDLblsOverMax val="1"/>
   </c:chart>
   <c:spPr>
     <a:solidFill>
@@ -1528,234 +1443,10 @@
           <a:chExt cx="0" cy="0"/>
         </a:xfrm>
       </p:grpSpPr>
-      <p:sp>
-        <p:nvSpPr>
-          <p:cNvPr id="2" name="Header Placeholder 1"/>
-          <p:cNvSpPr>
-            <a:spLocks noGrp="1"/>
-          </p:cNvSpPr>
-          <p:nvPr>
-            <p:ph type="hdr" sz="quarter"/>
-          </p:nvPr>
-        </p:nvSpPr>
-        <p:spPr>
-          <a:xfrm>
-            <a:off x="0" y="0"/>
-            <a:ext cx="2971800" cy="458788"/>
-          </a:xfrm>
-          <a:prstGeom prst="rect">
-            <a:avLst/>
-          </a:prstGeom>
-        </p:spPr>
-        <p:txBody>
-          <a:bodyPr vert="horz" lIns="91440" tIns="45720" rIns="91440" bIns="45720" rtlCol="0"/>
-          <a:lstStyle>
-            <a:lvl1pPr algn="l">
-              <a:defRPr sz="1200"/>
-            </a:lvl1pPr>
-          </a:lstStyle>
-          <a:p>
-            <a:endParaRPr lang="en-US"/>
-          </a:p>
-        </p:txBody>
-      </p:sp>
-      <p:sp>
-        <p:nvSpPr>
-          <p:cNvPr id="3" name="Date Placeholder 2"/>
-          <p:cNvSpPr>
-            <a:spLocks noGrp="1"/>
-          </p:cNvSpPr>
-          <p:nvPr>
-            <p:ph type="dt" idx="1"/>
-          </p:nvPr>
-        </p:nvSpPr>
-        <p:spPr>
-          <a:xfrm>
-            <a:off x="3884613" y="0"/>
-            <a:ext cx="2971800" cy="458788"/>
-          </a:xfrm>
-          <a:prstGeom prst="rect">
-            <a:avLst/>
-          </a:prstGeom>
-        </p:spPr>
-        <p:txBody>
-          <a:bodyPr vert="horz" lIns="91440" tIns="45720" rIns="91440" bIns="45720" rtlCol="0"/>
-          <a:lstStyle>
-            <a:lvl1pPr algn="r">
-              <a:defRPr sz="1200"/>
-            </a:lvl1pPr>
-          </a:lstStyle>
-          <a:p>
-            <a:fld id="{5282F153-3F37-0F45-9E97-73ACFA13230C}" type="datetimeFigureOut">
-              <a:rPr lang="en-US"/>
-              <a:t>7/23/19</a:t>
-            </a:fld>
-            <a:endParaRPr lang="en-US"/>
-          </a:p>
-        </p:txBody>
-      </p:sp>
-      <p:sp>
-        <p:nvSpPr>
-          <p:cNvPr id="4" name="Slide Image Placeholder 3"/>
-          <p:cNvSpPr>
-            <a:spLocks noGrp="1" noRot="1" noChangeAspect="1"/>
-          </p:cNvSpPr>
-          <p:nvPr>
-            <p:ph type="sldImg" idx="2"/>
-          </p:nvPr>
-        </p:nvSpPr>
-        <p:spPr>
-          <a:xfrm>
-            <a:off x="685800" y="1143000"/>
-            <a:ext cx="5486400" cy="3086100"/>
-          </a:xfrm>
-          <a:prstGeom prst="rect">
-            <a:avLst/>
-          </a:prstGeom>
-          <a:noFill/>
-          <a:ln w="12700">
-            <a:solidFill>
-              <a:prstClr val="black"/>
-            </a:solidFill>
-          </a:ln>
-        </p:spPr>
-        <p:txBody>
-          <a:bodyPr vert="horz" lIns="91440" tIns="45720" rIns="91440" bIns="45720" rtlCol="0" anchor="ctr"/>
-          <a:lstStyle/>
-          <a:p>
-            <a:endParaRPr lang="en-US"/>
-          </a:p>
-        </p:txBody>
-      </p:sp>
-      <p:sp>
-        <p:nvSpPr>
-          <p:cNvPr id="5" name="Notes Placeholder 4"/>
-          <p:cNvSpPr>
-            <a:spLocks noGrp="1"/>
-          </p:cNvSpPr>
-          <p:nvPr>
-            <p:ph type="body" sz="quarter" idx="3"/>
-          </p:nvPr>
-        </p:nvSpPr>
-        <p:spPr>
-          <a:xfrm>
-            <a:off x="685800" y="4400550"/>
-            <a:ext cx="5486400" cy="3600450"/>
-          </a:xfrm>
-          <a:prstGeom prst="rect">
-            <a:avLst/>
-          </a:prstGeom>
-        </p:spPr>
-        <p:txBody>
-          <a:bodyPr vert="horz" lIns="91440" tIns="45720" rIns="91440" bIns="45720" rtlCol="0"/>
-          <a:lstStyle/>
-          <a:p>
-            <a:pPr lvl="0"/>
-            <a:r>
-              <a:rPr lang="en-US"/>
-              <a:t>Click to edit Master text styles</a:t>
-            </a:r>
-          </a:p>
-          <a:p>
-            <a:pPr lvl="1"/>
-            <a:r>
-              <a:rPr lang="en-US"/>
-              <a:t>Second level</a:t>
-            </a:r>
-          </a:p>
-          <a:p>
-            <a:pPr lvl="2"/>
-            <a:r>
-              <a:rPr lang="en-US"/>
-              <a:t>Third level</a:t>
-            </a:r>
-          </a:p>
-          <a:p>
-            <a:pPr lvl="3"/>
-            <a:r>
-              <a:rPr lang="en-US"/>
-              <a:t>Fourth level</a:t>
-            </a:r>
-          </a:p>
-          <a:p>
-            <a:pPr lvl="4"/>
-            <a:r>
-              <a:rPr lang="en-US"/>
-              <a:t>Fifth level</a:t>
-            </a:r>
-          </a:p>
-        </p:txBody>
-      </p:sp>
-      <p:sp>
-        <p:nvSpPr>
-          <p:cNvPr id="6" name="Footer Placeholder 5"/>
-          <p:cNvSpPr>
-            <a:spLocks noGrp="1"/>
-          </p:cNvSpPr>
-          <p:nvPr>
-            <p:ph type="ftr" sz="quarter" idx="4"/>
-          </p:nvPr>
-        </p:nvSpPr>
-        <p:spPr>
-          <a:xfrm>
-            <a:off x="0" y="8685213"/>
-            <a:ext cx="2971800" cy="458787"/>
-          </a:xfrm>
-          <a:prstGeom prst="rect">
-            <a:avLst/>
-          </a:prstGeom>
-        </p:spPr>
-        <p:txBody>
-          <a:bodyPr vert="horz" lIns="91440" tIns="45720" rIns="91440" bIns="45720" rtlCol="0" anchor="b"/>
-          <a:lstStyle>
-            <a:lvl1pPr algn="l">
-              <a:defRPr sz="1200"/>
-            </a:lvl1pPr>
-          </a:lstStyle>
-          <a:p>
-            <a:endParaRPr lang="en-US"/>
-          </a:p>
-        </p:txBody>
-      </p:sp>
-      <p:sp>
-        <p:nvSpPr>
-          <p:cNvPr id="7" name="Slide Number Placeholder 6"/>
-          <p:cNvSpPr>
-            <a:spLocks noGrp="1"/>
-          </p:cNvSpPr>
-          <p:nvPr>
-            <p:ph type="sldNum" sz="quarter" idx="5"/>
-          </p:nvPr>
-        </p:nvSpPr>
-        <p:spPr>
-          <a:xfrm>
-            <a:off x="3884613" y="8685213"/>
-            <a:ext cx="2971800" cy="458787"/>
-          </a:xfrm>
-          <a:prstGeom prst="rect">
-            <a:avLst/>
-          </a:prstGeom>
-        </p:spPr>
-        <p:txBody>
-          <a:bodyPr vert="horz" lIns="91440" tIns="45720" rIns="91440" bIns="45720" rtlCol="0" anchor="b"/>
-          <a:lstStyle>
-            <a:lvl1pPr algn="r">
-              <a:defRPr sz="1200"/>
-            </a:lvl1pPr>
-          </a:lstStyle>
-          <a:p>
-            <a:fld id="{CE5E9CC1-C706-0F49-92D6-E571CC5EEA8F}" type="slidenum">
-              <a:rPr lang="en-US"/>
-              <a:t>‹#›</a:t>
-            </a:fld>
-            <a:endParaRPr lang="en-US"/>
-          </a:p>
-        </p:txBody>
-      </p:sp>
     </p:spTree>
     <p:extLst>
       <p:ext uri="{BB962C8B-B14F-4D97-AF65-F5344CB8AC3E}">
-        <p14:creationId xmlns:p14="http://schemas.microsoft.com/office/powerpoint/2010/main" val="1024086991"/>
+        <p14:creationId xmlns:p14="http://schemas.microsoft.com/office/powerpoint/2010/main" val="4193459770"/>
       </p:ext>
     </p:extLst>
   </p:cSld>
@@ -1899,10 +1590,6 @@
           <a:bodyPr/>
           <a:lstStyle/>
           <a:p>
-            <a:r>
-              <a:rPr lang="en-US" dirty="0"/>
-              <a:t/>
-            </a:r>
             <a:endParaRPr lang="en-US" dirty="0"/>
           </a:p>
         </p:txBody>
@@ -1987,10 +1674,6 @@
           <a:bodyPr/>
           <a:lstStyle/>
           <a:p>
-            <a:r>
-              <a:rPr lang="en-US" dirty="0"/>
-              <a:t/>
-            </a:r>
             <a:endParaRPr lang="en-US" dirty="0"/>
           </a:p>
         </p:txBody>
@@ -2075,10 +1758,6 @@
           <a:bodyPr/>
           <a:lstStyle/>
           <a:p>
-            <a:r>
-              <a:rPr lang="en-US" dirty="0"/>
-              <a:t/>
-            </a:r>
             <a:endParaRPr lang="en-US" dirty="0"/>
           </a:p>
         </p:txBody>
@@ -2163,10 +1842,6 @@
           <a:bodyPr/>
           <a:lstStyle/>
           <a:p>
-            <a:r>
-              <a:rPr lang="en-US" dirty="0"/>
-              <a:t/>
-            </a:r>
             <a:endParaRPr lang="en-US" dirty="0"/>
           </a:p>
         </p:txBody>
@@ -2251,10 +1926,6 @@
           <a:bodyPr/>
           <a:lstStyle/>
           <a:p>
-            <a:r>
-              <a:rPr lang="en-US" dirty="0"/>
-              <a:t/>
-            </a:r>
             <a:endParaRPr lang="en-US" dirty="0"/>
           </a:p>
         </p:txBody>
@@ -2339,10 +2010,6 @@
           <a:bodyPr/>
           <a:lstStyle/>
           <a:p>
-            <a:r>
-              <a:rPr lang="en-US" dirty="0"/>
-              <a:t/>
-            </a:r>
             <a:endParaRPr lang="en-US" dirty="0"/>
           </a:p>
         </p:txBody>
@@ -2427,10 +2094,6 @@
           <a:bodyPr/>
           <a:lstStyle/>
           <a:p>
-            <a:r>
-              <a:rPr lang="en-US" dirty="0"/>
-              <a:t/>
-            </a:r>
             <a:endParaRPr lang="en-US" dirty="0"/>
           </a:p>
         </p:txBody>
@@ -2515,10 +2178,6 @@
           <a:bodyPr/>
           <a:lstStyle/>
           <a:p>
-            <a:r>
-              <a:rPr lang="en-US" dirty="0"/>
-              <a:t/>
-            </a:r>
             <a:endParaRPr lang="en-US" dirty="0"/>
           </a:p>
         </p:txBody>
@@ -2603,10 +2262,6 @@
           <a:bodyPr/>
           <a:lstStyle/>
           <a:p>
-            <a:r>
-              <a:rPr lang="en-US" dirty="0"/>
-              <a:t/>
-            </a:r>
             <a:endParaRPr lang="en-US" dirty="0"/>
           </a:p>
         </p:txBody>
@@ -2691,10 +2346,6 @@
           <a:bodyPr/>
           <a:lstStyle/>
           <a:p>
-            <a:r>
-              <a:rPr lang="en-US" dirty="0"/>
-              <a:t/>
-            </a:r>
             <a:endParaRPr lang="en-US" dirty="0"/>
           </a:p>
         </p:txBody>
@@ -2779,10 +2430,6 @@
           <a:bodyPr/>
           <a:lstStyle/>
           <a:p>
-            <a:r>
-              <a:rPr lang="en-US" dirty="0"/>
-              <a:t/>
-            </a:r>
             <a:endParaRPr lang="en-US" dirty="0"/>
           </a:p>
         </p:txBody>
@@ -2856,6 +2503,11 @@
 <file path=ppt/slideMasters/slideMaster1.xml><?xml version="1.0" encoding="utf-8"?>
 <p:sldMaster xmlns:a="http://schemas.openxmlformats.org/drawingml/2006/main" xmlns:r="http://schemas.openxmlformats.org/officeDocument/2006/relationships" xmlns:p="http://schemas.openxmlformats.org/presentationml/2006/main">
   <p:cSld>
+    <p:bg>
+      <p:bgRef idx="1001">
+        <a:schemeClr val="bg1"/>
+      </p:bgRef>
+    </p:bg>
     <p:spTree>
       <p:nvGrpSpPr>
         <p:cNvPr id="1" name=""/>
@@ -2870,6 +2522,55 @@
           <a:chExt cx="0" cy="0"/>
         </a:xfrm>
       </p:grpSpPr>
+      <p:sp>
+        <p:nvSpPr>
+          <p:cNvPr id="3" name="TextBox 2">
+            <a:extLst>
+              <a:ext uri="{FF2B5EF4-FFF2-40B4-BE49-F238E27FC236}">
+                <a16:creationId xmlns:a16="http://schemas.microsoft.com/office/drawing/2014/main" id="{BD81D69B-8298-FFEC-9CE7-091B174894F0}"/>
+              </a:ext>
+            </a:extLst>
+          </p:cNvPr>
+          <p:cNvSpPr txBox="1"/>
+          <p:nvPr userDrawn="1">
+            <p:extLst>
+              <p:ext uri="{1162E1C5-73C7-4A58-AE30-91384D911F3F}">
+                <p184:classification xmlns:p184="http://schemas.microsoft.com/office/powerpoint/2018/4/main" val="hdr"/>
+              </p:ext>
+            </p:extLst>
+          </p:nvPr>
+        </p:nvSpPr>
+        <p:spPr>
+          <a:xfrm>
+            <a:off x="4720400" y="63500"/>
+            <a:ext cx="2779712" cy="121920"/>
+          </a:xfrm>
+          <a:prstGeom prst="rect">
+            <a:avLst/>
+          </a:prstGeom>
+        </p:spPr>
+        <p:txBody>
+          <a:bodyPr horzOverflow="overflow" lIns="0" tIns="0" rIns="0" bIns="0">
+            <a:spAutoFit/>
+          </a:bodyPr>
+          <a:lstStyle/>
+          <a:p>
+            <a:pPr algn="l"/>
+            <a:r>
+              <a:rPr lang="en-US" sz="800">
+                <a:solidFill>
+                  <a:srgbClr val="537173">
+                    <a:alpha val="50000"/>
+                  </a:srgbClr>
+                </a:solidFill>
+                <a:latin typeface="Arial" panose="020B0604020202020204" pitchFamily="34" charset="0"/>
+                <a:cs typeface="Arial" panose="020B0604020202020204" pitchFamily="34" charset="0"/>
+              </a:rPr>
+              <a:t>For business use only / Nur für den geschäftlichen Gebrauch</a:t>
+            </a:r>
+          </a:p>
+        </p:txBody>
+      </p:sp>
     </p:spTree>
   </p:cSld>
   <p:clrMap bg1="lt1" tx1="dk1" bg2="lt2" tx2="dk2" accent1="accent1" accent2="accent2" accent3="accent3" accent4="accent4" accent5="accent5" accent6="accent6" hlink="hlink" folHlink="folHlink"/>
@@ -3138,6 +2839,7 @@
         <a:solidFill>
           <a:srgbClr val="FFFFFF"/>
         </a:solidFill>
+        <a:effectLst/>
       </p:bgPr>
     </p:bg>
     <p:spTree>
@@ -3175,11 +2877,11 @@
           <a:bodyPr wrap="square" rtlCol="0" anchor="ctr"/>
           <a:lstStyle/>
           <a:p>
-            <a:pPr algn="r" indent="0" marL="0">
+            <a:pPr marL="0" indent="0" algn="r">
               <a:buNone/>
             </a:pPr>
             <a:r>
-              <a:rPr lang="en-US" sz="1200" b="1" spc="200" kern="0" dirty="0">
+              <a:rPr lang="en-US" sz="1200" b="1" kern="0" spc="200" dirty="0">
                 <a:solidFill>
                   <a:srgbClr val="6B7480"/>
                 </a:solidFill>
@@ -3214,7 +2916,7 @@
           <a:bodyPr wrap="square" rtlCol="0" anchor="ctr"/>
           <a:lstStyle/>
           <a:p>
-            <a:pPr indent="0" marL="0">
+            <a:pPr marL="0" indent="0">
               <a:lnSpc>
                 <a:spcPct val="98000"/>
               </a:lnSpc>
@@ -3234,7 +2936,7 @@
             <a:endParaRPr lang="en-US" sz="4600" dirty="0"/>
           </a:p>
           <a:p>
-            <a:pPr indent="0" marL="0">
+            <a:pPr marL="0" indent="0">
               <a:lnSpc>
                 <a:spcPct val="98000"/>
               </a:lnSpc>
@@ -3254,7 +2956,7 @@
             <a:endParaRPr lang="en-US" sz="4600" dirty="0"/>
           </a:p>
           <a:p>
-            <a:pPr indent="0" marL="0">
+            <a:pPr marL="0" indent="0">
               <a:lnSpc>
                 <a:spcPct val="98000"/>
               </a:lnSpc>
@@ -3274,7 +2976,7 @@
             <a:endParaRPr lang="en-US" sz="4600" dirty="0"/>
           </a:p>
           <a:p>
-            <a:pPr indent="0" marL="0">
+            <a:pPr marL="0" indent="0">
               <a:lnSpc>
                 <a:spcPct val="98000"/>
               </a:lnSpc>
@@ -3316,7 +3018,7 @@
           <a:bodyPr wrap="square" rtlCol="0" anchor="ctr"/>
           <a:lstStyle/>
           <a:p>
-            <a:pPr indent="0" marL="0">
+            <a:pPr marL="0" indent="0">
               <a:buNone/>
             </a:pPr>
             <a:r>
@@ -3353,6 +3055,13 @@
           </a:solidFill>
           <a:ln/>
         </p:spPr>
+        <p:txBody>
+          <a:bodyPr/>
+          <a:lstStyle/>
+          <a:p>
+            <a:endParaRPr lang="en-US"/>
+          </a:p>
+        </p:txBody>
       </p:sp>
       <p:sp>
         <p:nvSpPr>
@@ -3375,7 +3084,7 @@
           <a:bodyPr wrap="square" lIns="0" tIns="0" rIns="0" bIns="0" rtlCol="0" anchor="ctr"/>
           <a:lstStyle/>
           <a:p>
-            <a:pPr indent="0" marL="0">
+            <a:pPr marL="0" indent="0">
               <a:buNone/>
             </a:pPr>
             <a:r>
@@ -3414,11 +3123,11 @@
           <a:bodyPr wrap="square" lIns="0" tIns="0" rIns="0" bIns="0" rtlCol="0" anchor="ctr"/>
           <a:lstStyle/>
           <a:p>
-            <a:pPr indent="0" marL="0">
+            <a:pPr marL="0" indent="0">
               <a:buNone/>
             </a:pPr>
             <a:r>
-              <a:rPr lang="en-US" sz="1100" b="1" spc="100" kern="0" dirty="0">
+              <a:rPr lang="en-US" sz="1100" b="1" kern="0" spc="100" dirty="0">
                 <a:solidFill>
                   <a:srgbClr val="0E8A78"/>
                 </a:solidFill>
@@ -3453,7 +3162,7 @@
           <a:bodyPr wrap="square" lIns="0" tIns="0" rIns="0" bIns="0" rtlCol="0" anchor="ctr"/>
           <a:lstStyle/>
           <a:p>
-            <a:pPr indent="0" marL="0">
+            <a:pPr marL="0" indent="0">
               <a:buNone/>
             </a:pPr>
             <a:r>
@@ -3490,6 +3199,13 @@
           </a:solidFill>
           <a:ln/>
         </p:spPr>
+        <p:txBody>
+          <a:bodyPr/>
+          <a:lstStyle/>
+          <a:p>
+            <a:endParaRPr lang="en-US"/>
+          </a:p>
+        </p:txBody>
       </p:sp>
       <p:sp>
         <p:nvSpPr>
@@ -3512,7 +3228,7 @@
           <a:bodyPr wrap="square" lIns="0" tIns="0" rIns="0" bIns="0" rtlCol="0" anchor="ctr"/>
           <a:lstStyle/>
           <a:p>
-            <a:pPr indent="0" marL="0">
+            <a:pPr marL="0" indent="0">
               <a:buNone/>
             </a:pPr>
             <a:r>
@@ -3551,11 +3267,11 @@
           <a:bodyPr wrap="square" lIns="0" tIns="0" rIns="0" bIns="0" rtlCol="0" anchor="ctr"/>
           <a:lstStyle/>
           <a:p>
-            <a:pPr indent="0" marL="0">
+            <a:pPr marL="0" indent="0">
               <a:buNone/>
             </a:pPr>
             <a:r>
-              <a:rPr lang="en-US" sz="1100" b="1" spc="100" kern="0" dirty="0">
+              <a:rPr lang="en-US" sz="1100" b="1" kern="0" spc="100" dirty="0">
                 <a:solidFill>
                   <a:srgbClr val="D9912B"/>
                 </a:solidFill>
@@ -3590,7 +3306,7 @@
           <a:bodyPr wrap="square" lIns="0" tIns="0" rIns="0" bIns="0" rtlCol="0" anchor="ctr"/>
           <a:lstStyle/>
           <a:p>
-            <a:pPr indent="0" marL="0">
+            <a:pPr marL="0" indent="0">
               <a:buNone/>
             </a:pPr>
             <a:r>
@@ -3629,7 +3345,7 @@
           <a:bodyPr wrap="square" rtlCol="0" anchor="ctr"/>
           <a:lstStyle/>
           <a:p>
-            <a:pPr indent="0" marL="0">
+            <a:pPr marL="0" indent="0">
               <a:buNone/>
             </a:pPr>
             <a:r>
@@ -3649,7 +3365,7 @@
       </p:sp>
       <p:graphicFrame>
         <p:nvGraphicFramePr>
-          <p:cNvPr id="14" name="Chart 0" descr=""/>
+          <p:cNvPr id="14" name="Chart 0"/>
           <p:cNvGraphicFramePr/>
           <p:nvPr/>
         </p:nvGraphicFramePr>
@@ -3657,9 +3373,9 @@
           <a:off x="7955280" y="1097280"/>
           <a:ext cx="4023360" cy="4937760"/>
         </p:xfrm>
-        <a:graphic xmlns:a="http://schemas.openxmlformats.org/drawingml/2006/main">
+        <a:graphic>
           <a:graphicData uri="http://schemas.openxmlformats.org/drawingml/2006/chart">
-            <c:chart xmlns:c="http://schemas.openxmlformats.org/drawingml/2006/chart" r:id="rId1"/>
+            <c:chart xmlns:c="http://schemas.openxmlformats.org/drawingml/2006/chart" xmlns:r="http://schemas.openxmlformats.org/officeDocument/2006/relationships" r:id="rId3"/>
           </a:graphicData>
         </a:graphic>
       </p:graphicFrame>
@@ -3679,6 +3395,7 @@
         <a:solidFill>
           <a:srgbClr val="FFFFFF"/>
         </a:solidFill>
+        <a:effectLst/>
       </p:bgPr>
     </p:bg>
     <p:spTree>
@@ -3716,7 +3433,7 @@
           <a:bodyPr wrap="square" rtlCol="0" anchor="ctr"/>
           <a:lstStyle/>
           <a:p>
-            <a:pPr algn="ctr" indent="0" marL="0">
+            <a:pPr marL="0" indent="0" algn="ctr">
               <a:buNone/>
             </a:pPr>
             <a:r>
@@ -3755,11 +3472,11 @@
           <a:bodyPr wrap="square" rtlCol="0" anchor="ctr"/>
           <a:lstStyle/>
           <a:p>
-            <a:pPr indent="0" marL="0">
+            <a:pPr marL="0" indent="0">
               <a:buNone/>
             </a:pPr>
             <a:r>
-              <a:rPr lang="en-US" sz="1100" b="1" spc="200" kern="0" dirty="0">
+              <a:rPr lang="en-US" sz="1100" b="1" kern="0" spc="200" dirty="0">
                 <a:solidFill>
                   <a:srgbClr val="0E8A78"/>
                 </a:solidFill>
@@ -3794,7 +3511,7 @@
           <a:bodyPr wrap="square" rtlCol="0" anchor="ctr"/>
           <a:lstStyle/>
           <a:p>
-            <a:pPr algn="r" indent="0" marL="0">
+            <a:pPr marL="0" indent="0" algn="r">
               <a:buNone/>
             </a:pPr>
             <a:r>
@@ -3833,7 +3550,7 @@
           <a:bodyPr wrap="square" rtlCol="0" anchor="ctr"/>
           <a:lstStyle/>
           <a:p>
-            <a:pPr indent="0" marL="0">
+            <a:pPr marL="0" indent="0">
               <a:buNone/>
             </a:pPr>
             <a:r>
@@ -3872,7 +3589,7 @@
           <a:bodyPr wrap="square" rtlCol="0" anchor="ctr"/>
           <a:lstStyle/>
           <a:p>
-            <a:pPr indent="0" marL="0">
+            <a:pPr marL="0" indent="0">
               <a:lnSpc>
                 <a:spcPct val="105000"/>
               </a:lnSpc>
@@ -3887,7 +3604,7 @@
                 <a:ea typeface="Calibri" pitchFamily="34" charset="-122"/>
                 <a:cs typeface="Calibri" pitchFamily="34" charset="-120"/>
               </a:rPr>
-              <a:t>Churn is predictable, explainable, and financially material — the next step is targeted retention action.</a:t>
+              <a:t>Churn is predictable, explainable, and financially material — the next step is to take targeted retention action.</a:t>
             </a:r>
             <a:endParaRPr lang="en-US" sz="1700" dirty="0"/>
           </a:p>
@@ -3912,13 +3629,20 @@
           </a:solidFill>
           <a:ln/>
           <a:effectLst>
-            <a:outerShdw sx="100000" sy="100000" kx="0" ky="0" algn="bl" rotWithShape="0" blurRad="88900" dist="38100" dir="5400000">
+            <a:outerShdw blurRad="88900" dist="38100" dir="5400000" algn="bl" rotWithShape="0">
               <a:srgbClr val="000000">
                 <a:alpha val="12000"/>
               </a:srgbClr>
             </a:outerShdw>
           </a:effectLst>
         </p:spPr>
+        <p:txBody>
+          <a:bodyPr/>
+          <a:lstStyle/>
+          <a:p>
+            <a:endParaRPr lang="en-US"/>
+          </a:p>
+        </p:txBody>
       </p:sp>
       <p:sp>
         <p:nvSpPr>
@@ -3941,7 +3665,7 @@
           <a:bodyPr wrap="square" rtlCol="0" anchor="ctr"/>
           <a:lstStyle/>
           <a:p>
-            <a:pPr indent="0" marL="0">
+            <a:pPr marL="0" indent="0">
               <a:buNone/>
             </a:pPr>
             <a:r>
@@ -3978,6 +3702,13 @@
           </a:solidFill>
           <a:ln/>
         </p:spPr>
+        <p:txBody>
+          <a:bodyPr/>
+          <a:lstStyle/>
+          <a:p>
+            <a:endParaRPr lang="en-US"/>
+          </a:p>
+        </p:txBody>
       </p:sp>
       <p:sp>
         <p:nvSpPr>
@@ -4000,7 +3731,7 @@
           <a:bodyPr wrap="square" rtlCol="0" anchor="ctr"/>
           <a:lstStyle/>
           <a:p>
-            <a:pPr indent="0" marL="0">
+            <a:pPr marL="0" indent="0">
               <a:buNone/>
             </a:pPr>
             <a:r>
@@ -4014,9 +3745,6 @@
               </a:rPr>
               <a:t>Low engagement</a:t>
             </a:r>
-            <a:pPr indent="0" marL="0">
-              <a:buNone/>
-            </a:pPr>
             <a:r>
               <a:rPr lang="en-US" sz="1350" dirty="0">
                 <a:solidFill>
@@ -4051,6 +3779,13 @@
           </a:solidFill>
           <a:ln/>
         </p:spPr>
+        <p:txBody>
+          <a:bodyPr/>
+          <a:lstStyle/>
+          <a:p>
+            <a:endParaRPr lang="en-US"/>
+          </a:p>
+        </p:txBody>
       </p:sp>
       <p:sp>
         <p:nvSpPr>
@@ -4073,7 +3808,7 @@
           <a:bodyPr wrap="square" rtlCol="0" anchor="ctr"/>
           <a:lstStyle/>
           <a:p>
-            <a:pPr indent="0" marL="0">
+            <a:pPr marL="0" indent="0">
               <a:buNone/>
             </a:pPr>
             <a:r>
@@ -4087,9 +3822,6 @@
               </a:rPr>
               <a:t>Poor experience</a:t>
             </a:r>
-            <a:pPr indent="0" marL="0">
-              <a:buNone/>
-            </a:pPr>
             <a:r>
               <a:rPr lang="en-US" sz="1350" dirty="0">
                 <a:solidFill>
@@ -4124,6 +3856,13 @@
           </a:solidFill>
           <a:ln/>
         </p:spPr>
+        <p:txBody>
+          <a:bodyPr/>
+          <a:lstStyle/>
+          <a:p>
+            <a:endParaRPr lang="en-US"/>
+          </a:p>
+        </p:txBody>
       </p:sp>
       <p:sp>
         <p:nvSpPr>
@@ -4146,7 +3885,7 @@
           <a:bodyPr wrap="square" rtlCol="0" anchor="ctr"/>
           <a:lstStyle/>
           <a:p>
-            <a:pPr indent="0" marL="0">
+            <a:pPr marL="0" indent="0">
               <a:buNone/>
             </a:pPr>
             <a:r>
@@ -4183,13 +3922,20 @@
           </a:solidFill>
           <a:ln/>
           <a:effectLst>
-            <a:outerShdw sx="100000" sy="100000" kx="0" ky="0" algn="bl" rotWithShape="0" blurRad="88900" dist="38100" dir="5400000">
+            <a:outerShdw blurRad="88900" dist="38100" dir="5400000" algn="bl" rotWithShape="0">
               <a:srgbClr val="000000">
                 <a:alpha val="12000"/>
               </a:srgbClr>
             </a:outerShdw>
           </a:effectLst>
         </p:spPr>
+        <p:txBody>
+          <a:bodyPr/>
+          <a:lstStyle/>
+          <a:p>
+            <a:endParaRPr lang="en-US"/>
+          </a:p>
+        </p:txBody>
       </p:sp>
       <p:sp>
         <p:nvSpPr>
@@ -4212,7 +3958,7 @@
           <a:bodyPr wrap="square" rtlCol="0" anchor="ctr"/>
           <a:lstStyle/>
           <a:p>
-            <a:pPr indent="0" marL="0">
+            <a:pPr marL="0" indent="0">
               <a:buNone/>
             </a:pPr>
             <a:r>
@@ -4251,7 +3997,7 @@
           <a:bodyPr wrap="square" rtlCol="0" anchor="ctr"/>
           <a:lstStyle/>
           <a:p>
-            <a:pPr indent="0" marL="0">
+            <a:pPr marL="0" indent="0">
               <a:buNone/>
             </a:pPr>
             <a:r>
@@ -4290,7 +4036,7 @@
           <a:bodyPr wrap="square" rtlCol="0" anchor="ctr"/>
           <a:lstStyle/>
           <a:p>
-            <a:pPr indent="0" marL="0">
+            <a:pPr marL="0" indent="0">
               <a:lnSpc>
                 <a:spcPct val="105000"/>
               </a:lnSpc>
@@ -4332,7 +4078,7 @@
           <a:bodyPr wrap="square" rtlCol="0" anchor="ctr"/>
           <a:lstStyle/>
           <a:p>
-            <a:pPr indent="0" marL="0">
+            <a:pPr marL="0" indent="0">
               <a:lnSpc>
                 <a:spcPct val="105000"/>
               </a:lnSpc>
@@ -4372,13 +4118,20 @@
           </a:solidFill>
           <a:ln/>
           <a:effectLst>
-            <a:outerShdw sx="100000" sy="100000" kx="0" ky="0" algn="bl" rotWithShape="0" blurRad="88900" dist="38100" dir="5400000">
+            <a:outerShdw blurRad="88900" dist="38100" dir="5400000" algn="bl" rotWithShape="0">
               <a:srgbClr val="000000">
                 <a:alpha val="12000"/>
               </a:srgbClr>
             </a:outerShdw>
           </a:effectLst>
         </p:spPr>
+        <p:txBody>
+          <a:bodyPr/>
+          <a:lstStyle/>
+          <a:p>
+            <a:endParaRPr lang="en-US"/>
+          </a:p>
+        </p:txBody>
       </p:sp>
       <p:sp>
         <p:nvSpPr>
@@ -4401,7 +4154,7 @@
           <a:bodyPr wrap="square" rtlCol="0" anchor="ctr"/>
           <a:lstStyle/>
           <a:p>
-            <a:pPr indent="0" marL="0">
+            <a:pPr marL="0" indent="0">
               <a:buNone/>
             </a:pPr>
             <a:r>
@@ -4438,6 +4191,13 @@
           </a:solidFill>
           <a:ln/>
         </p:spPr>
+        <p:txBody>
+          <a:bodyPr/>
+          <a:lstStyle/>
+          <a:p>
+            <a:endParaRPr lang="en-US"/>
+          </a:p>
+        </p:txBody>
       </p:sp>
       <p:sp>
         <p:nvSpPr>
@@ -4460,7 +4220,7 @@
           <a:bodyPr wrap="square" rtlCol="0" anchor="ctr"/>
           <a:lstStyle/>
           <a:p>
-            <a:pPr indent="0" marL="0">
+            <a:pPr marL="0" indent="0">
               <a:buNone/>
             </a:pPr>
             <a:r>
@@ -4497,6 +4257,13 @@
           </a:solidFill>
           <a:ln/>
         </p:spPr>
+        <p:txBody>
+          <a:bodyPr/>
+          <a:lstStyle/>
+          <a:p>
+            <a:endParaRPr lang="en-US"/>
+          </a:p>
+        </p:txBody>
       </p:sp>
       <p:sp>
         <p:nvSpPr>
@@ -4519,7 +4286,7 @@
           <a:bodyPr wrap="square" rtlCol="0" anchor="ctr"/>
           <a:lstStyle/>
           <a:p>
-            <a:pPr indent="0" marL="0">
+            <a:pPr marL="0" indent="0">
               <a:buNone/>
             </a:pPr>
             <a:r>
@@ -4556,6 +4323,13 @@
           </a:solidFill>
           <a:ln/>
         </p:spPr>
+        <p:txBody>
+          <a:bodyPr/>
+          <a:lstStyle/>
+          <a:p>
+            <a:endParaRPr lang="en-US"/>
+          </a:p>
+        </p:txBody>
       </p:sp>
       <p:sp>
         <p:nvSpPr>
@@ -4578,7 +4352,7 @@
           <a:bodyPr wrap="square" rtlCol="0" anchor="ctr"/>
           <a:lstStyle/>
           <a:p>
-            <a:pPr indent="0" marL="0">
+            <a:pPr marL="0" indent="0">
               <a:buNone/>
             </a:pPr>
             <a:r>
@@ -4617,7 +4391,7 @@
           <a:bodyPr wrap="square" rtlCol="0" anchor="ctr"/>
           <a:lstStyle/>
           <a:p>
-            <a:pPr indent="0" marL="0">
+            <a:pPr marL="0" indent="0">
               <a:lnSpc>
                 <a:spcPct val="105000"/>
               </a:lnSpc>
@@ -4634,12 +4408,6 @@
               </a:rPr>
               <a:t>Decision request:  </a:t>
             </a:r>
-            <a:pPr indent="0" marL="0">
-              <a:lnSpc>
-                <a:spcPct val="105000"/>
-              </a:lnSpc>
-              <a:buNone/>
-            </a:pPr>
             <a:r>
               <a:rPr lang="en-US" sz="1550" dirty="0">
                 <a:solidFill>
@@ -4676,7 +4444,7 @@
           <a:bodyPr wrap="square" rtlCol="0" anchor="ctr"/>
           <a:lstStyle/>
           <a:p>
-            <a:pPr indent="0" marL="0">
+            <a:pPr marL="0" indent="0">
               <a:buNone/>
             </a:pPr>
             <a:r>
@@ -4710,6 +4478,7 @@
         <a:solidFill>
           <a:srgbClr val="FFFFFF"/>
         </a:solidFill>
+        <a:effectLst/>
       </p:bgPr>
     </p:bg>
     <p:spTree>
@@ -4747,7 +4516,7 @@
           <a:bodyPr wrap="square" rtlCol="0" anchor="ctr"/>
           <a:lstStyle/>
           <a:p>
-            <a:pPr algn="ctr" indent="0" marL="0">
+            <a:pPr marL="0" indent="0" algn="ctr">
               <a:buNone/>
             </a:pPr>
             <a:r>
@@ -4786,11 +4555,11 @@
           <a:bodyPr wrap="square" rtlCol="0" anchor="ctr"/>
           <a:lstStyle/>
           <a:p>
-            <a:pPr indent="0" marL="0">
+            <a:pPr marL="0" indent="0">
               <a:buNone/>
             </a:pPr>
             <a:r>
-              <a:rPr lang="en-US" sz="1100" b="1" spc="200" kern="0" dirty="0">
+              <a:rPr lang="en-US" sz="1100" b="1" kern="0" spc="200" dirty="0">
                 <a:solidFill>
                   <a:srgbClr val="0E8A78"/>
                 </a:solidFill>
@@ -4825,7 +4594,7 @@
           <a:bodyPr wrap="square" rtlCol="0" anchor="ctr"/>
           <a:lstStyle/>
           <a:p>
-            <a:pPr algn="r" indent="0" marL="0">
+            <a:pPr marL="0" indent="0" algn="r">
               <a:buNone/>
             </a:pPr>
             <a:r>
@@ -4864,7 +4633,7 @@
           <a:bodyPr wrap="square" rtlCol="0" anchor="ctr"/>
           <a:lstStyle/>
           <a:p>
-            <a:pPr indent="0" marL="0">
+            <a:pPr marL="0" indent="0">
               <a:buNone/>
             </a:pPr>
             <a:r>
@@ -4903,7 +4672,7 @@
           <a:bodyPr wrap="square" rtlCol="0" anchor="ctr"/>
           <a:lstStyle/>
           <a:p>
-            <a:pPr indent="0" marL="0">
+            <a:pPr marL="0" indent="0">
               <a:lnSpc>
                 <a:spcPct val="105000"/>
               </a:lnSpc>
@@ -4943,13 +4712,20 @@
           </a:solidFill>
           <a:ln/>
           <a:effectLst>
-            <a:outerShdw sx="100000" sy="100000" kx="0" ky="0" algn="bl" rotWithShape="0" blurRad="88900" dist="38100" dir="5400000">
+            <a:outerShdw blurRad="88900" dist="38100" dir="5400000" algn="bl" rotWithShape="0">
               <a:srgbClr val="000000">
                 <a:alpha val="12000"/>
               </a:srgbClr>
             </a:outerShdw>
           </a:effectLst>
         </p:spPr>
+        <p:txBody>
+          <a:bodyPr/>
+          <a:lstStyle/>
+          <a:p>
+            <a:endParaRPr lang="en-US"/>
+          </a:p>
+        </p:txBody>
       </p:sp>
       <p:sp>
         <p:nvSpPr>
@@ -4970,6 +4746,13 @@
           </a:solidFill>
           <a:ln/>
         </p:spPr>
+        <p:txBody>
+          <a:bodyPr/>
+          <a:lstStyle/>
+          <a:p>
+            <a:endParaRPr lang="en-US"/>
+          </a:p>
+        </p:txBody>
       </p:sp>
       <p:sp>
         <p:nvSpPr>
@@ -4992,7 +4775,7 @@
           <a:bodyPr wrap="square" rtlCol="0" anchor="ctr"/>
           <a:lstStyle/>
           <a:p>
-            <a:pPr algn="ctr" indent="0" marL="0">
+            <a:pPr marL="0" indent="0" algn="ctr">
               <a:buNone/>
             </a:pPr>
             <a:r>
@@ -5031,7 +4814,7 @@
           <a:bodyPr wrap="square" rtlCol="0" anchor="ctr"/>
           <a:lstStyle/>
           <a:p>
-            <a:pPr indent="0" marL="0">
+            <a:pPr marL="0" indent="0">
               <a:buNone/>
             </a:pPr>
             <a:r>
@@ -5070,7 +4853,7 @@
           <a:bodyPr wrap="square" rtlCol="0" anchor="ctr"/>
           <a:lstStyle/>
           <a:p>
-            <a:pPr indent="0" marL="0">
+            <a:pPr marL="0" indent="0">
               <a:lnSpc>
                 <a:spcPct val="102000"/>
               </a:lnSpc>
@@ -5112,7 +4895,7 @@
           <a:bodyPr wrap="square" rtlCol="0" anchor="ctr"/>
           <a:lstStyle/>
           <a:p>
-            <a:pPr indent="0" marL="0">
+            <a:pPr marL="0" indent="0">
               <a:buNone/>
             </a:pPr>
             <a:r>
@@ -5151,7 +4934,7 @@
           <a:bodyPr wrap="square" rtlCol="0" anchor="ctr"/>
           <a:lstStyle/>
           <a:p>
-            <a:pPr algn="ctr" indent="0" marL="0">
+            <a:pPr marL="0" indent="0" algn="ctr">
               <a:buNone/>
             </a:pPr>
             <a:r>
@@ -5188,13 +4971,20 @@
           </a:solidFill>
           <a:ln/>
           <a:effectLst>
-            <a:outerShdw sx="100000" sy="100000" kx="0" ky="0" algn="bl" rotWithShape="0" blurRad="88900" dist="38100" dir="5400000">
+            <a:outerShdw blurRad="88900" dist="38100" dir="5400000" algn="bl" rotWithShape="0">
               <a:srgbClr val="000000">
                 <a:alpha val="12000"/>
               </a:srgbClr>
             </a:outerShdw>
           </a:effectLst>
         </p:spPr>
+        <p:txBody>
+          <a:bodyPr/>
+          <a:lstStyle/>
+          <a:p>
+            <a:endParaRPr lang="en-US"/>
+          </a:p>
+        </p:txBody>
       </p:sp>
       <p:sp>
         <p:nvSpPr>
@@ -5215,6 +5005,13 @@
           </a:solidFill>
           <a:ln/>
         </p:spPr>
+        <p:txBody>
+          <a:bodyPr/>
+          <a:lstStyle/>
+          <a:p>
+            <a:endParaRPr lang="en-US"/>
+          </a:p>
+        </p:txBody>
       </p:sp>
       <p:sp>
         <p:nvSpPr>
@@ -5237,7 +5034,7 @@
           <a:bodyPr wrap="square" rtlCol="0" anchor="ctr"/>
           <a:lstStyle/>
           <a:p>
-            <a:pPr algn="ctr" indent="0" marL="0">
+            <a:pPr marL="0" indent="0" algn="ctr">
               <a:buNone/>
             </a:pPr>
             <a:r>
@@ -5276,7 +5073,7 @@
           <a:bodyPr wrap="square" rtlCol="0" anchor="ctr"/>
           <a:lstStyle/>
           <a:p>
-            <a:pPr indent="0" marL="0">
+            <a:pPr marL="0" indent="0">
               <a:buNone/>
             </a:pPr>
             <a:r>
@@ -5315,7 +5112,7 @@
           <a:bodyPr wrap="square" rtlCol="0" anchor="ctr"/>
           <a:lstStyle/>
           <a:p>
-            <a:pPr indent="0" marL="0">
+            <a:pPr marL="0" indent="0">
               <a:lnSpc>
                 <a:spcPct val="102000"/>
               </a:lnSpc>
@@ -5357,7 +5154,7 @@
           <a:bodyPr wrap="square" rtlCol="0" anchor="ctr"/>
           <a:lstStyle/>
           <a:p>
-            <a:pPr indent="0" marL="0">
+            <a:pPr marL="0" indent="0">
               <a:buNone/>
             </a:pPr>
             <a:r>
@@ -5396,7 +5193,7 @@
           <a:bodyPr wrap="square" rtlCol="0" anchor="ctr"/>
           <a:lstStyle/>
           <a:p>
-            <a:pPr algn="ctr" indent="0" marL="0">
+            <a:pPr marL="0" indent="0" algn="ctr">
               <a:buNone/>
             </a:pPr>
             <a:r>
@@ -5433,13 +5230,20 @@
           </a:solidFill>
           <a:ln/>
           <a:effectLst>
-            <a:outerShdw sx="100000" sy="100000" kx="0" ky="0" algn="bl" rotWithShape="0" blurRad="88900" dist="38100" dir="5400000">
+            <a:outerShdw blurRad="88900" dist="38100" dir="5400000" algn="bl" rotWithShape="0">
               <a:srgbClr val="000000">
                 <a:alpha val="12000"/>
               </a:srgbClr>
             </a:outerShdw>
           </a:effectLst>
         </p:spPr>
+        <p:txBody>
+          <a:bodyPr/>
+          <a:lstStyle/>
+          <a:p>
+            <a:endParaRPr lang="en-US"/>
+          </a:p>
+        </p:txBody>
       </p:sp>
       <p:sp>
         <p:nvSpPr>
@@ -5460,6 +5264,13 @@
           </a:solidFill>
           <a:ln/>
         </p:spPr>
+        <p:txBody>
+          <a:bodyPr/>
+          <a:lstStyle/>
+          <a:p>
+            <a:endParaRPr lang="en-US"/>
+          </a:p>
+        </p:txBody>
       </p:sp>
       <p:sp>
         <p:nvSpPr>
@@ -5482,7 +5293,7 @@
           <a:bodyPr wrap="square" rtlCol="0" anchor="ctr"/>
           <a:lstStyle/>
           <a:p>
-            <a:pPr algn="ctr" indent="0" marL="0">
+            <a:pPr marL="0" indent="0" algn="ctr">
               <a:buNone/>
             </a:pPr>
             <a:r>
@@ -5521,7 +5332,7 @@
           <a:bodyPr wrap="square" rtlCol="0" anchor="ctr"/>
           <a:lstStyle/>
           <a:p>
-            <a:pPr indent="0" marL="0">
+            <a:pPr marL="0" indent="0">
               <a:buNone/>
             </a:pPr>
             <a:r>
@@ -5560,7 +5371,7 @@
           <a:bodyPr wrap="square" rtlCol="0" anchor="ctr"/>
           <a:lstStyle/>
           <a:p>
-            <a:pPr indent="0" marL="0">
+            <a:pPr marL="0" indent="0">
               <a:lnSpc>
                 <a:spcPct val="102000"/>
               </a:lnSpc>
@@ -5602,7 +5413,7 @@
           <a:bodyPr wrap="square" rtlCol="0" anchor="ctr"/>
           <a:lstStyle/>
           <a:p>
-            <a:pPr indent="0" marL="0">
+            <a:pPr marL="0" indent="0">
               <a:buNone/>
             </a:pPr>
             <a:r>
@@ -5641,7 +5452,7 @@
           <a:bodyPr wrap="square" rtlCol="0" anchor="ctr"/>
           <a:lstStyle/>
           <a:p>
-            <a:pPr algn="ctr" indent="0" marL="0">
+            <a:pPr marL="0" indent="0" algn="ctr">
               <a:buNone/>
             </a:pPr>
             <a:r>
@@ -5678,13 +5489,20 @@
           </a:solidFill>
           <a:ln/>
           <a:effectLst>
-            <a:outerShdw sx="100000" sy="100000" kx="0" ky="0" algn="bl" rotWithShape="0" blurRad="88900" dist="38100" dir="5400000">
+            <a:outerShdw blurRad="88900" dist="38100" dir="5400000" algn="bl" rotWithShape="0">
               <a:srgbClr val="000000">
                 <a:alpha val="12000"/>
               </a:srgbClr>
             </a:outerShdw>
           </a:effectLst>
         </p:spPr>
+        <p:txBody>
+          <a:bodyPr/>
+          <a:lstStyle/>
+          <a:p>
+            <a:endParaRPr lang="en-US"/>
+          </a:p>
+        </p:txBody>
       </p:sp>
       <p:sp>
         <p:nvSpPr>
@@ -5705,6 +5523,13 @@
           </a:solidFill>
           <a:ln/>
         </p:spPr>
+        <p:txBody>
+          <a:bodyPr/>
+          <a:lstStyle/>
+          <a:p>
+            <a:endParaRPr lang="en-US"/>
+          </a:p>
+        </p:txBody>
       </p:sp>
       <p:sp>
         <p:nvSpPr>
@@ -5727,7 +5552,7 @@
           <a:bodyPr wrap="square" rtlCol="0" anchor="ctr"/>
           <a:lstStyle/>
           <a:p>
-            <a:pPr algn="ctr" indent="0" marL="0">
+            <a:pPr marL="0" indent="0" algn="ctr">
               <a:buNone/>
             </a:pPr>
             <a:r>
@@ -5766,7 +5591,7 @@
           <a:bodyPr wrap="square" rtlCol="0" anchor="ctr"/>
           <a:lstStyle/>
           <a:p>
-            <a:pPr indent="0" marL="0">
+            <a:pPr marL="0" indent="0">
               <a:buNone/>
             </a:pPr>
             <a:r>
@@ -5805,7 +5630,7 @@
           <a:bodyPr wrap="square" rtlCol="0" anchor="ctr"/>
           <a:lstStyle/>
           <a:p>
-            <a:pPr indent="0" marL="0">
+            <a:pPr marL="0" indent="0">
               <a:lnSpc>
                 <a:spcPct val="102000"/>
               </a:lnSpc>
@@ -5847,7 +5672,7 @@
           <a:bodyPr wrap="square" rtlCol="0" anchor="ctr"/>
           <a:lstStyle/>
           <a:p>
-            <a:pPr indent="0" marL="0">
+            <a:pPr marL="0" indent="0">
               <a:buNone/>
             </a:pPr>
             <a:r>
@@ -5886,7 +5711,7 @@
           <a:bodyPr wrap="square" rtlCol="0" anchor="ctr"/>
           <a:lstStyle/>
           <a:p>
-            <a:pPr algn="ctr" indent="0" marL="0">
+            <a:pPr marL="0" indent="0" algn="ctr">
               <a:buNone/>
             </a:pPr>
             <a:r>
@@ -5923,13 +5748,20 @@
           </a:solidFill>
           <a:ln/>
           <a:effectLst>
-            <a:outerShdw sx="100000" sy="100000" kx="0" ky="0" algn="bl" rotWithShape="0" blurRad="88900" dist="38100" dir="5400000">
+            <a:outerShdw blurRad="88900" dist="38100" dir="5400000" algn="bl" rotWithShape="0">
               <a:srgbClr val="000000">
                 <a:alpha val="12000"/>
               </a:srgbClr>
             </a:outerShdw>
           </a:effectLst>
         </p:spPr>
+        <p:txBody>
+          <a:bodyPr/>
+          <a:lstStyle/>
+          <a:p>
+            <a:endParaRPr lang="en-US"/>
+          </a:p>
+        </p:txBody>
       </p:sp>
       <p:sp>
         <p:nvSpPr>
@@ -5950,6 +5782,13 @@
           </a:solidFill>
           <a:ln/>
         </p:spPr>
+        <p:txBody>
+          <a:bodyPr/>
+          <a:lstStyle/>
+          <a:p>
+            <a:endParaRPr lang="en-US"/>
+          </a:p>
+        </p:txBody>
       </p:sp>
       <p:sp>
         <p:nvSpPr>
@@ -5972,7 +5811,7 @@
           <a:bodyPr wrap="square" rtlCol="0" anchor="ctr"/>
           <a:lstStyle/>
           <a:p>
-            <a:pPr algn="ctr" indent="0" marL="0">
+            <a:pPr marL="0" indent="0" algn="ctr">
               <a:buNone/>
             </a:pPr>
             <a:r>
@@ -6011,7 +5850,7 @@
           <a:bodyPr wrap="square" rtlCol="0" anchor="ctr"/>
           <a:lstStyle/>
           <a:p>
-            <a:pPr indent="0" marL="0">
+            <a:pPr marL="0" indent="0">
               <a:buNone/>
             </a:pPr>
             <a:r>
@@ -6050,7 +5889,7 @@
           <a:bodyPr wrap="square" rtlCol="0" anchor="ctr"/>
           <a:lstStyle/>
           <a:p>
-            <a:pPr indent="0" marL="0">
+            <a:pPr marL="0" indent="0">
               <a:lnSpc>
                 <a:spcPct val="102000"/>
               </a:lnSpc>
@@ -6092,7 +5931,7 @@
           <a:bodyPr wrap="square" rtlCol="0" anchor="ctr"/>
           <a:lstStyle/>
           <a:p>
-            <a:pPr indent="0" marL="0">
+            <a:pPr marL="0" indent="0">
               <a:buNone/>
             </a:pPr>
             <a:r>
@@ -6131,7 +5970,7 @@
           <a:bodyPr wrap="square" rtlCol="0" anchor="ctr"/>
           <a:lstStyle/>
           <a:p>
-            <a:pPr algn="ctr" indent="0" marL="0">
+            <a:pPr marL="0" indent="0" algn="ctr">
               <a:buNone/>
             </a:pPr>
             <a:r>
@@ -6168,13 +6007,20 @@
           </a:solidFill>
           <a:ln/>
           <a:effectLst>
-            <a:outerShdw sx="100000" sy="100000" kx="0" ky="0" algn="bl" rotWithShape="0" blurRad="88900" dist="38100" dir="5400000">
+            <a:outerShdw blurRad="88900" dist="38100" dir="5400000" algn="bl" rotWithShape="0">
               <a:srgbClr val="000000">
                 <a:alpha val="12000"/>
               </a:srgbClr>
             </a:outerShdw>
           </a:effectLst>
         </p:spPr>
+        <p:txBody>
+          <a:bodyPr/>
+          <a:lstStyle/>
+          <a:p>
+            <a:endParaRPr lang="en-US"/>
+          </a:p>
+        </p:txBody>
       </p:sp>
       <p:sp>
         <p:nvSpPr>
@@ -6195,6 +6041,13 @@
           </a:solidFill>
           <a:ln/>
         </p:spPr>
+        <p:txBody>
+          <a:bodyPr/>
+          <a:lstStyle/>
+          <a:p>
+            <a:endParaRPr lang="en-US"/>
+          </a:p>
+        </p:txBody>
       </p:sp>
       <p:sp>
         <p:nvSpPr>
@@ -6217,7 +6070,7 @@
           <a:bodyPr wrap="square" rtlCol="0" anchor="ctr"/>
           <a:lstStyle/>
           <a:p>
-            <a:pPr algn="ctr" indent="0" marL="0">
+            <a:pPr marL="0" indent="0" algn="ctr">
               <a:buNone/>
             </a:pPr>
             <a:r>
@@ -6256,7 +6109,7 @@
           <a:bodyPr wrap="square" rtlCol="0" anchor="ctr"/>
           <a:lstStyle/>
           <a:p>
-            <a:pPr indent="0" marL="0">
+            <a:pPr marL="0" indent="0">
               <a:buNone/>
             </a:pPr>
             <a:r>
@@ -6295,7 +6148,7 @@
           <a:bodyPr wrap="square" rtlCol="0" anchor="ctr"/>
           <a:lstStyle/>
           <a:p>
-            <a:pPr indent="0" marL="0">
+            <a:pPr marL="0" indent="0">
               <a:lnSpc>
                 <a:spcPct val="102000"/>
               </a:lnSpc>
@@ -6337,7 +6190,7 @@
           <a:bodyPr wrap="square" rtlCol="0" anchor="ctr"/>
           <a:lstStyle/>
           <a:p>
-            <a:pPr indent="0" marL="0">
+            <a:pPr marL="0" indent="0">
               <a:buNone/>
             </a:pPr>
             <a:r>
@@ -6376,7 +6229,7 @@
           <a:bodyPr wrap="square" rtlCol="0" anchor="ctr"/>
           <a:lstStyle/>
           <a:p>
-            <a:pPr indent="0" marL="0">
+            <a:pPr marL="0" indent="0">
               <a:buNone/>
             </a:pPr>
             <a:r>
@@ -6418,6 +6271,13 @@
             <a:tailEnd type="triangle"/>
           </a:ln>
         </p:spPr>
+        <p:txBody>
+          <a:bodyPr/>
+          <a:lstStyle/>
+          <a:p>
+            <a:endParaRPr lang="en-US"/>
+          </a:p>
+        </p:txBody>
       </p:sp>
       <p:sp>
         <p:nvSpPr>
@@ -6440,7 +6300,7 @@
           <a:bodyPr wrap="square" rtlCol="0" anchor="ctr"/>
           <a:lstStyle/>
           <a:p>
-            <a:pPr indent="0" marL="0">
+            <a:pPr marL="0" indent="0">
               <a:lnSpc>
                 <a:spcPct val="105000"/>
               </a:lnSpc>
@@ -6455,7 +6315,7 @@
                 <a:ea typeface="Calibri" pitchFamily="34" charset="-122"/>
                 <a:cs typeface="Calibri" pitchFamily="34" charset="-120"/>
               </a:rPr>
-              <a:t>Outreach outcomes and new behavior are logged back into the dataset so thresholds, features and models improve over time.</a:t>
+              <a:t>Outreach outcomes and new behavior are logged back into the dataset, so thresholds, features and models improve over time.</a:t>
             </a:r>
             <a:endParaRPr lang="en-US" sz="1400" dirty="0"/>
           </a:p>
@@ -6482,7 +6342,7 @@
           <a:bodyPr wrap="square" rtlCol="0" anchor="ctr"/>
           <a:lstStyle/>
           <a:p>
-            <a:pPr indent="0" marL="0">
+            <a:pPr marL="0" indent="0">
               <a:buNone/>
             </a:pPr>
             <a:r>
@@ -6516,6 +6376,7 @@
         <a:solidFill>
           <a:srgbClr val="FFFFFF"/>
         </a:solidFill>
+        <a:effectLst/>
       </p:bgPr>
     </p:bg>
     <p:spTree>
@@ -6553,7 +6414,7 @@
           <a:bodyPr wrap="square" rtlCol="0" anchor="ctr"/>
           <a:lstStyle/>
           <a:p>
-            <a:pPr algn="ctr" indent="0" marL="0">
+            <a:pPr marL="0" indent="0" algn="ctr">
               <a:buNone/>
             </a:pPr>
             <a:r>
@@ -6592,11 +6453,11 @@
           <a:bodyPr wrap="square" rtlCol="0" anchor="ctr"/>
           <a:lstStyle/>
           <a:p>
-            <a:pPr indent="0" marL="0">
+            <a:pPr marL="0" indent="0">
               <a:buNone/>
             </a:pPr>
             <a:r>
-              <a:rPr lang="en-US" sz="1100" b="1" spc="200" kern="0" dirty="0">
+              <a:rPr lang="en-US" sz="1100" b="1" kern="0" spc="200" dirty="0">
                 <a:solidFill>
                   <a:srgbClr val="0E8A78"/>
                 </a:solidFill>
@@ -6631,7 +6492,7 @@
           <a:bodyPr wrap="square" rtlCol="0" anchor="ctr"/>
           <a:lstStyle/>
           <a:p>
-            <a:pPr algn="r" indent="0" marL="0">
+            <a:pPr marL="0" indent="0" algn="r">
               <a:buNone/>
             </a:pPr>
             <a:r>
@@ -6670,7 +6531,7 @@
           <a:bodyPr wrap="square" rtlCol="0" anchor="ctr"/>
           <a:lstStyle/>
           <a:p>
-            <a:pPr indent="0" marL="0">
+            <a:pPr marL="0" indent="0">
               <a:buNone/>
             </a:pPr>
             <a:r>
@@ -6709,7 +6570,7 @@
           <a:bodyPr wrap="square" rtlCol="0" anchor="ctr"/>
           <a:lstStyle/>
           <a:p>
-            <a:pPr indent="0" marL="0">
+            <a:pPr marL="0" indent="0">
               <a:lnSpc>
                 <a:spcPct val="105000"/>
               </a:lnSpc>
@@ -6749,13 +6610,20 @@
           </a:solidFill>
           <a:ln/>
           <a:effectLst>
-            <a:outerShdw sx="100000" sy="100000" kx="0" ky="0" algn="bl" rotWithShape="0" blurRad="88900" dist="38100" dir="5400000">
+            <a:outerShdw blurRad="88900" dist="38100" dir="5400000" algn="bl" rotWithShape="0">
               <a:srgbClr val="000000">
                 <a:alpha val="12000"/>
               </a:srgbClr>
             </a:outerShdw>
           </a:effectLst>
         </p:spPr>
+        <p:txBody>
+          <a:bodyPr/>
+          <a:lstStyle/>
+          <a:p>
+            <a:endParaRPr lang="en-US"/>
+          </a:p>
+        </p:txBody>
       </p:sp>
       <p:sp>
         <p:nvSpPr>
@@ -6778,11 +6646,11 @@
           <a:bodyPr wrap="square" rtlCol="0" anchor="ctr"/>
           <a:lstStyle/>
           <a:p>
-            <a:pPr indent="0" marL="0">
+            <a:pPr marL="0" indent="0">
               <a:buNone/>
             </a:pPr>
             <a:r>
-              <a:rPr lang="en-US" sz="1100" b="1" spc="100" kern="0" dirty="0">
+              <a:rPr lang="en-US" sz="1100" b="1" kern="0" spc="100" dirty="0">
                 <a:solidFill>
                   <a:srgbClr val="CF463B"/>
                 </a:solidFill>
@@ -6817,7 +6685,7 @@
           <a:bodyPr wrap="square" rtlCol="0" anchor="ctr"/>
           <a:lstStyle/>
           <a:p>
-            <a:pPr indent="0" marL="0">
+            <a:pPr marL="0" indent="0">
               <a:buNone/>
             </a:pPr>
             <a:r>
@@ -6856,7 +6724,7 @@
           <a:bodyPr wrap="square" rtlCol="0" anchor="ctr"/>
           <a:lstStyle/>
           <a:p>
-            <a:pPr indent="0" marL="0">
+            <a:pPr marL="0" indent="0">
               <a:lnSpc>
                 <a:spcPct val="105000"/>
               </a:lnSpc>
@@ -6896,13 +6764,20 @@
           </a:solidFill>
           <a:ln/>
           <a:effectLst>
-            <a:outerShdw sx="100000" sy="100000" kx="0" ky="0" algn="bl" rotWithShape="0" blurRad="88900" dist="38100" dir="5400000">
+            <a:outerShdw blurRad="88900" dist="38100" dir="5400000" algn="bl" rotWithShape="0">
               <a:srgbClr val="000000">
                 <a:alpha val="12000"/>
               </a:srgbClr>
             </a:outerShdw>
           </a:effectLst>
         </p:spPr>
+        <p:txBody>
+          <a:bodyPr/>
+          <a:lstStyle/>
+          <a:p>
+            <a:endParaRPr lang="en-US"/>
+          </a:p>
+        </p:txBody>
       </p:sp>
       <p:sp>
         <p:nvSpPr>
@@ -6925,11 +6800,11 @@
           <a:bodyPr wrap="square" rtlCol="0" anchor="ctr"/>
           <a:lstStyle/>
           <a:p>
-            <a:pPr indent="0" marL="0">
+            <a:pPr marL="0" indent="0">
               <a:buNone/>
             </a:pPr>
             <a:r>
-              <a:rPr lang="en-US" sz="1100" b="1" spc="100" kern="0" dirty="0">
+              <a:rPr lang="en-US" sz="1100" b="1" kern="0" spc="100" dirty="0">
                 <a:solidFill>
                   <a:srgbClr val="0E8A78"/>
                 </a:solidFill>
@@ -6964,7 +6839,7 @@
           <a:bodyPr wrap="square" rtlCol="0" anchor="ctr"/>
           <a:lstStyle/>
           <a:p>
-            <a:pPr indent="0" marL="0">
+            <a:pPr marL="0" indent="0">
               <a:buNone/>
             </a:pPr>
             <a:r>
@@ -7003,7 +6878,7 @@
           <a:bodyPr wrap="square" rtlCol="0" anchor="ctr"/>
           <a:lstStyle/>
           <a:p>
-            <a:pPr indent="0" marL="0">
+            <a:pPr marL="0" indent="0">
               <a:lnSpc>
                 <a:spcPct val="105000"/>
               </a:lnSpc>
@@ -7043,13 +6918,20 @@
           </a:solidFill>
           <a:ln/>
           <a:effectLst>
-            <a:outerShdw sx="100000" sy="100000" kx="0" ky="0" algn="bl" rotWithShape="0" blurRad="88900" dist="38100" dir="5400000">
+            <a:outerShdw blurRad="88900" dist="38100" dir="5400000" algn="bl" rotWithShape="0">
               <a:srgbClr val="000000">
                 <a:alpha val="12000"/>
               </a:srgbClr>
             </a:outerShdw>
           </a:effectLst>
         </p:spPr>
+        <p:txBody>
+          <a:bodyPr/>
+          <a:lstStyle/>
+          <a:p>
+            <a:endParaRPr lang="en-US"/>
+          </a:p>
+        </p:txBody>
       </p:sp>
       <p:sp>
         <p:nvSpPr>
@@ -7072,11 +6954,11 @@
           <a:bodyPr wrap="square" rtlCol="0" anchor="ctr"/>
           <a:lstStyle/>
           <a:p>
-            <a:pPr indent="0" marL="0">
+            <a:pPr marL="0" indent="0">
               <a:buNone/>
             </a:pPr>
             <a:r>
-              <a:rPr lang="en-US" sz="1100" b="1" spc="100" kern="0" dirty="0">
+              <a:rPr lang="en-US" sz="1100" b="1" kern="0" spc="100" dirty="0">
                 <a:solidFill>
                   <a:srgbClr val="D9912B"/>
                 </a:solidFill>
@@ -7111,7 +6993,7 @@
           <a:bodyPr wrap="square" rtlCol="0" anchor="ctr"/>
           <a:lstStyle/>
           <a:p>
-            <a:pPr indent="0" marL="0">
+            <a:pPr marL="0" indent="0">
               <a:buNone/>
             </a:pPr>
             <a:r>
@@ -7150,7 +7032,7 @@
           <a:bodyPr wrap="square" rtlCol="0" anchor="ctr"/>
           <a:lstStyle/>
           <a:p>
-            <a:pPr indent="0" marL="0">
+            <a:pPr marL="0" indent="0">
               <a:lnSpc>
                 <a:spcPct val="105000"/>
               </a:lnSpc>
@@ -7192,7 +7074,7 @@
           <a:bodyPr wrap="square" rtlCol="0" anchor="ctr"/>
           <a:lstStyle/>
           <a:p>
-            <a:pPr indent="0" marL="0">
+            <a:pPr marL="0" indent="0">
               <a:buNone/>
             </a:pPr>
             <a:r>
@@ -7229,6 +7111,13 @@
           </a:solidFill>
           <a:ln/>
         </p:spPr>
+        <p:txBody>
+          <a:bodyPr/>
+          <a:lstStyle/>
+          <a:p>
+            <a:endParaRPr lang="en-US"/>
+          </a:p>
+        </p:txBody>
       </p:sp>
       <p:sp>
         <p:nvSpPr>
@@ -7251,7 +7140,7 @@
           <a:bodyPr wrap="square" rtlCol="0" anchor="ctr"/>
           <a:lstStyle/>
           <a:p>
-            <a:pPr indent="0" marL="0">
+            <a:pPr marL="0" indent="0">
               <a:buNone/>
             </a:pPr>
             <a:r>
@@ -7288,6 +7177,13 @@
           </a:solidFill>
           <a:ln/>
         </p:spPr>
+        <p:txBody>
+          <a:bodyPr/>
+          <a:lstStyle/>
+          <a:p>
+            <a:endParaRPr lang="en-US"/>
+          </a:p>
+        </p:txBody>
       </p:sp>
       <p:sp>
         <p:nvSpPr>
@@ -7310,7 +7206,7 @@
           <a:bodyPr wrap="square" rtlCol="0" anchor="ctr"/>
           <a:lstStyle/>
           <a:p>
-            <a:pPr indent="0" marL="0">
+            <a:pPr marL="0" indent="0">
               <a:buNone/>
             </a:pPr>
             <a:r>
@@ -7347,6 +7243,13 @@
           </a:solidFill>
           <a:ln/>
         </p:spPr>
+        <p:txBody>
+          <a:bodyPr/>
+          <a:lstStyle/>
+          <a:p>
+            <a:endParaRPr lang="en-US"/>
+          </a:p>
+        </p:txBody>
       </p:sp>
       <p:sp>
         <p:nvSpPr>
@@ -7369,7 +7272,7 @@
           <a:bodyPr wrap="square" rtlCol="0" anchor="ctr"/>
           <a:lstStyle/>
           <a:p>
-            <a:pPr indent="0" marL="0">
+            <a:pPr marL="0" indent="0">
               <a:buNone/>
             </a:pPr>
             <a:r>
@@ -7408,7 +7311,7 @@
           <a:bodyPr wrap="square" rtlCol="0" anchor="ctr"/>
           <a:lstStyle/>
           <a:p>
-            <a:pPr indent="0" marL="0">
+            <a:pPr marL="0" indent="0">
               <a:buNone/>
             </a:pPr>
             <a:r>
@@ -7422,9 +7325,6 @@
               </a:rPr>
               <a:t>Management question:  </a:t>
             </a:r>
-            <a:pPr indent="0" marL="0">
-              <a:buNone/>
-            </a:pPr>
             <a:r>
               <a:rPr lang="en-US" sz="1600" i="1" dirty="0">
                 <a:solidFill>
@@ -7461,7 +7361,7 @@
           <a:bodyPr wrap="square" rtlCol="0" anchor="ctr"/>
           <a:lstStyle/>
           <a:p>
-            <a:pPr indent="0" marL="0">
+            <a:pPr marL="0" indent="0">
               <a:buNone/>
             </a:pPr>
             <a:r>
@@ -7495,6 +7395,7 @@
         <a:solidFill>
           <a:srgbClr val="FFFFFF"/>
         </a:solidFill>
+        <a:effectLst/>
       </p:bgPr>
     </p:bg>
     <p:spTree>
@@ -7532,7 +7433,7 @@
           <a:bodyPr wrap="square" rtlCol="0" anchor="ctr"/>
           <a:lstStyle/>
           <a:p>
-            <a:pPr algn="ctr" indent="0" marL="0">
+            <a:pPr marL="0" indent="0" algn="ctr">
               <a:buNone/>
             </a:pPr>
             <a:r>
@@ -7571,11 +7472,11 @@
           <a:bodyPr wrap="square" rtlCol="0" anchor="ctr"/>
           <a:lstStyle/>
           <a:p>
-            <a:pPr indent="0" marL="0">
+            <a:pPr marL="0" indent="0">
               <a:buNone/>
             </a:pPr>
             <a:r>
-              <a:rPr lang="en-US" sz="1100" b="1" spc="200" kern="0" dirty="0">
+              <a:rPr lang="en-US" sz="1100" b="1" kern="0" spc="200" dirty="0">
                 <a:solidFill>
                   <a:srgbClr val="0E8A78"/>
                 </a:solidFill>
@@ -7610,7 +7511,7 @@
           <a:bodyPr wrap="square" rtlCol="0" anchor="ctr"/>
           <a:lstStyle/>
           <a:p>
-            <a:pPr algn="r" indent="0" marL="0">
+            <a:pPr marL="0" indent="0" algn="r">
               <a:buNone/>
             </a:pPr>
             <a:r>
@@ -7649,7 +7550,7 @@
           <a:bodyPr wrap="square" rtlCol="0" anchor="ctr"/>
           <a:lstStyle/>
           <a:p>
-            <a:pPr indent="0" marL="0">
+            <a:pPr marL="0" indent="0">
               <a:buNone/>
             </a:pPr>
             <a:r>
@@ -7688,7 +7589,7 @@
           <a:bodyPr wrap="square" rtlCol="0" anchor="ctr"/>
           <a:lstStyle/>
           <a:p>
-            <a:pPr indent="0" marL="0">
+            <a:pPr marL="0" indent="0">
               <a:lnSpc>
                 <a:spcPct val="105000"/>
               </a:lnSpc>
@@ -7711,7 +7612,7 @@
       </p:sp>
       <p:graphicFrame>
         <p:nvGraphicFramePr>
-          <p:cNvPr id="7" name="Chart 0" descr=""/>
+          <p:cNvPr id="7" name="Chart 0"/>
           <p:cNvGraphicFramePr/>
           <p:nvPr/>
         </p:nvGraphicFramePr>
@@ -7719,9 +7620,9 @@
           <a:off x="457200" y="2148840"/>
           <a:ext cx="6035040" cy="3566160"/>
         </p:xfrm>
-        <a:graphic xmlns:a="http://schemas.openxmlformats.org/drawingml/2006/main">
+        <a:graphic>
           <a:graphicData uri="http://schemas.openxmlformats.org/drawingml/2006/chart">
-            <c:chart xmlns:c="http://schemas.openxmlformats.org/drawingml/2006/chart" r:id="rId1"/>
+            <c:chart xmlns:c="http://schemas.openxmlformats.org/drawingml/2006/chart" xmlns:r="http://schemas.openxmlformats.org/officeDocument/2006/relationships" r:id="rId3"/>
           </a:graphicData>
         </a:graphic>
       </p:graphicFrame>
@@ -7744,6 +7645,13 @@
           </a:solidFill>
           <a:ln/>
         </p:spPr>
+        <p:txBody>
+          <a:bodyPr/>
+          <a:lstStyle/>
+          <a:p>
+            <a:endParaRPr lang="en-US"/>
+          </a:p>
+        </p:txBody>
       </p:sp>
       <p:sp>
         <p:nvSpPr>
@@ -7766,7 +7674,7 @@
           <a:bodyPr wrap="square" lIns="0" tIns="0" rIns="0" bIns="0" rtlCol="0" anchor="ctr"/>
           <a:lstStyle/>
           <a:p>
-            <a:pPr indent="0" marL="0">
+            <a:pPr marL="0" indent="0">
               <a:buNone/>
             </a:pPr>
             <a:r>
@@ -7805,11 +7713,11 @@
           <a:bodyPr wrap="square" lIns="0" tIns="0" rIns="0" bIns="0" rtlCol="0" anchor="ctr"/>
           <a:lstStyle/>
           <a:p>
-            <a:pPr indent="0" marL="0">
+            <a:pPr marL="0" indent="0">
               <a:buNone/>
             </a:pPr>
             <a:r>
-              <a:rPr lang="en-US" sz="1100" b="1" spc="100" kern="0" dirty="0">
+              <a:rPr lang="en-US" sz="1100" b="1" kern="0" spc="100" dirty="0">
                 <a:solidFill>
                   <a:srgbClr val="0E8A78"/>
                 </a:solidFill>
@@ -7844,7 +7752,7 @@
           <a:bodyPr wrap="square" lIns="0" tIns="0" rIns="0" bIns="0" rtlCol="0" anchor="ctr"/>
           <a:lstStyle/>
           <a:p>
-            <a:pPr indent="0" marL="0">
+            <a:pPr marL="0" indent="0">
               <a:buNone/>
             </a:pPr>
             <a:r>
@@ -7881,6 +7789,13 @@
           </a:solidFill>
           <a:ln/>
         </p:spPr>
+        <p:txBody>
+          <a:bodyPr/>
+          <a:lstStyle/>
+          <a:p>
+            <a:endParaRPr lang="en-US"/>
+          </a:p>
+        </p:txBody>
       </p:sp>
       <p:sp>
         <p:nvSpPr>
@@ -7903,7 +7818,7 @@
           <a:bodyPr wrap="square" lIns="0" tIns="0" rIns="0" bIns="0" rtlCol="0" anchor="ctr"/>
           <a:lstStyle/>
           <a:p>
-            <a:pPr indent="0" marL="0">
+            <a:pPr marL="0" indent="0">
               <a:buNone/>
             </a:pPr>
             <a:r>
@@ -7942,11 +7857,11 @@
           <a:bodyPr wrap="square" lIns="0" tIns="0" rIns="0" bIns="0" rtlCol="0" anchor="ctr"/>
           <a:lstStyle/>
           <a:p>
-            <a:pPr indent="0" marL="0">
+            <a:pPr marL="0" indent="0">
               <a:buNone/>
             </a:pPr>
             <a:r>
-              <a:rPr lang="en-US" sz="1100" b="1" spc="100" kern="0" dirty="0">
+              <a:rPr lang="en-US" sz="1100" b="1" kern="0" spc="100" dirty="0">
                 <a:solidFill>
                   <a:srgbClr val="16263F"/>
                 </a:solidFill>
@@ -7981,7 +7896,7 @@
           <a:bodyPr wrap="square" lIns="0" tIns="0" rIns="0" bIns="0" rtlCol="0" anchor="ctr"/>
           <a:lstStyle/>
           <a:p>
-            <a:pPr indent="0" marL="0">
+            <a:pPr marL="0" indent="0">
               <a:buNone/>
             </a:pPr>
             <a:r>
@@ -8018,6 +7933,13 @@
           </a:solidFill>
           <a:ln/>
         </p:spPr>
+        <p:txBody>
+          <a:bodyPr/>
+          <a:lstStyle/>
+          <a:p>
+            <a:endParaRPr lang="en-US"/>
+          </a:p>
+        </p:txBody>
       </p:sp>
       <p:sp>
         <p:nvSpPr>
@@ -8040,7 +7962,7 @@
           <a:bodyPr wrap="square" lIns="0" tIns="0" rIns="0" bIns="0" rtlCol="0" anchor="ctr"/>
           <a:lstStyle/>
           <a:p>
-            <a:pPr indent="0" marL="0">
+            <a:pPr marL="0" indent="0">
               <a:buNone/>
             </a:pPr>
             <a:r>
@@ -8079,11 +8001,11 @@
           <a:bodyPr wrap="square" lIns="0" tIns="0" rIns="0" bIns="0" rtlCol="0" anchor="ctr"/>
           <a:lstStyle/>
           <a:p>
-            <a:pPr indent="0" marL="0">
+            <a:pPr marL="0" indent="0">
               <a:buNone/>
             </a:pPr>
             <a:r>
-              <a:rPr lang="en-US" sz="1100" b="1" spc="100" kern="0" dirty="0">
+              <a:rPr lang="en-US" sz="1100" b="1" kern="0" spc="100" dirty="0">
                 <a:solidFill>
                   <a:srgbClr val="D9912B"/>
                 </a:solidFill>
@@ -8118,7 +8040,7 @@
           <a:bodyPr wrap="square" lIns="0" tIns="0" rIns="0" bIns="0" rtlCol="0" anchor="ctr"/>
           <a:lstStyle/>
           <a:p>
-            <a:pPr indent="0" marL="0">
+            <a:pPr marL="0" indent="0">
               <a:buNone/>
             </a:pPr>
             <a:r>
@@ -8155,6 +8077,13 @@
           </a:solidFill>
           <a:ln/>
         </p:spPr>
+        <p:txBody>
+          <a:bodyPr/>
+          <a:lstStyle/>
+          <a:p>
+            <a:endParaRPr lang="en-US"/>
+          </a:p>
+        </p:txBody>
       </p:sp>
       <p:sp>
         <p:nvSpPr>
@@ -8177,7 +8106,7 @@
           <a:bodyPr wrap="square" lIns="0" tIns="0" rIns="0" bIns="0" rtlCol="0" anchor="ctr"/>
           <a:lstStyle/>
           <a:p>
-            <a:pPr indent="0" marL="0">
+            <a:pPr marL="0" indent="0">
               <a:buNone/>
             </a:pPr>
             <a:r>
@@ -8216,11 +8145,11 @@
           <a:bodyPr wrap="square" lIns="0" tIns="0" rIns="0" bIns="0" rtlCol="0" anchor="ctr"/>
           <a:lstStyle/>
           <a:p>
-            <a:pPr indent="0" marL="0">
+            <a:pPr marL="0" indent="0">
               <a:buNone/>
             </a:pPr>
             <a:r>
-              <a:rPr lang="en-US" sz="1100" b="1" spc="100" kern="0" dirty="0">
+              <a:rPr lang="en-US" sz="1100" b="1" kern="0" spc="100" dirty="0">
                 <a:solidFill>
                   <a:srgbClr val="0E8A78"/>
                 </a:solidFill>
@@ -8255,7 +8184,7 @@
           <a:bodyPr wrap="square" lIns="0" tIns="0" rIns="0" bIns="0" rtlCol="0" anchor="ctr"/>
           <a:lstStyle/>
           <a:p>
-            <a:pPr indent="0" marL="0">
+            <a:pPr marL="0" indent="0">
               <a:buNone/>
             </a:pPr>
             <a:r>
@@ -8294,7 +8223,7 @@
           <a:bodyPr wrap="square" rtlCol="0" anchor="ctr"/>
           <a:lstStyle/>
           <a:p>
-            <a:pPr indent="0" marL="0">
+            <a:pPr marL="0" indent="0">
               <a:buNone/>
             </a:pPr>
             <a:r>
@@ -8308,9 +8237,6 @@
               </a:rPr>
               <a:t>Interpretation:  </a:t>
             </a:r>
-            <a:pPr indent="0" marL="0">
-              <a:buNone/>
-            </a:pPr>
             <a:r>
               <a:rPr lang="en-US" sz="1500" dirty="0">
                 <a:solidFill>
@@ -8347,7 +8273,7 @@
           <a:bodyPr wrap="square" rtlCol="0" anchor="ctr"/>
           <a:lstStyle/>
           <a:p>
-            <a:pPr indent="0" marL="0">
+            <a:pPr marL="0" indent="0">
               <a:buNone/>
             </a:pPr>
             <a:r>
@@ -8381,6 +8307,7 @@
         <a:solidFill>
           <a:srgbClr val="FFFFFF"/>
         </a:solidFill>
+        <a:effectLst/>
       </p:bgPr>
     </p:bg>
     <p:spTree>
@@ -8418,7 +8345,7 @@
           <a:bodyPr wrap="square" rtlCol="0" anchor="ctr"/>
           <a:lstStyle/>
           <a:p>
-            <a:pPr algn="ctr" indent="0" marL="0">
+            <a:pPr marL="0" indent="0" algn="ctr">
               <a:buNone/>
             </a:pPr>
             <a:r>
@@ -8457,11 +8384,11 @@
           <a:bodyPr wrap="square" rtlCol="0" anchor="ctr"/>
           <a:lstStyle/>
           <a:p>
-            <a:pPr indent="0" marL="0">
+            <a:pPr marL="0" indent="0">
               <a:buNone/>
             </a:pPr>
             <a:r>
-              <a:rPr lang="en-US" sz="1100" b="1" spc="200" kern="0" dirty="0">
+              <a:rPr lang="en-US" sz="1100" b="1" kern="0" spc="200" dirty="0">
                 <a:solidFill>
                   <a:srgbClr val="0E8A78"/>
                 </a:solidFill>
@@ -8496,7 +8423,7 @@
           <a:bodyPr wrap="square" rtlCol="0" anchor="ctr"/>
           <a:lstStyle/>
           <a:p>
-            <a:pPr algn="r" indent="0" marL="0">
+            <a:pPr marL="0" indent="0" algn="r">
               <a:buNone/>
             </a:pPr>
             <a:r>
@@ -8535,7 +8462,7 @@
           <a:bodyPr wrap="square" rtlCol="0" anchor="ctr"/>
           <a:lstStyle/>
           <a:p>
-            <a:pPr indent="0" marL="0">
+            <a:pPr marL="0" indent="0">
               <a:buNone/>
             </a:pPr>
             <a:r>
@@ -8561,8 +8488,8 @@
         </p:nvSpPr>
         <p:spPr>
           <a:xfrm>
-            <a:off x="548640" y="1417320"/>
-            <a:ext cx="6766560" cy="685800"/>
+            <a:off x="548639" y="1417320"/>
+            <a:ext cx="7689587" cy="685800"/>
           </a:xfrm>
           <a:prstGeom prst="rect">
             <a:avLst/>
@@ -8574,7 +8501,7 @@
           <a:bodyPr wrap="square" rtlCol="0" anchor="ctr"/>
           <a:lstStyle/>
           <a:p>
-            <a:pPr indent="0" marL="0">
+            <a:pPr marL="0" indent="0">
               <a:lnSpc>
                 <a:spcPct val="105000"/>
               </a:lnSpc>
@@ -8597,7 +8524,7 @@
       </p:sp>
       <p:graphicFrame>
         <p:nvGraphicFramePr>
-          <p:cNvPr id="7" name="Chart 0" descr=""/>
+          <p:cNvPr id="7" name="Chart 0"/>
           <p:cNvGraphicFramePr/>
           <p:nvPr/>
         </p:nvGraphicFramePr>
@@ -8605,9 +8532,9 @@
           <a:off x="411480" y="2240280"/>
           <a:ext cx="6400800" cy="3794760"/>
         </p:xfrm>
-        <a:graphic xmlns:a="http://schemas.openxmlformats.org/drawingml/2006/main">
+        <a:graphic>
           <a:graphicData uri="http://schemas.openxmlformats.org/drawingml/2006/chart">
-            <c:chart xmlns:c="http://schemas.openxmlformats.org/drawingml/2006/chart" r:id="rId1"/>
+            <c:chart xmlns:c="http://schemas.openxmlformats.org/drawingml/2006/chart" xmlns:r="http://schemas.openxmlformats.org/officeDocument/2006/relationships" r:id="rId3"/>
           </a:graphicData>
         </a:graphic>
       </p:graphicFrame>
@@ -8632,7 +8559,7 @@
           <a:bodyPr wrap="square" rtlCol="0" anchor="ctr"/>
           <a:lstStyle/>
           <a:p>
-            <a:pPr indent="0" marL="0">
+            <a:pPr marL="0" indent="0">
               <a:buNone/>
             </a:pPr>
             <a:r>
@@ -8669,6 +8596,13 @@
           </a:solidFill>
           <a:ln/>
         </p:spPr>
+        <p:txBody>
+          <a:bodyPr/>
+          <a:lstStyle/>
+          <a:p>
+            <a:endParaRPr lang="en-US"/>
+          </a:p>
+        </p:txBody>
       </p:sp>
       <p:sp>
         <p:nvSpPr>
@@ -8691,7 +8625,7 @@
           <a:bodyPr wrap="square" rtlCol="0" anchor="ctr"/>
           <a:lstStyle/>
           <a:p>
-            <a:pPr indent="0" marL="0">
+            <a:pPr marL="0" indent="0">
               <a:buNone/>
             </a:pPr>
             <a:r>
@@ -8728,6 +8662,13 @@
           </a:solidFill>
           <a:ln/>
         </p:spPr>
+        <p:txBody>
+          <a:bodyPr/>
+          <a:lstStyle/>
+          <a:p>
+            <a:endParaRPr lang="en-US"/>
+          </a:p>
+        </p:txBody>
       </p:sp>
       <p:sp>
         <p:nvSpPr>
@@ -8750,7 +8691,7 @@
           <a:bodyPr wrap="square" rtlCol="0" anchor="ctr"/>
           <a:lstStyle/>
           <a:p>
-            <a:pPr indent="0" marL="0">
+            <a:pPr marL="0" indent="0">
               <a:buNone/>
             </a:pPr>
             <a:r>
@@ -8787,6 +8728,13 @@
           </a:solidFill>
           <a:ln/>
         </p:spPr>
+        <p:txBody>
+          <a:bodyPr/>
+          <a:lstStyle/>
+          <a:p>
+            <a:endParaRPr lang="en-US"/>
+          </a:p>
+        </p:txBody>
       </p:sp>
       <p:sp>
         <p:nvSpPr>
@@ -8809,7 +8757,7 @@
           <a:bodyPr wrap="square" rtlCol="0" anchor="ctr"/>
           <a:lstStyle/>
           <a:p>
-            <a:pPr indent="0" marL="0">
+            <a:pPr marL="0" indent="0">
               <a:buNone/>
             </a:pPr>
             <a:r>
@@ -8848,7 +8796,7 @@
           <a:bodyPr wrap="square" rtlCol="0" anchor="ctr"/>
           <a:lstStyle/>
           <a:p>
-            <a:pPr indent="0" marL="0">
+            <a:pPr marL="0" indent="0">
               <a:buNone/>
             </a:pPr>
             <a:r>
@@ -8885,6 +8833,13 @@
           </a:solidFill>
           <a:ln/>
         </p:spPr>
+        <p:txBody>
+          <a:bodyPr/>
+          <a:lstStyle/>
+          <a:p>
+            <a:endParaRPr lang="en-US"/>
+          </a:p>
+        </p:txBody>
       </p:sp>
       <p:sp>
         <p:nvSpPr>
@@ -8907,7 +8862,7 @@
           <a:bodyPr wrap="square" rtlCol="0" anchor="ctr"/>
           <a:lstStyle/>
           <a:p>
-            <a:pPr indent="0" marL="0">
+            <a:pPr marL="0" indent="0">
               <a:buNone/>
             </a:pPr>
             <a:r>
@@ -8944,6 +8899,13 @@
           </a:solidFill>
           <a:ln/>
         </p:spPr>
+        <p:txBody>
+          <a:bodyPr/>
+          <a:lstStyle/>
+          <a:p>
+            <a:endParaRPr lang="en-US"/>
+          </a:p>
+        </p:txBody>
       </p:sp>
       <p:sp>
         <p:nvSpPr>
@@ -8966,7 +8928,7 @@
           <a:bodyPr wrap="square" rtlCol="0" anchor="ctr"/>
           <a:lstStyle/>
           <a:p>
-            <a:pPr indent="0" marL="0">
+            <a:pPr marL="0" indent="0">
               <a:buNone/>
             </a:pPr>
             <a:r>
@@ -9003,6 +8965,13 @@
           </a:solidFill>
           <a:ln/>
         </p:spPr>
+        <p:txBody>
+          <a:bodyPr/>
+          <a:lstStyle/>
+          <a:p>
+            <a:endParaRPr lang="en-US"/>
+          </a:p>
+        </p:txBody>
       </p:sp>
       <p:sp>
         <p:nvSpPr>
@@ -9025,7 +8994,7 @@
           <a:bodyPr wrap="square" rtlCol="0" anchor="ctr"/>
           <a:lstStyle/>
           <a:p>
-            <a:pPr indent="0" marL="0">
+            <a:pPr marL="0" indent="0">
               <a:buNone/>
             </a:pPr>
             <a:r>
@@ -9064,7 +9033,7 @@
           <a:bodyPr wrap="square" rtlCol="0" anchor="ctr"/>
           <a:lstStyle/>
           <a:p>
-            <a:pPr indent="0" marL="0">
+            <a:pPr marL="0" indent="0">
               <a:buNone/>
             </a:pPr>
             <a:r>
@@ -9078,9 +9047,6 @@
               </a:rPr>
               <a:t>This turns the model into business insight: </a:t>
             </a:r>
-            <a:pPr indent="0" marL="0">
-              <a:buNone/>
-            </a:pPr>
             <a:r>
               <a:rPr lang="en-US" sz="1350" dirty="0">
                 <a:solidFill>
@@ -9117,7 +9083,7 @@
           <a:bodyPr wrap="square" rtlCol="0" anchor="ctr"/>
           <a:lstStyle/>
           <a:p>
-            <a:pPr indent="0" marL="0">
+            <a:pPr marL="0" indent="0">
               <a:buNone/>
             </a:pPr>
             <a:r>
@@ -9151,6 +9117,7 @@
         <a:solidFill>
           <a:srgbClr val="FFFFFF"/>
         </a:solidFill>
+        <a:effectLst/>
       </p:bgPr>
     </p:bg>
     <p:spTree>
@@ -9188,7 +9155,7 @@
           <a:bodyPr wrap="square" rtlCol="0" anchor="ctr"/>
           <a:lstStyle/>
           <a:p>
-            <a:pPr algn="ctr" indent="0" marL="0">
+            <a:pPr marL="0" indent="0" algn="ctr">
               <a:buNone/>
             </a:pPr>
             <a:r>
@@ -9227,11 +9194,11 @@
           <a:bodyPr wrap="square" rtlCol="0" anchor="ctr"/>
           <a:lstStyle/>
           <a:p>
-            <a:pPr indent="0" marL="0">
+            <a:pPr marL="0" indent="0">
               <a:buNone/>
             </a:pPr>
             <a:r>
-              <a:rPr lang="en-US" sz="1100" b="1" spc="200" kern="0" dirty="0">
+              <a:rPr lang="en-US" sz="1100" b="1" kern="0" spc="200" dirty="0">
                 <a:solidFill>
                   <a:srgbClr val="0E8A78"/>
                 </a:solidFill>
@@ -9266,7 +9233,7 @@
           <a:bodyPr wrap="square" rtlCol="0" anchor="ctr"/>
           <a:lstStyle/>
           <a:p>
-            <a:pPr algn="r" indent="0" marL="0">
+            <a:pPr marL="0" indent="0" algn="r">
               <a:buNone/>
             </a:pPr>
             <a:r>
@@ -9305,7 +9272,7 @@
           <a:bodyPr wrap="square" rtlCol="0" anchor="ctr"/>
           <a:lstStyle/>
           <a:p>
-            <a:pPr indent="0" marL="0">
+            <a:pPr marL="0" indent="0">
               <a:buNone/>
             </a:pPr>
             <a:r>
@@ -9344,7 +9311,7 @@
           <a:bodyPr wrap="square" rtlCol="0" anchor="ctr"/>
           <a:lstStyle/>
           <a:p>
-            <a:pPr indent="0" marL="0">
+            <a:pPr marL="0" indent="0">
               <a:lnSpc>
                 <a:spcPct val="105000"/>
               </a:lnSpc>
@@ -9384,6 +9351,13 @@
           </a:solidFill>
           <a:ln/>
         </p:spPr>
+        <p:txBody>
+          <a:bodyPr/>
+          <a:lstStyle/>
+          <a:p>
+            <a:endParaRPr lang="en-US"/>
+          </a:p>
+        </p:txBody>
       </p:sp>
       <p:sp>
         <p:nvSpPr>
@@ -9406,7 +9380,7 @@
           <a:bodyPr wrap="square" lIns="0" tIns="0" rIns="0" bIns="0" rtlCol="0" anchor="ctr"/>
           <a:lstStyle/>
           <a:p>
-            <a:pPr indent="0" marL="0">
+            <a:pPr marL="0" indent="0">
               <a:buNone/>
             </a:pPr>
             <a:r>
@@ -9445,11 +9419,11 @@
           <a:bodyPr wrap="square" lIns="0" tIns="0" rIns="0" bIns="0" rtlCol="0" anchor="ctr"/>
           <a:lstStyle/>
           <a:p>
-            <a:pPr indent="0" marL="0">
+            <a:pPr marL="0" indent="0">
               <a:buNone/>
             </a:pPr>
             <a:r>
-              <a:rPr lang="en-US" sz="1100" b="1" spc="100" kern="0" dirty="0">
+              <a:rPr lang="en-US" sz="1100" b="1" kern="0" spc="100" dirty="0">
                 <a:solidFill>
                   <a:srgbClr val="CF463B"/>
                 </a:solidFill>
@@ -9484,7 +9458,7 @@
           <a:bodyPr wrap="square" lIns="0" tIns="0" rIns="0" bIns="0" rtlCol="0" anchor="ctr"/>
           <a:lstStyle/>
           <a:p>
-            <a:pPr indent="0" marL="0">
+            <a:pPr marL="0" indent="0">
               <a:buNone/>
             </a:pPr>
             <a:r>
@@ -9521,6 +9495,13 @@
           </a:solidFill>
           <a:ln/>
         </p:spPr>
+        <p:txBody>
+          <a:bodyPr/>
+          <a:lstStyle/>
+          <a:p>
+            <a:endParaRPr lang="en-US"/>
+          </a:p>
+        </p:txBody>
       </p:sp>
       <p:sp>
         <p:nvSpPr>
@@ -9543,7 +9524,7 @@
           <a:bodyPr wrap="square" lIns="0" tIns="0" rIns="0" bIns="0" rtlCol="0" anchor="ctr"/>
           <a:lstStyle/>
           <a:p>
-            <a:pPr indent="0" marL="0">
+            <a:pPr marL="0" indent="0">
               <a:buNone/>
             </a:pPr>
             <a:r>
@@ -9582,11 +9563,11 @@
           <a:bodyPr wrap="square" lIns="0" tIns="0" rIns="0" bIns="0" rtlCol="0" anchor="ctr"/>
           <a:lstStyle/>
           <a:p>
-            <a:pPr indent="0" marL="0">
+            <a:pPr marL="0" indent="0">
               <a:buNone/>
             </a:pPr>
             <a:r>
-              <a:rPr lang="en-US" sz="1100" b="1" spc="100" kern="0" dirty="0">
+              <a:rPr lang="en-US" sz="1100" b="1" kern="0" spc="100" dirty="0">
                 <a:solidFill>
                   <a:srgbClr val="D9912B"/>
                 </a:solidFill>
@@ -9621,7 +9602,7 @@
           <a:bodyPr wrap="square" lIns="0" tIns="0" rIns="0" bIns="0" rtlCol="0" anchor="ctr"/>
           <a:lstStyle/>
           <a:p>
-            <a:pPr indent="0" marL="0">
+            <a:pPr marL="0" indent="0">
               <a:buNone/>
             </a:pPr>
             <a:r>
@@ -9660,7 +9641,7 @@
           <a:bodyPr wrap="square" rtlCol="0" anchor="ctr"/>
           <a:lstStyle/>
           <a:p>
-            <a:pPr indent="0" marL="0">
+            <a:pPr marL="0" indent="0">
               <a:buNone/>
             </a:pPr>
             <a:r>
@@ -9699,7 +9680,7 @@
           <a:bodyPr wrap="square" rtlCol="0" anchor="ctr"/>
           <a:lstStyle/>
           <a:p>
-            <a:pPr indent="0" marL="0">
+            <a:pPr marL="0" indent="0">
               <a:lnSpc>
                 <a:spcPct val="105000"/>
               </a:lnSpc>
@@ -9722,7 +9703,7 @@
       </p:sp>
       <p:graphicFrame>
         <p:nvGraphicFramePr>
-          <p:cNvPr id="17" name="Chart 0" descr=""/>
+          <p:cNvPr id="17" name="Chart 0"/>
           <p:cNvGraphicFramePr/>
           <p:nvPr/>
         </p:nvGraphicFramePr>
@@ -9730,9 +9711,9 @@
           <a:off x="7040880" y="1874520"/>
           <a:ext cx="4023360" cy="3657600"/>
         </p:xfrm>
-        <a:graphic xmlns:a="http://schemas.openxmlformats.org/drawingml/2006/main">
+        <a:graphic>
           <a:graphicData uri="http://schemas.openxmlformats.org/drawingml/2006/chart">
-            <c:chart xmlns:c="http://schemas.openxmlformats.org/drawingml/2006/chart" r:id="rId1"/>
+            <c:chart xmlns:c="http://schemas.openxmlformats.org/drawingml/2006/chart" xmlns:r="http://schemas.openxmlformats.org/officeDocument/2006/relationships" r:id="rId3"/>
           </a:graphicData>
         </a:graphic>
       </p:graphicFrame>
@@ -9757,7 +9738,7 @@
           <a:bodyPr wrap="square" rtlCol="0" anchor="ctr"/>
           <a:lstStyle/>
           <a:p>
-            <a:pPr algn="ctr" indent="0" marL="0">
+            <a:pPr marL="0" indent="0" algn="ctr">
               <a:buNone/>
             </a:pPr>
             <a:r>
@@ -9796,7 +9777,7 @@
           <a:bodyPr wrap="square" rtlCol="0" anchor="ctr"/>
           <a:lstStyle/>
           <a:p>
-            <a:pPr indent="0" marL="0">
+            <a:pPr marL="0" indent="0">
               <a:buNone/>
             </a:pPr>
             <a:r>
@@ -9830,6 +9811,7 @@
         <a:solidFill>
           <a:srgbClr val="FFFFFF"/>
         </a:solidFill>
+        <a:effectLst/>
       </p:bgPr>
     </p:bg>
     <p:spTree>
@@ -9867,7 +9849,7 @@
           <a:bodyPr wrap="square" rtlCol="0" anchor="ctr"/>
           <a:lstStyle/>
           <a:p>
-            <a:pPr algn="ctr" indent="0" marL="0">
+            <a:pPr marL="0" indent="0" algn="ctr">
               <a:buNone/>
             </a:pPr>
             <a:r>
@@ -9906,11 +9888,11 @@
           <a:bodyPr wrap="square" rtlCol="0" anchor="ctr"/>
           <a:lstStyle/>
           <a:p>
-            <a:pPr indent="0" marL="0">
+            <a:pPr marL="0" indent="0">
               <a:buNone/>
             </a:pPr>
             <a:r>
-              <a:rPr lang="en-US" sz="1100" b="1" spc="200" kern="0" dirty="0">
+              <a:rPr lang="en-US" sz="1100" b="1" kern="0" spc="200" dirty="0">
                 <a:solidFill>
                   <a:srgbClr val="0E8A78"/>
                 </a:solidFill>
@@ -9945,7 +9927,7 @@
           <a:bodyPr wrap="square" rtlCol="0" anchor="ctr"/>
           <a:lstStyle/>
           <a:p>
-            <a:pPr algn="r" indent="0" marL="0">
+            <a:pPr marL="0" indent="0" algn="r">
               <a:buNone/>
             </a:pPr>
             <a:r>
@@ -9984,7 +9966,7 @@
           <a:bodyPr wrap="square" rtlCol="0" anchor="ctr"/>
           <a:lstStyle/>
           <a:p>
-            <a:pPr indent="0" marL="0">
+            <a:pPr marL="0" indent="0">
               <a:buNone/>
             </a:pPr>
             <a:r>
@@ -10023,7 +10005,7 @@
           <a:bodyPr wrap="square" rtlCol="0" anchor="ctr"/>
           <a:lstStyle/>
           <a:p>
-            <a:pPr indent="0" marL="0">
+            <a:pPr marL="0" indent="0">
               <a:lnSpc>
                 <a:spcPct val="105000"/>
               </a:lnSpc>
@@ -10060,17 +10042,41 @@
         </p:nvGraphicFramePr>
         <p:xfrm>
           <a:off x="548640" y="2240280"/>
-          <a:ext cx="7726680" cy="914400"/>
+          <a:ext cx="7726680" cy="3721608"/>
         </p:xfrm>
         <a:graphic>
           <a:graphicData uri="http://schemas.openxmlformats.org/drawingml/2006/table">
             <a:tbl>
               <a:tblPr/>
               <a:tblGrid>
-                <a:gridCol w="2240280"/>
-                <a:gridCol w="2011680"/>
-                <a:gridCol w="1828800"/>
-                <a:gridCol w="1645920"/>
+                <a:gridCol w="2240280">
+                  <a:extLst>
+                    <a:ext uri="{9D8B030D-6E8A-4147-A177-3AD203B41FA5}">
+                      <a16:colId xmlns:a16="http://schemas.microsoft.com/office/drawing/2014/main" val="20000"/>
+                    </a:ext>
+                  </a:extLst>
+                </a:gridCol>
+                <a:gridCol w="2011680">
+                  <a:extLst>
+                    <a:ext uri="{9D8B030D-6E8A-4147-A177-3AD203B41FA5}">
+                      <a16:colId xmlns:a16="http://schemas.microsoft.com/office/drawing/2014/main" val="20001"/>
+                    </a:ext>
+                  </a:extLst>
+                </a:gridCol>
+                <a:gridCol w="1828800">
+                  <a:extLst>
+                    <a:ext uri="{9D8B030D-6E8A-4147-A177-3AD203B41FA5}">
+                      <a16:colId xmlns:a16="http://schemas.microsoft.com/office/drawing/2014/main" val="20002"/>
+                    </a:ext>
+                  </a:extLst>
+                </a:gridCol>
+                <a:gridCol w="1645920">
+                  <a:extLst>
+                    <a:ext uri="{9D8B030D-6E8A-4147-A177-3AD203B41FA5}">
+                      <a16:colId xmlns:a16="http://schemas.microsoft.com/office/drawing/2014/main" val="20003"/>
+                    </a:ext>
+                  </a:extLst>
+                </a:gridCol>
               </a:tblGrid>
               <a:tr h="338328">
                 <a:tc>
@@ -10078,7 +10084,7 @@
                     <a:bodyPr/>
                     <a:lstStyle/>
                     <a:p>
-                      <a:pPr algn="l" indent="0" marL="0">
+                      <a:pPr marL="0" indent="0" algn="l">
                         <a:buNone/>
                       </a:pPr>
                       <a:r>
@@ -10146,7 +10152,7 @@
                     <a:bodyPr/>
                     <a:lstStyle/>
                     <a:p>
-                      <a:pPr algn="l" indent="0" marL="0">
+                      <a:pPr marL="0" indent="0" algn="l">
                         <a:buNone/>
                       </a:pPr>
                       <a:r>
@@ -10214,7 +10220,7 @@
                     <a:bodyPr/>
                     <a:lstStyle/>
                     <a:p>
-                      <a:pPr algn="l" indent="0" marL="0">
+                      <a:pPr marL="0" indent="0" algn="l">
                         <a:buNone/>
                       </a:pPr>
                       <a:r>
@@ -10282,7 +10288,7 @@
                     <a:bodyPr/>
                     <a:lstStyle/>
                     <a:p>
-                      <a:pPr algn="l" indent="0" marL="0">
+                      <a:pPr marL="0" indent="0" algn="l">
                         <a:buNone/>
                       </a:pPr>
                       <a:r>
@@ -10345,6 +10351,11 @@
                     </a:solidFill>
                   </a:tcPr>
                 </a:tc>
+                <a:extLst>
+                  <a:ext uri="{0D108BD9-81ED-4DB2-BD59-A6C34878D82A}">
+                    <a16:rowId xmlns:a16="http://schemas.microsoft.com/office/drawing/2014/main" val="10000"/>
+                  </a:ext>
+                </a:extLst>
               </a:tr>
               <a:tr h="338328">
                 <a:tc>
@@ -10352,7 +10363,7 @@
                     <a:bodyPr/>
                     <a:lstStyle/>
                     <a:p>
-                      <a:pPr algn="l" indent="0" marL="0">
+                      <a:pPr marL="0" indent="0" algn="l">
                         <a:buNone/>
                       </a:pPr>
                       <a:r>
@@ -10420,7 +10431,7 @@
                     <a:bodyPr/>
                     <a:lstStyle/>
                     <a:p>
-                      <a:pPr algn="ctr" indent="0" marL="0">
+                      <a:pPr marL="0" indent="0" algn="ctr">
                         <a:buNone/>
                       </a:pPr>
                       <a:r>
@@ -10488,7 +10499,7 @@
                     <a:bodyPr/>
                     <a:lstStyle/>
                     <a:p>
-                      <a:pPr algn="ctr" indent="0" marL="0">
+                      <a:pPr marL="0" indent="0" algn="ctr">
                         <a:buNone/>
                       </a:pPr>
                       <a:r>
@@ -10556,7 +10567,7 @@
                     <a:bodyPr/>
                     <a:lstStyle/>
                     <a:p>
-                      <a:pPr algn="ctr" indent="0" marL="0">
+                      <a:pPr marL="0" indent="0" algn="ctr">
                         <a:buNone/>
                       </a:pPr>
                       <a:r>
@@ -10619,6 +10630,11 @@
                     </a:solidFill>
                   </a:tcPr>
                 </a:tc>
+                <a:extLst>
+                  <a:ext uri="{0D108BD9-81ED-4DB2-BD59-A6C34878D82A}">
+                    <a16:rowId xmlns:a16="http://schemas.microsoft.com/office/drawing/2014/main" val="10001"/>
+                  </a:ext>
+                </a:extLst>
               </a:tr>
               <a:tr h="338328">
                 <a:tc>
@@ -10626,7 +10642,7 @@
                     <a:bodyPr/>
                     <a:lstStyle/>
                     <a:p>
-                      <a:pPr algn="l" indent="0" marL="0">
+                      <a:pPr marL="0" indent="0" algn="l">
                         <a:buNone/>
                       </a:pPr>
                       <a:r>
@@ -10694,7 +10710,7 @@
                     <a:bodyPr/>
                     <a:lstStyle/>
                     <a:p>
-                      <a:pPr algn="ctr" indent="0" marL="0">
+                      <a:pPr marL="0" indent="0" algn="ctr">
                         <a:buNone/>
                       </a:pPr>
                       <a:r>
@@ -10762,7 +10778,7 @@
                     <a:bodyPr/>
                     <a:lstStyle/>
                     <a:p>
-                      <a:pPr algn="ctr" indent="0" marL="0">
+                      <a:pPr marL="0" indent="0" algn="ctr">
                         <a:buNone/>
                       </a:pPr>
                       <a:r>
@@ -10830,7 +10846,7 @@
                     <a:bodyPr/>
                     <a:lstStyle/>
                     <a:p>
-                      <a:pPr algn="ctr" indent="0" marL="0">
+                      <a:pPr marL="0" indent="0" algn="ctr">
                         <a:buNone/>
                       </a:pPr>
                       <a:r>
@@ -10893,6 +10909,11 @@
                     </a:solidFill>
                   </a:tcPr>
                 </a:tc>
+                <a:extLst>
+                  <a:ext uri="{0D108BD9-81ED-4DB2-BD59-A6C34878D82A}">
+                    <a16:rowId xmlns:a16="http://schemas.microsoft.com/office/drawing/2014/main" val="10002"/>
+                  </a:ext>
+                </a:extLst>
               </a:tr>
               <a:tr h="338328">
                 <a:tc>
@@ -10900,7 +10921,7 @@
                     <a:bodyPr/>
                     <a:lstStyle/>
                     <a:p>
-                      <a:pPr algn="l" indent="0" marL="0">
+                      <a:pPr marL="0" indent="0" algn="l">
                         <a:buNone/>
                       </a:pPr>
                       <a:r>
@@ -10968,7 +10989,7 @@
                     <a:bodyPr/>
                     <a:lstStyle/>
                     <a:p>
-                      <a:pPr algn="ctr" indent="0" marL="0">
+                      <a:pPr marL="0" indent="0" algn="ctr">
                         <a:buNone/>
                       </a:pPr>
                       <a:r>
@@ -11036,7 +11057,7 @@
                     <a:bodyPr/>
                     <a:lstStyle/>
                     <a:p>
-                      <a:pPr algn="ctr" indent="0" marL="0">
+                      <a:pPr marL="0" indent="0" algn="ctr">
                         <a:buNone/>
                       </a:pPr>
                       <a:r>
@@ -11104,7 +11125,7 @@
                     <a:bodyPr/>
                     <a:lstStyle/>
                     <a:p>
-                      <a:pPr algn="ctr" indent="0" marL="0">
+                      <a:pPr marL="0" indent="0" algn="ctr">
                         <a:buNone/>
                       </a:pPr>
                       <a:r>
@@ -11167,6 +11188,11 @@
                     </a:solidFill>
                   </a:tcPr>
                 </a:tc>
+                <a:extLst>
+                  <a:ext uri="{0D108BD9-81ED-4DB2-BD59-A6C34878D82A}">
+                    <a16:rowId xmlns:a16="http://schemas.microsoft.com/office/drawing/2014/main" val="10003"/>
+                  </a:ext>
+                </a:extLst>
               </a:tr>
               <a:tr h="338328">
                 <a:tc>
@@ -11174,7 +11200,7 @@
                     <a:bodyPr/>
                     <a:lstStyle/>
                     <a:p>
-                      <a:pPr algn="l" indent="0" marL="0">
+                      <a:pPr marL="0" indent="0" algn="l">
                         <a:buNone/>
                       </a:pPr>
                       <a:r>
@@ -11242,7 +11268,7 @@
                     <a:bodyPr/>
                     <a:lstStyle/>
                     <a:p>
-                      <a:pPr algn="ctr" indent="0" marL="0">
+                      <a:pPr marL="0" indent="0" algn="ctr">
                         <a:buNone/>
                       </a:pPr>
                       <a:r>
@@ -11310,7 +11336,7 @@
                     <a:bodyPr/>
                     <a:lstStyle/>
                     <a:p>
-                      <a:pPr algn="ctr" indent="0" marL="0">
+                      <a:pPr marL="0" indent="0" algn="ctr">
                         <a:buNone/>
                       </a:pPr>
                       <a:r>
@@ -11378,7 +11404,7 @@
                     <a:bodyPr/>
                     <a:lstStyle/>
                     <a:p>
-                      <a:pPr algn="ctr" indent="0" marL="0">
+                      <a:pPr marL="0" indent="0" algn="ctr">
                         <a:buNone/>
                       </a:pPr>
                       <a:r>
@@ -11441,6 +11467,11 @@
                     </a:solidFill>
                   </a:tcPr>
                 </a:tc>
+                <a:extLst>
+                  <a:ext uri="{0D108BD9-81ED-4DB2-BD59-A6C34878D82A}">
+                    <a16:rowId xmlns:a16="http://schemas.microsoft.com/office/drawing/2014/main" val="10004"/>
+                  </a:ext>
+                </a:extLst>
               </a:tr>
               <a:tr h="338328">
                 <a:tc>
@@ -11448,7 +11479,7 @@
                     <a:bodyPr/>
                     <a:lstStyle/>
                     <a:p>
-                      <a:pPr algn="l" indent="0" marL="0">
+                      <a:pPr marL="0" indent="0" algn="l">
                         <a:buNone/>
                       </a:pPr>
                       <a:r>
@@ -11516,7 +11547,7 @@
                     <a:bodyPr/>
                     <a:lstStyle/>
                     <a:p>
-                      <a:pPr algn="ctr" indent="0" marL="0">
+                      <a:pPr marL="0" indent="0" algn="ctr">
                         <a:buNone/>
                       </a:pPr>
                       <a:r>
@@ -11584,7 +11615,7 @@
                     <a:bodyPr/>
                     <a:lstStyle/>
                     <a:p>
-                      <a:pPr algn="ctr" indent="0" marL="0">
+                      <a:pPr marL="0" indent="0" algn="ctr">
                         <a:buNone/>
                       </a:pPr>
                       <a:r>
@@ -11652,7 +11683,7 @@
                     <a:bodyPr/>
                     <a:lstStyle/>
                     <a:p>
-                      <a:pPr algn="ctr" indent="0" marL="0">
+                      <a:pPr marL="0" indent="0" algn="ctr">
                         <a:buNone/>
                       </a:pPr>
                       <a:r>
@@ -11715,6 +11746,11 @@
                     </a:solidFill>
                   </a:tcPr>
                 </a:tc>
+                <a:extLst>
+                  <a:ext uri="{0D108BD9-81ED-4DB2-BD59-A6C34878D82A}">
+                    <a16:rowId xmlns:a16="http://schemas.microsoft.com/office/drawing/2014/main" val="10005"/>
+                  </a:ext>
+                </a:extLst>
               </a:tr>
               <a:tr h="338328">
                 <a:tc>
@@ -11722,7 +11758,7 @@
                     <a:bodyPr/>
                     <a:lstStyle/>
                     <a:p>
-                      <a:pPr algn="l" indent="0" marL="0">
+                      <a:pPr marL="0" indent="0" algn="l">
                         <a:buNone/>
                       </a:pPr>
                       <a:r>
@@ -11790,7 +11826,7 @@
                     <a:bodyPr/>
                     <a:lstStyle/>
                     <a:p>
-                      <a:pPr algn="ctr" indent="0" marL="0">
+                      <a:pPr marL="0" indent="0" algn="ctr">
                         <a:buNone/>
                       </a:pPr>
                       <a:r>
@@ -11858,7 +11894,7 @@
                     <a:bodyPr/>
                     <a:lstStyle/>
                     <a:p>
-                      <a:pPr algn="ctr" indent="0" marL="0">
+                      <a:pPr marL="0" indent="0" algn="ctr">
                         <a:buNone/>
                       </a:pPr>
                       <a:r>
@@ -11926,7 +11962,7 @@
                     <a:bodyPr/>
                     <a:lstStyle/>
                     <a:p>
-                      <a:pPr algn="ctr" indent="0" marL="0">
+                      <a:pPr marL="0" indent="0" algn="ctr">
                         <a:buNone/>
                       </a:pPr>
                       <a:r>
@@ -11989,6 +12025,11 @@
                     </a:solidFill>
                   </a:tcPr>
                 </a:tc>
+                <a:extLst>
+                  <a:ext uri="{0D108BD9-81ED-4DB2-BD59-A6C34878D82A}">
+                    <a16:rowId xmlns:a16="http://schemas.microsoft.com/office/drawing/2014/main" val="10006"/>
+                  </a:ext>
+                </a:extLst>
               </a:tr>
               <a:tr h="338328">
                 <a:tc>
@@ -11996,7 +12037,7 @@
                     <a:bodyPr/>
                     <a:lstStyle/>
                     <a:p>
-                      <a:pPr algn="l" indent="0" marL="0">
+                      <a:pPr marL="0" indent="0" algn="l">
                         <a:buNone/>
                       </a:pPr>
                       <a:r>
@@ -12064,7 +12105,7 @@
                     <a:bodyPr/>
                     <a:lstStyle/>
                     <a:p>
-                      <a:pPr algn="ctr" indent="0" marL="0">
+                      <a:pPr marL="0" indent="0" algn="ctr">
                         <a:buNone/>
                       </a:pPr>
                       <a:r>
@@ -12132,7 +12173,7 @@
                     <a:bodyPr/>
                     <a:lstStyle/>
                     <a:p>
-                      <a:pPr algn="ctr" indent="0" marL="0">
+                      <a:pPr marL="0" indent="0" algn="ctr">
                         <a:buNone/>
                       </a:pPr>
                       <a:r>
@@ -12200,7 +12241,7 @@
                     <a:bodyPr/>
                     <a:lstStyle/>
                     <a:p>
-                      <a:pPr algn="ctr" indent="0" marL="0">
+                      <a:pPr marL="0" indent="0" algn="ctr">
                         <a:buNone/>
                       </a:pPr>
                       <a:r>
@@ -12263,6 +12304,11 @@
                     </a:solidFill>
                   </a:tcPr>
                 </a:tc>
+                <a:extLst>
+                  <a:ext uri="{0D108BD9-81ED-4DB2-BD59-A6C34878D82A}">
+                    <a16:rowId xmlns:a16="http://schemas.microsoft.com/office/drawing/2014/main" val="10007"/>
+                  </a:ext>
+                </a:extLst>
               </a:tr>
               <a:tr h="338328">
                 <a:tc>
@@ -12270,7 +12316,7 @@
                     <a:bodyPr/>
                     <a:lstStyle/>
                     <a:p>
-                      <a:pPr algn="l" indent="0" marL="0">
+                      <a:pPr marL="0" indent="0" algn="l">
                         <a:buNone/>
                       </a:pPr>
                       <a:r>
@@ -12338,7 +12384,7 @@
                     <a:bodyPr/>
                     <a:lstStyle/>
                     <a:p>
-                      <a:pPr algn="ctr" indent="0" marL="0">
+                      <a:pPr marL="0" indent="0" algn="ctr">
                         <a:buNone/>
                       </a:pPr>
                       <a:r>
@@ -12406,7 +12452,7 @@
                     <a:bodyPr/>
                     <a:lstStyle/>
                     <a:p>
-                      <a:pPr algn="ctr" indent="0" marL="0">
+                      <a:pPr marL="0" indent="0" algn="ctr">
                         <a:buNone/>
                       </a:pPr>
                       <a:r>
@@ -12474,7 +12520,7 @@
                     <a:bodyPr/>
                     <a:lstStyle/>
                     <a:p>
-                      <a:pPr algn="ctr" indent="0" marL="0">
+                      <a:pPr marL="0" indent="0" algn="ctr">
                         <a:buNone/>
                       </a:pPr>
                       <a:r>
@@ -12537,6 +12583,11 @@
                     </a:solidFill>
                   </a:tcPr>
                 </a:tc>
+                <a:extLst>
+                  <a:ext uri="{0D108BD9-81ED-4DB2-BD59-A6C34878D82A}">
+                    <a16:rowId xmlns:a16="http://schemas.microsoft.com/office/drawing/2014/main" val="10008"/>
+                  </a:ext>
+                </a:extLst>
               </a:tr>
               <a:tr h="338328">
                 <a:tc>
@@ -12544,7 +12595,7 @@
                     <a:bodyPr/>
                     <a:lstStyle/>
                     <a:p>
-                      <a:pPr algn="l" indent="0" marL="0">
+                      <a:pPr marL="0" indent="0" algn="l">
                         <a:buNone/>
                       </a:pPr>
                       <a:r>
@@ -12612,7 +12663,7 @@
                     <a:bodyPr/>
                     <a:lstStyle/>
                     <a:p>
-                      <a:pPr algn="ctr" indent="0" marL="0">
+                      <a:pPr marL="0" indent="0" algn="ctr">
                         <a:buNone/>
                       </a:pPr>
                       <a:r>
@@ -12680,7 +12731,7 @@
                     <a:bodyPr/>
                     <a:lstStyle/>
                     <a:p>
-                      <a:pPr algn="ctr" indent="0" marL="0">
+                      <a:pPr marL="0" indent="0" algn="ctr">
                         <a:buNone/>
                       </a:pPr>
                       <a:r>
@@ -12748,7 +12799,7 @@
                     <a:bodyPr/>
                     <a:lstStyle/>
                     <a:p>
-                      <a:pPr algn="ctr" indent="0" marL="0">
+                      <a:pPr marL="0" indent="0" algn="ctr">
                         <a:buNone/>
                       </a:pPr>
                       <a:r>
@@ -12811,6 +12862,11 @@
                     </a:solidFill>
                   </a:tcPr>
                 </a:tc>
+                <a:extLst>
+                  <a:ext uri="{0D108BD9-81ED-4DB2-BD59-A6C34878D82A}">
+                    <a16:rowId xmlns:a16="http://schemas.microsoft.com/office/drawing/2014/main" val="10009"/>
+                  </a:ext>
+                </a:extLst>
               </a:tr>
               <a:tr h="338328">
                 <a:tc>
@@ -12818,7 +12874,7 @@
                     <a:bodyPr/>
                     <a:lstStyle/>
                     <a:p>
-                      <a:pPr algn="l" indent="0" marL="0">
+                      <a:pPr marL="0" indent="0" algn="l">
                         <a:buNone/>
                       </a:pPr>
                       <a:r>
@@ -12886,7 +12942,7 @@
                     <a:bodyPr/>
                     <a:lstStyle/>
                     <a:p>
-                      <a:pPr algn="ctr" indent="0" marL="0">
+                      <a:pPr marL="0" indent="0" algn="ctr">
                         <a:buNone/>
                       </a:pPr>
                       <a:r>
@@ -12954,7 +13010,7 @@
                     <a:bodyPr/>
                     <a:lstStyle/>
                     <a:p>
-                      <a:pPr algn="ctr" indent="0" marL="0">
+                      <a:pPr marL="0" indent="0" algn="ctr">
                         <a:buNone/>
                       </a:pPr>
                       <a:r>
@@ -13022,7 +13078,7 @@
                     <a:bodyPr/>
                     <a:lstStyle/>
                     <a:p>
-                      <a:pPr algn="ctr" indent="0" marL="0">
+                      <a:pPr marL="0" indent="0" algn="ctr">
                         <a:buNone/>
                       </a:pPr>
                       <a:r>
@@ -13085,6 +13141,11 @@
                     </a:solidFill>
                   </a:tcPr>
                 </a:tc>
+                <a:extLst>
+                  <a:ext uri="{0D108BD9-81ED-4DB2-BD59-A6C34878D82A}">
+                    <a16:rowId xmlns:a16="http://schemas.microsoft.com/office/drawing/2014/main" val="10010"/>
+                  </a:ext>
+                </a:extLst>
               </a:tr>
             </a:tbl>
           </a:graphicData>
@@ -13111,7 +13172,7 @@
           <a:bodyPr wrap="square" rtlCol="0" anchor="ctr"/>
           <a:lstStyle/>
           <a:p>
-            <a:pPr indent="0" marL="0">
+            <a:pPr marL="0" indent="0">
               <a:buNone/>
             </a:pPr>
             <a:r>
@@ -13150,7 +13211,7 @@
           <a:bodyPr wrap="square" rtlCol="0" anchor="ctr"/>
           <a:lstStyle/>
           <a:p>
-            <a:pPr indent="0" marL="0">
+            <a:pPr marL="0" indent="0">
               <a:lnSpc>
                 <a:spcPct val="108000"/>
               </a:lnSpc>
@@ -13192,11 +13253,11 @@
           <a:bodyPr wrap="square" rtlCol="0" anchor="ctr"/>
           <a:lstStyle/>
           <a:p>
-            <a:pPr indent="0" marL="0">
+            <a:pPr marL="0" indent="0">
               <a:buNone/>
             </a:pPr>
             <a:r>
-              <a:rPr lang="en-US" sz="1200" b="1" spc="100" kern="0" dirty="0">
+              <a:rPr lang="en-US" sz="1200" b="1" kern="0" spc="100" dirty="0">
                 <a:solidFill>
                   <a:srgbClr val="0E8A78"/>
                 </a:solidFill>
@@ -13231,7 +13292,7 @@
           <a:bodyPr wrap="square" rtlCol="0" anchor="ctr"/>
           <a:lstStyle/>
           <a:p>
-            <a:pPr indent="0" marL="0">
+            <a:pPr marL="0" indent="0">
               <a:lnSpc>
                 <a:spcPct val="108000"/>
               </a:lnSpc>
@@ -13273,7 +13334,7 @@
           <a:bodyPr wrap="square" rtlCol="0" anchor="ctr"/>
           <a:lstStyle/>
           <a:p>
-            <a:pPr indent="0" marL="0">
+            <a:pPr marL="0" indent="0">
               <a:buNone/>
             </a:pPr>
             <a:r>
@@ -13307,6 +13368,7 @@
         <a:solidFill>
           <a:srgbClr val="FFFFFF"/>
         </a:solidFill>
+        <a:effectLst/>
       </p:bgPr>
     </p:bg>
     <p:spTree>
@@ -13344,7 +13406,7 @@
           <a:bodyPr wrap="square" rtlCol="0" anchor="ctr"/>
           <a:lstStyle/>
           <a:p>
-            <a:pPr algn="ctr" indent="0" marL="0">
+            <a:pPr marL="0" indent="0" algn="ctr">
               <a:buNone/>
             </a:pPr>
             <a:r>
@@ -13383,11 +13445,11 @@
           <a:bodyPr wrap="square" rtlCol="0" anchor="ctr"/>
           <a:lstStyle/>
           <a:p>
-            <a:pPr indent="0" marL="0">
+            <a:pPr marL="0" indent="0">
               <a:buNone/>
             </a:pPr>
             <a:r>
-              <a:rPr lang="en-US" sz="1100" b="1" spc="200" kern="0" dirty="0">
+              <a:rPr lang="en-US" sz="1100" b="1" kern="0" spc="200" dirty="0">
                 <a:solidFill>
                   <a:srgbClr val="0E8A78"/>
                 </a:solidFill>
@@ -13422,7 +13484,7 @@
           <a:bodyPr wrap="square" rtlCol="0" anchor="ctr"/>
           <a:lstStyle/>
           <a:p>
-            <a:pPr algn="r" indent="0" marL="0">
+            <a:pPr marL="0" indent="0" algn="r">
               <a:buNone/>
             </a:pPr>
             <a:r>
@@ -13461,7 +13523,7 @@
           <a:bodyPr wrap="square" rtlCol="0" anchor="ctr"/>
           <a:lstStyle/>
           <a:p>
-            <a:pPr indent="0" marL="0">
+            <a:pPr marL="0" indent="0">
               <a:buNone/>
             </a:pPr>
             <a:r>
@@ -13500,7 +13562,7 @@
           <a:bodyPr wrap="square" rtlCol="0" anchor="ctr"/>
           <a:lstStyle/>
           <a:p>
-            <a:pPr indent="0" marL="0">
+            <a:pPr marL="0" indent="0">
               <a:lnSpc>
                 <a:spcPct val="105000"/>
               </a:lnSpc>
@@ -13537,16 +13599,34 @@
         </p:nvGraphicFramePr>
         <p:xfrm>
           <a:off x="548640" y="2286000"/>
-          <a:ext cx="3977640" cy="914400"/>
+          <a:ext cx="3977640" cy="3470148"/>
         </p:xfrm>
         <a:graphic>
           <a:graphicData uri="http://schemas.openxmlformats.org/drawingml/2006/table">
             <a:tbl>
               <a:tblPr/>
               <a:tblGrid>
-                <a:gridCol w="1920240"/>
-                <a:gridCol w="1051560"/>
-                <a:gridCol w="1005840"/>
+                <a:gridCol w="1920240">
+                  <a:extLst>
+                    <a:ext uri="{9D8B030D-6E8A-4147-A177-3AD203B41FA5}">
+                      <a16:colId xmlns:a16="http://schemas.microsoft.com/office/drawing/2014/main" val="20000"/>
+                    </a:ext>
+                  </a:extLst>
+                </a:gridCol>
+                <a:gridCol w="1051560">
+                  <a:extLst>
+                    <a:ext uri="{9D8B030D-6E8A-4147-A177-3AD203B41FA5}">
+                      <a16:colId xmlns:a16="http://schemas.microsoft.com/office/drawing/2014/main" val="20001"/>
+                    </a:ext>
+                  </a:extLst>
+                </a:gridCol>
+                <a:gridCol w="1005840">
+                  <a:extLst>
+                    <a:ext uri="{9D8B030D-6E8A-4147-A177-3AD203B41FA5}">
+                      <a16:colId xmlns:a16="http://schemas.microsoft.com/office/drawing/2014/main" val="20002"/>
+                    </a:ext>
+                  </a:extLst>
+                </a:gridCol>
               </a:tblGrid>
               <a:tr h="315468">
                 <a:tc>
@@ -13554,7 +13634,7 @@
                     <a:bodyPr/>
                     <a:lstStyle/>
                     <a:p>
-                      <a:pPr indent="0" marL="0">
+                      <a:pPr marL="0" indent="0">
                         <a:buNone/>
                       </a:pPr>
                       <a:r>
@@ -13622,7 +13702,7 @@
                     <a:bodyPr/>
                     <a:lstStyle/>
                     <a:p>
-                      <a:pPr indent="0" marL="0">
+                      <a:pPr marL="0" indent="0">
                         <a:buNone/>
                       </a:pPr>
                       <a:r>
@@ -13690,7 +13770,7 @@
                     <a:bodyPr/>
                     <a:lstStyle/>
                     <a:p>
-                      <a:pPr indent="0" marL="0">
+                      <a:pPr marL="0" indent="0">
                         <a:buNone/>
                       </a:pPr>
                       <a:r>
@@ -13753,6 +13833,11 @@
                     </a:solidFill>
                   </a:tcPr>
                 </a:tc>
+                <a:extLst>
+                  <a:ext uri="{0D108BD9-81ED-4DB2-BD59-A6C34878D82A}">
+                    <a16:rowId xmlns:a16="http://schemas.microsoft.com/office/drawing/2014/main" val="10000"/>
+                  </a:ext>
+                </a:extLst>
               </a:tr>
               <a:tr h="315468">
                 <a:tc>
@@ -13760,7 +13845,7 @@
                     <a:bodyPr/>
                     <a:lstStyle/>
                     <a:p>
-                      <a:pPr indent="0" marL="0">
+                      <a:pPr marL="0" indent="0">
                         <a:buNone/>
                       </a:pPr>
                       <a:r>
@@ -13828,7 +13913,7 @@
                     <a:bodyPr/>
                     <a:lstStyle/>
                     <a:p>
-                      <a:pPr algn="ctr" indent="0" marL="0">
+                      <a:pPr marL="0" indent="0" algn="ctr">
                         <a:buNone/>
                       </a:pPr>
                       <a:r>
@@ -13896,7 +13981,7 @@
                     <a:bodyPr/>
                     <a:lstStyle/>
                     <a:p>
-                      <a:pPr algn="ctr" indent="0" marL="0">
+                      <a:pPr marL="0" indent="0" algn="ctr">
                         <a:buNone/>
                       </a:pPr>
                       <a:r>
@@ -13959,6 +14044,11 @@
                     </a:solidFill>
                   </a:tcPr>
                 </a:tc>
+                <a:extLst>
+                  <a:ext uri="{0D108BD9-81ED-4DB2-BD59-A6C34878D82A}">
+                    <a16:rowId xmlns:a16="http://schemas.microsoft.com/office/drawing/2014/main" val="10001"/>
+                  </a:ext>
+                </a:extLst>
               </a:tr>
               <a:tr h="315468">
                 <a:tc>
@@ -13966,7 +14056,7 @@
                     <a:bodyPr/>
                     <a:lstStyle/>
                     <a:p>
-                      <a:pPr indent="0" marL="0">
+                      <a:pPr marL="0" indent="0">
                         <a:buNone/>
                       </a:pPr>
                       <a:r>
@@ -14034,7 +14124,7 @@
                     <a:bodyPr/>
                     <a:lstStyle/>
                     <a:p>
-                      <a:pPr algn="ctr" indent="0" marL="0">
+                      <a:pPr marL="0" indent="0" algn="ctr">
                         <a:buNone/>
                       </a:pPr>
                       <a:r>
@@ -14102,7 +14192,7 @@
                     <a:bodyPr/>
                     <a:lstStyle/>
                     <a:p>
-                      <a:pPr algn="ctr" indent="0" marL="0">
+                      <a:pPr marL="0" indent="0" algn="ctr">
                         <a:buNone/>
                       </a:pPr>
                       <a:r>
@@ -14165,6 +14255,11 @@
                     </a:solidFill>
                   </a:tcPr>
                 </a:tc>
+                <a:extLst>
+                  <a:ext uri="{0D108BD9-81ED-4DB2-BD59-A6C34878D82A}">
+                    <a16:rowId xmlns:a16="http://schemas.microsoft.com/office/drawing/2014/main" val="10002"/>
+                  </a:ext>
+                </a:extLst>
               </a:tr>
               <a:tr h="315468">
                 <a:tc>
@@ -14172,7 +14267,7 @@
                     <a:bodyPr/>
                     <a:lstStyle/>
                     <a:p>
-                      <a:pPr indent="0" marL="0">
+                      <a:pPr marL="0" indent="0">
                         <a:buNone/>
                       </a:pPr>
                       <a:r>
@@ -14240,7 +14335,7 @@
                     <a:bodyPr/>
                     <a:lstStyle/>
                     <a:p>
-                      <a:pPr algn="ctr" indent="0" marL="0">
+                      <a:pPr marL="0" indent="0" algn="ctr">
                         <a:buNone/>
                       </a:pPr>
                       <a:r>
@@ -14308,7 +14403,7 @@
                     <a:bodyPr/>
                     <a:lstStyle/>
                     <a:p>
-                      <a:pPr algn="ctr" indent="0" marL="0">
+                      <a:pPr marL="0" indent="0" algn="ctr">
                         <a:buNone/>
                       </a:pPr>
                       <a:r>
@@ -14371,6 +14466,11 @@
                     </a:solidFill>
                   </a:tcPr>
                 </a:tc>
+                <a:extLst>
+                  <a:ext uri="{0D108BD9-81ED-4DB2-BD59-A6C34878D82A}">
+                    <a16:rowId xmlns:a16="http://schemas.microsoft.com/office/drawing/2014/main" val="10003"/>
+                  </a:ext>
+                </a:extLst>
               </a:tr>
               <a:tr h="315468">
                 <a:tc>
@@ -14378,7 +14478,7 @@
                     <a:bodyPr/>
                     <a:lstStyle/>
                     <a:p>
-                      <a:pPr indent="0" marL="0">
+                      <a:pPr marL="0" indent="0">
                         <a:buNone/>
                       </a:pPr>
                       <a:r>
@@ -14446,7 +14546,7 @@
                     <a:bodyPr/>
                     <a:lstStyle/>
                     <a:p>
-                      <a:pPr algn="ctr" indent="0" marL="0">
+                      <a:pPr marL="0" indent="0" algn="ctr">
                         <a:buNone/>
                       </a:pPr>
                       <a:r>
@@ -14514,7 +14614,7 @@
                     <a:bodyPr/>
                     <a:lstStyle/>
                     <a:p>
-                      <a:pPr algn="ctr" indent="0" marL="0">
+                      <a:pPr marL="0" indent="0" algn="ctr">
                         <a:buNone/>
                       </a:pPr>
                       <a:r>
@@ -14577,6 +14677,11 @@
                     </a:solidFill>
                   </a:tcPr>
                 </a:tc>
+                <a:extLst>
+                  <a:ext uri="{0D108BD9-81ED-4DB2-BD59-A6C34878D82A}">
+                    <a16:rowId xmlns:a16="http://schemas.microsoft.com/office/drawing/2014/main" val="10004"/>
+                  </a:ext>
+                </a:extLst>
               </a:tr>
               <a:tr h="315468">
                 <a:tc>
@@ -14584,7 +14689,7 @@
                     <a:bodyPr/>
                     <a:lstStyle/>
                     <a:p>
-                      <a:pPr indent="0" marL="0">
+                      <a:pPr marL="0" indent="0">
                         <a:buNone/>
                       </a:pPr>
                       <a:r>
@@ -14652,7 +14757,7 @@
                     <a:bodyPr/>
                     <a:lstStyle/>
                     <a:p>
-                      <a:pPr algn="ctr" indent="0" marL="0">
+                      <a:pPr marL="0" indent="0" algn="ctr">
                         <a:buNone/>
                       </a:pPr>
                       <a:r>
@@ -14720,7 +14825,7 @@
                     <a:bodyPr/>
                     <a:lstStyle/>
                     <a:p>
-                      <a:pPr algn="ctr" indent="0" marL="0">
+                      <a:pPr marL="0" indent="0" algn="ctr">
                         <a:buNone/>
                       </a:pPr>
                       <a:r>
@@ -14783,6 +14888,11 @@
                     </a:solidFill>
                   </a:tcPr>
                 </a:tc>
+                <a:extLst>
+                  <a:ext uri="{0D108BD9-81ED-4DB2-BD59-A6C34878D82A}">
+                    <a16:rowId xmlns:a16="http://schemas.microsoft.com/office/drawing/2014/main" val="10005"/>
+                  </a:ext>
+                </a:extLst>
               </a:tr>
               <a:tr h="315468">
                 <a:tc>
@@ -14790,7 +14900,7 @@
                     <a:bodyPr/>
                     <a:lstStyle/>
                     <a:p>
-                      <a:pPr indent="0" marL="0">
+                      <a:pPr marL="0" indent="0">
                         <a:buNone/>
                       </a:pPr>
                       <a:r>
@@ -14858,7 +14968,7 @@
                     <a:bodyPr/>
                     <a:lstStyle/>
                     <a:p>
-                      <a:pPr algn="ctr" indent="0" marL="0">
+                      <a:pPr marL="0" indent="0" algn="ctr">
                         <a:buNone/>
                       </a:pPr>
                       <a:r>
@@ -14926,7 +15036,7 @@
                     <a:bodyPr/>
                     <a:lstStyle/>
                     <a:p>
-                      <a:pPr algn="ctr" indent="0" marL="0">
+                      <a:pPr marL="0" indent="0" algn="ctr">
                         <a:buNone/>
                       </a:pPr>
                       <a:r>
@@ -14989,6 +15099,11 @@
                     </a:solidFill>
                   </a:tcPr>
                 </a:tc>
+                <a:extLst>
+                  <a:ext uri="{0D108BD9-81ED-4DB2-BD59-A6C34878D82A}">
+                    <a16:rowId xmlns:a16="http://schemas.microsoft.com/office/drawing/2014/main" val="10006"/>
+                  </a:ext>
+                </a:extLst>
               </a:tr>
               <a:tr h="315468">
                 <a:tc>
@@ -14996,7 +15111,7 @@
                     <a:bodyPr/>
                     <a:lstStyle/>
                     <a:p>
-                      <a:pPr indent="0" marL="0">
+                      <a:pPr marL="0" indent="0">
                         <a:buNone/>
                       </a:pPr>
                       <a:r>
@@ -15064,7 +15179,7 @@
                     <a:bodyPr/>
                     <a:lstStyle/>
                     <a:p>
-                      <a:pPr algn="ctr" indent="0" marL="0">
+                      <a:pPr marL="0" indent="0" algn="ctr">
                         <a:buNone/>
                       </a:pPr>
                       <a:r>
@@ -15132,7 +15247,7 @@
                     <a:bodyPr/>
                     <a:lstStyle/>
                     <a:p>
-                      <a:pPr algn="ctr" indent="0" marL="0">
+                      <a:pPr marL="0" indent="0" algn="ctr">
                         <a:buNone/>
                       </a:pPr>
                       <a:r>
@@ -15195,6 +15310,11 @@
                     </a:solidFill>
                   </a:tcPr>
                 </a:tc>
+                <a:extLst>
+                  <a:ext uri="{0D108BD9-81ED-4DB2-BD59-A6C34878D82A}">
+                    <a16:rowId xmlns:a16="http://schemas.microsoft.com/office/drawing/2014/main" val="10007"/>
+                  </a:ext>
+                </a:extLst>
               </a:tr>
               <a:tr h="315468">
                 <a:tc>
@@ -15202,7 +15322,7 @@
                     <a:bodyPr/>
                     <a:lstStyle/>
                     <a:p>
-                      <a:pPr indent="0" marL="0">
+                      <a:pPr marL="0" indent="0">
                         <a:buNone/>
                       </a:pPr>
                       <a:r>
@@ -15270,7 +15390,7 @@
                     <a:bodyPr/>
                     <a:lstStyle/>
                     <a:p>
-                      <a:pPr algn="ctr" indent="0" marL="0">
+                      <a:pPr marL="0" indent="0" algn="ctr">
                         <a:buNone/>
                       </a:pPr>
                       <a:r>
@@ -15338,7 +15458,7 @@
                     <a:bodyPr/>
                     <a:lstStyle/>
                     <a:p>
-                      <a:pPr algn="ctr" indent="0" marL="0">
+                      <a:pPr marL="0" indent="0" algn="ctr">
                         <a:buNone/>
                       </a:pPr>
                       <a:r>
@@ -15401,6 +15521,11 @@
                     </a:solidFill>
                   </a:tcPr>
                 </a:tc>
+                <a:extLst>
+                  <a:ext uri="{0D108BD9-81ED-4DB2-BD59-A6C34878D82A}">
+                    <a16:rowId xmlns:a16="http://schemas.microsoft.com/office/drawing/2014/main" val="10008"/>
+                  </a:ext>
+                </a:extLst>
               </a:tr>
               <a:tr h="315468">
                 <a:tc>
@@ -15408,7 +15533,7 @@
                     <a:bodyPr/>
                     <a:lstStyle/>
                     <a:p>
-                      <a:pPr indent="0" marL="0">
+                      <a:pPr marL="0" indent="0">
                         <a:buNone/>
                       </a:pPr>
                       <a:r>
@@ -15476,7 +15601,7 @@
                     <a:bodyPr/>
                     <a:lstStyle/>
                     <a:p>
-                      <a:pPr algn="ctr" indent="0" marL="0">
+                      <a:pPr marL="0" indent="0" algn="ctr">
                         <a:buNone/>
                       </a:pPr>
                       <a:r>
@@ -15544,7 +15669,7 @@
                     <a:bodyPr/>
                     <a:lstStyle/>
                     <a:p>
-                      <a:pPr algn="ctr" indent="0" marL="0">
+                      <a:pPr marL="0" indent="0" algn="ctr">
                         <a:buNone/>
                       </a:pPr>
                       <a:r>
@@ -15607,6 +15732,11 @@
                     </a:solidFill>
                   </a:tcPr>
                 </a:tc>
+                <a:extLst>
+                  <a:ext uri="{0D108BD9-81ED-4DB2-BD59-A6C34878D82A}">
+                    <a16:rowId xmlns:a16="http://schemas.microsoft.com/office/drawing/2014/main" val="10009"/>
+                  </a:ext>
+                </a:extLst>
               </a:tr>
               <a:tr h="315468">
                 <a:tc>
@@ -15614,7 +15744,7 @@
                     <a:bodyPr/>
                     <a:lstStyle/>
                     <a:p>
-                      <a:pPr indent="0" marL="0">
+                      <a:pPr marL="0" indent="0">
                         <a:buNone/>
                       </a:pPr>
                       <a:r>
@@ -15682,7 +15812,7 @@
                     <a:bodyPr/>
                     <a:lstStyle/>
                     <a:p>
-                      <a:pPr algn="ctr" indent="0" marL="0">
+                      <a:pPr marL="0" indent="0" algn="ctr">
                         <a:buNone/>
                       </a:pPr>
                       <a:r>
@@ -15750,7 +15880,7 @@
                     <a:bodyPr/>
                     <a:lstStyle/>
                     <a:p>
-                      <a:pPr algn="ctr" indent="0" marL="0">
+                      <a:pPr marL="0" indent="0" algn="ctr">
                         <a:buNone/>
                       </a:pPr>
                       <a:r>
@@ -15813,6 +15943,11 @@
                     </a:solidFill>
                   </a:tcPr>
                 </a:tc>
+                <a:extLst>
+                  <a:ext uri="{0D108BD9-81ED-4DB2-BD59-A6C34878D82A}">
+                    <a16:rowId xmlns:a16="http://schemas.microsoft.com/office/drawing/2014/main" val="10010"/>
+                  </a:ext>
+                </a:extLst>
               </a:tr>
             </a:tbl>
           </a:graphicData>
@@ -15834,16 +15969,34 @@
         </p:nvGraphicFramePr>
         <p:xfrm>
           <a:off x="4709160" y="2286000"/>
-          <a:ext cx="3977640" cy="914400"/>
+          <a:ext cx="3977640" cy="3470148"/>
         </p:xfrm>
         <a:graphic>
           <a:graphicData uri="http://schemas.openxmlformats.org/drawingml/2006/table">
             <a:tbl>
               <a:tblPr/>
               <a:tblGrid>
-                <a:gridCol w="1920240"/>
-                <a:gridCol w="1051560"/>
-                <a:gridCol w="1005840"/>
+                <a:gridCol w="1920240">
+                  <a:extLst>
+                    <a:ext uri="{9D8B030D-6E8A-4147-A177-3AD203B41FA5}">
+                      <a16:colId xmlns:a16="http://schemas.microsoft.com/office/drawing/2014/main" val="20000"/>
+                    </a:ext>
+                  </a:extLst>
+                </a:gridCol>
+                <a:gridCol w="1051560">
+                  <a:extLst>
+                    <a:ext uri="{9D8B030D-6E8A-4147-A177-3AD203B41FA5}">
+                      <a16:colId xmlns:a16="http://schemas.microsoft.com/office/drawing/2014/main" val="20001"/>
+                    </a:ext>
+                  </a:extLst>
+                </a:gridCol>
+                <a:gridCol w="1005840">
+                  <a:extLst>
+                    <a:ext uri="{9D8B030D-6E8A-4147-A177-3AD203B41FA5}">
+                      <a16:colId xmlns:a16="http://schemas.microsoft.com/office/drawing/2014/main" val="20002"/>
+                    </a:ext>
+                  </a:extLst>
+                </a:gridCol>
               </a:tblGrid>
               <a:tr h="315468">
                 <a:tc>
@@ -15851,7 +16004,7 @@
                     <a:bodyPr/>
                     <a:lstStyle/>
                     <a:p>
-                      <a:pPr indent="0" marL="0">
+                      <a:pPr marL="0" indent="0">
                         <a:buNone/>
                       </a:pPr>
                       <a:r>
@@ -15919,7 +16072,7 @@
                     <a:bodyPr/>
                     <a:lstStyle/>
                     <a:p>
-                      <a:pPr indent="0" marL="0">
+                      <a:pPr marL="0" indent="0">
                         <a:buNone/>
                       </a:pPr>
                       <a:r>
@@ -15987,7 +16140,7 @@
                     <a:bodyPr/>
                     <a:lstStyle/>
                     <a:p>
-                      <a:pPr indent="0" marL="0">
+                      <a:pPr marL="0" indent="0">
                         <a:buNone/>
                       </a:pPr>
                       <a:r>
@@ -16050,6 +16203,11 @@
                     </a:solidFill>
                   </a:tcPr>
                 </a:tc>
+                <a:extLst>
+                  <a:ext uri="{0D108BD9-81ED-4DB2-BD59-A6C34878D82A}">
+                    <a16:rowId xmlns:a16="http://schemas.microsoft.com/office/drawing/2014/main" val="10000"/>
+                  </a:ext>
+                </a:extLst>
               </a:tr>
               <a:tr h="315468">
                 <a:tc>
@@ -16057,7 +16215,7 @@
                     <a:bodyPr/>
                     <a:lstStyle/>
                     <a:p>
-                      <a:pPr indent="0" marL="0">
+                      <a:pPr marL="0" indent="0">
                         <a:buNone/>
                       </a:pPr>
                       <a:r>
@@ -16125,7 +16283,7 @@
                     <a:bodyPr/>
                     <a:lstStyle/>
                     <a:p>
-                      <a:pPr algn="ctr" indent="0" marL="0">
+                      <a:pPr marL="0" indent="0" algn="ctr">
                         <a:buNone/>
                       </a:pPr>
                       <a:r>
@@ -16193,7 +16351,7 @@
                     <a:bodyPr/>
                     <a:lstStyle/>
                     <a:p>
-                      <a:pPr algn="ctr" indent="0" marL="0">
+                      <a:pPr marL="0" indent="0" algn="ctr">
                         <a:buNone/>
                       </a:pPr>
                       <a:r>
@@ -16256,6 +16414,11 @@
                     </a:solidFill>
                   </a:tcPr>
                 </a:tc>
+                <a:extLst>
+                  <a:ext uri="{0D108BD9-81ED-4DB2-BD59-A6C34878D82A}">
+                    <a16:rowId xmlns:a16="http://schemas.microsoft.com/office/drawing/2014/main" val="10001"/>
+                  </a:ext>
+                </a:extLst>
               </a:tr>
               <a:tr h="315468">
                 <a:tc>
@@ -16263,7 +16426,7 @@
                     <a:bodyPr/>
                     <a:lstStyle/>
                     <a:p>
-                      <a:pPr indent="0" marL="0">
+                      <a:pPr marL="0" indent="0">
                         <a:buNone/>
                       </a:pPr>
                       <a:r>
@@ -16331,7 +16494,7 @@
                     <a:bodyPr/>
                     <a:lstStyle/>
                     <a:p>
-                      <a:pPr algn="ctr" indent="0" marL="0">
+                      <a:pPr marL="0" indent="0" algn="ctr">
                         <a:buNone/>
                       </a:pPr>
                       <a:r>
@@ -16399,7 +16562,7 @@
                     <a:bodyPr/>
                     <a:lstStyle/>
                     <a:p>
-                      <a:pPr algn="ctr" indent="0" marL="0">
+                      <a:pPr marL="0" indent="0" algn="ctr">
                         <a:buNone/>
                       </a:pPr>
                       <a:r>
@@ -16462,6 +16625,11 @@
                     </a:solidFill>
                   </a:tcPr>
                 </a:tc>
+                <a:extLst>
+                  <a:ext uri="{0D108BD9-81ED-4DB2-BD59-A6C34878D82A}">
+                    <a16:rowId xmlns:a16="http://schemas.microsoft.com/office/drawing/2014/main" val="10002"/>
+                  </a:ext>
+                </a:extLst>
               </a:tr>
               <a:tr h="315468">
                 <a:tc>
@@ -16469,7 +16637,7 @@
                     <a:bodyPr/>
                     <a:lstStyle/>
                     <a:p>
-                      <a:pPr indent="0" marL="0">
+                      <a:pPr marL="0" indent="0">
                         <a:buNone/>
                       </a:pPr>
                       <a:r>
@@ -16537,7 +16705,7 @@
                     <a:bodyPr/>
                     <a:lstStyle/>
                     <a:p>
-                      <a:pPr algn="ctr" indent="0" marL="0">
+                      <a:pPr marL="0" indent="0" algn="ctr">
                         <a:buNone/>
                       </a:pPr>
                       <a:r>
@@ -16605,7 +16773,7 @@
                     <a:bodyPr/>
                     <a:lstStyle/>
                     <a:p>
-                      <a:pPr algn="ctr" indent="0" marL="0">
+                      <a:pPr marL="0" indent="0" algn="ctr">
                         <a:buNone/>
                       </a:pPr>
                       <a:r>
@@ -16668,6 +16836,11 @@
                     </a:solidFill>
                   </a:tcPr>
                 </a:tc>
+                <a:extLst>
+                  <a:ext uri="{0D108BD9-81ED-4DB2-BD59-A6C34878D82A}">
+                    <a16:rowId xmlns:a16="http://schemas.microsoft.com/office/drawing/2014/main" val="10003"/>
+                  </a:ext>
+                </a:extLst>
               </a:tr>
               <a:tr h="315468">
                 <a:tc>
@@ -16675,7 +16848,7 @@
                     <a:bodyPr/>
                     <a:lstStyle/>
                     <a:p>
-                      <a:pPr indent="0" marL="0">
+                      <a:pPr marL="0" indent="0">
                         <a:buNone/>
                       </a:pPr>
                       <a:r>
@@ -16743,7 +16916,7 @@
                     <a:bodyPr/>
                     <a:lstStyle/>
                     <a:p>
-                      <a:pPr algn="ctr" indent="0" marL="0">
+                      <a:pPr marL="0" indent="0" algn="ctr">
                         <a:buNone/>
                       </a:pPr>
                       <a:r>
@@ -16811,7 +16984,7 @@
                     <a:bodyPr/>
                     <a:lstStyle/>
                     <a:p>
-                      <a:pPr algn="ctr" indent="0" marL="0">
+                      <a:pPr marL="0" indent="0" algn="ctr">
                         <a:buNone/>
                       </a:pPr>
                       <a:r>
@@ -16874,6 +17047,11 @@
                     </a:solidFill>
                   </a:tcPr>
                 </a:tc>
+                <a:extLst>
+                  <a:ext uri="{0D108BD9-81ED-4DB2-BD59-A6C34878D82A}">
+                    <a16:rowId xmlns:a16="http://schemas.microsoft.com/office/drawing/2014/main" val="10004"/>
+                  </a:ext>
+                </a:extLst>
               </a:tr>
               <a:tr h="315468">
                 <a:tc>
@@ -16881,7 +17059,7 @@
                     <a:bodyPr/>
                     <a:lstStyle/>
                     <a:p>
-                      <a:pPr indent="0" marL="0">
+                      <a:pPr marL="0" indent="0">
                         <a:buNone/>
                       </a:pPr>
                       <a:r>
@@ -16949,7 +17127,7 @@
                     <a:bodyPr/>
                     <a:lstStyle/>
                     <a:p>
-                      <a:pPr algn="ctr" indent="0" marL="0">
+                      <a:pPr marL="0" indent="0" algn="ctr">
                         <a:buNone/>
                       </a:pPr>
                       <a:r>
@@ -17017,7 +17195,7 @@
                     <a:bodyPr/>
                     <a:lstStyle/>
                     <a:p>
-                      <a:pPr algn="ctr" indent="0" marL="0">
+                      <a:pPr marL="0" indent="0" algn="ctr">
                         <a:buNone/>
                       </a:pPr>
                       <a:r>
@@ -17080,6 +17258,11 @@
                     </a:solidFill>
                   </a:tcPr>
                 </a:tc>
+                <a:extLst>
+                  <a:ext uri="{0D108BD9-81ED-4DB2-BD59-A6C34878D82A}">
+                    <a16:rowId xmlns:a16="http://schemas.microsoft.com/office/drawing/2014/main" val="10005"/>
+                  </a:ext>
+                </a:extLst>
               </a:tr>
               <a:tr h="315468">
                 <a:tc>
@@ -17087,7 +17270,7 @@
                     <a:bodyPr/>
                     <a:lstStyle/>
                     <a:p>
-                      <a:pPr indent="0" marL="0">
+                      <a:pPr marL="0" indent="0">
                         <a:buNone/>
                       </a:pPr>
                       <a:r>
@@ -17155,7 +17338,7 @@
                     <a:bodyPr/>
                     <a:lstStyle/>
                     <a:p>
-                      <a:pPr algn="ctr" indent="0" marL="0">
+                      <a:pPr marL="0" indent="0" algn="ctr">
                         <a:buNone/>
                       </a:pPr>
                       <a:r>
@@ -17223,7 +17406,7 @@
                     <a:bodyPr/>
                     <a:lstStyle/>
                     <a:p>
-                      <a:pPr algn="ctr" indent="0" marL="0">
+                      <a:pPr marL="0" indent="0" algn="ctr">
                         <a:buNone/>
                       </a:pPr>
                       <a:r>
@@ -17286,6 +17469,11 @@
                     </a:solidFill>
                   </a:tcPr>
                 </a:tc>
+                <a:extLst>
+                  <a:ext uri="{0D108BD9-81ED-4DB2-BD59-A6C34878D82A}">
+                    <a16:rowId xmlns:a16="http://schemas.microsoft.com/office/drawing/2014/main" val="10006"/>
+                  </a:ext>
+                </a:extLst>
               </a:tr>
               <a:tr h="315468">
                 <a:tc>
@@ -17293,7 +17481,7 @@
                     <a:bodyPr/>
                     <a:lstStyle/>
                     <a:p>
-                      <a:pPr indent="0" marL="0">
+                      <a:pPr marL="0" indent="0">
                         <a:buNone/>
                       </a:pPr>
                       <a:r>
@@ -17361,7 +17549,7 @@
                     <a:bodyPr/>
                     <a:lstStyle/>
                     <a:p>
-                      <a:pPr algn="ctr" indent="0" marL="0">
+                      <a:pPr marL="0" indent="0" algn="ctr">
                         <a:buNone/>
                       </a:pPr>
                       <a:r>
@@ -17429,7 +17617,7 @@
                     <a:bodyPr/>
                     <a:lstStyle/>
                     <a:p>
-                      <a:pPr algn="ctr" indent="0" marL="0">
+                      <a:pPr marL="0" indent="0" algn="ctr">
                         <a:buNone/>
                       </a:pPr>
                       <a:r>
@@ -17492,6 +17680,11 @@
                     </a:solidFill>
                   </a:tcPr>
                 </a:tc>
+                <a:extLst>
+                  <a:ext uri="{0D108BD9-81ED-4DB2-BD59-A6C34878D82A}">
+                    <a16:rowId xmlns:a16="http://schemas.microsoft.com/office/drawing/2014/main" val="10007"/>
+                  </a:ext>
+                </a:extLst>
               </a:tr>
               <a:tr h="315468">
                 <a:tc>
@@ -17499,7 +17692,7 @@
                     <a:bodyPr/>
                     <a:lstStyle/>
                     <a:p>
-                      <a:pPr indent="0" marL="0">
+                      <a:pPr marL="0" indent="0">
                         <a:buNone/>
                       </a:pPr>
                       <a:r>
@@ -17567,7 +17760,7 @@
                     <a:bodyPr/>
                     <a:lstStyle/>
                     <a:p>
-                      <a:pPr algn="ctr" indent="0" marL="0">
+                      <a:pPr marL="0" indent="0" algn="ctr">
                         <a:buNone/>
                       </a:pPr>
                       <a:r>
@@ -17635,7 +17828,7 @@
                     <a:bodyPr/>
                     <a:lstStyle/>
                     <a:p>
-                      <a:pPr algn="ctr" indent="0" marL="0">
+                      <a:pPr marL="0" indent="0" algn="ctr">
                         <a:buNone/>
                       </a:pPr>
                       <a:r>
@@ -17698,6 +17891,11 @@
                     </a:solidFill>
                   </a:tcPr>
                 </a:tc>
+                <a:extLst>
+                  <a:ext uri="{0D108BD9-81ED-4DB2-BD59-A6C34878D82A}">
+                    <a16:rowId xmlns:a16="http://schemas.microsoft.com/office/drawing/2014/main" val="10008"/>
+                  </a:ext>
+                </a:extLst>
               </a:tr>
               <a:tr h="315468">
                 <a:tc>
@@ -17705,7 +17903,7 @@
                     <a:bodyPr/>
                     <a:lstStyle/>
                     <a:p>
-                      <a:pPr indent="0" marL="0">
+                      <a:pPr marL="0" indent="0">
                         <a:buNone/>
                       </a:pPr>
                       <a:r>
@@ -17773,7 +17971,7 @@
                     <a:bodyPr/>
                     <a:lstStyle/>
                     <a:p>
-                      <a:pPr algn="ctr" indent="0" marL="0">
+                      <a:pPr marL="0" indent="0" algn="ctr">
                         <a:buNone/>
                       </a:pPr>
                       <a:r>
@@ -17841,7 +18039,7 @@
                     <a:bodyPr/>
                     <a:lstStyle/>
                     <a:p>
-                      <a:pPr algn="ctr" indent="0" marL="0">
+                      <a:pPr marL="0" indent="0" algn="ctr">
                         <a:buNone/>
                       </a:pPr>
                       <a:r>
@@ -17904,6 +18102,11 @@
                     </a:solidFill>
                   </a:tcPr>
                 </a:tc>
+                <a:extLst>
+                  <a:ext uri="{0D108BD9-81ED-4DB2-BD59-A6C34878D82A}">
+                    <a16:rowId xmlns:a16="http://schemas.microsoft.com/office/drawing/2014/main" val="10009"/>
+                  </a:ext>
+                </a:extLst>
               </a:tr>
               <a:tr h="315468">
                 <a:tc>
@@ -17911,7 +18114,7 @@
                     <a:bodyPr/>
                     <a:lstStyle/>
                     <a:p>
-                      <a:pPr indent="0" marL="0">
+                      <a:pPr marL="0" indent="0">
                         <a:buNone/>
                       </a:pPr>
                       <a:r>
@@ -17979,7 +18182,7 @@
                     <a:bodyPr/>
                     <a:lstStyle/>
                     <a:p>
-                      <a:pPr algn="ctr" indent="0" marL="0">
+                      <a:pPr marL="0" indent="0" algn="ctr">
                         <a:buNone/>
                       </a:pPr>
                       <a:r>
@@ -18047,7 +18250,7 @@
                     <a:bodyPr/>
                     <a:lstStyle/>
                     <a:p>
-                      <a:pPr algn="ctr" indent="0" marL="0">
+                      <a:pPr marL="0" indent="0" algn="ctr">
                         <a:buNone/>
                       </a:pPr>
                       <a:r>
@@ -18110,6 +18313,11 @@
                     </a:solidFill>
                   </a:tcPr>
                 </a:tc>
+                <a:extLst>
+                  <a:ext uri="{0D108BD9-81ED-4DB2-BD59-A6C34878D82A}">
+                    <a16:rowId xmlns:a16="http://schemas.microsoft.com/office/drawing/2014/main" val="10010"/>
+                  </a:ext>
+                </a:extLst>
               </a:tr>
             </a:tbl>
           </a:graphicData>
@@ -18136,7 +18344,7 @@
           <a:bodyPr wrap="square" rtlCol="0" anchor="ctr"/>
           <a:lstStyle/>
           <a:p>
-            <a:pPr indent="0" marL="0">
+            <a:pPr marL="0" indent="0">
               <a:buNone/>
             </a:pPr>
             <a:r>
@@ -18175,7 +18383,7 @@
           <a:bodyPr wrap="square" rtlCol="0" anchor="ctr"/>
           <a:lstStyle/>
           <a:p>
-            <a:pPr indent="0" marL="0">
+            <a:pPr marL="0" indent="0">
               <a:lnSpc>
                 <a:spcPct val="108000"/>
               </a:lnSpc>
@@ -18217,11 +18425,11 @@
           <a:bodyPr wrap="square" rtlCol="0" anchor="ctr"/>
           <a:lstStyle/>
           <a:p>
-            <a:pPr indent="0" marL="0">
+            <a:pPr marL="0" indent="0">
               <a:buNone/>
             </a:pPr>
             <a:r>
-              <a:rPr lang="en-US" sz="1100" b="1" spc="100" kern="0" dirty="0">
+              <a:rPr lang="en-US" sz="1100" b="1" kern="0" spc="100" dirty="0">
                 <a:solidFill>
                   <a:srgbClr val="0E8A78"/>
                 </a:solidFill>
@@ -18256,7 +18464,7 @@
           <a:bodyPr wrap="square" rtlCol="0" anchor="ctr"/>
           <a:lstStyle/>
           <a:p>
-            <a:pPr indent="0" marL="0">
+            <a:pPr marL="0" indent="0">
               <a:lnSpc>
                 <a:spcPct val="108000"/>
               </a:lnSpc>
@@ -18296,6 +18504,13 @@
           </a:solidFill>
           <a:ln/>
         </p:spPr>
+        <p:txBody>
+          <a:bodyPr/>
+          <a:lstStyle/>
+          <a:p>
+            <a:endParaRPr lang="en-US"/>
+          </a:p>
+        </p:txBody>
       </p:sp>
       <p:sp>
         <p:nvSpPr>
@@ -18318,7 +18533,7 @@
           <a:bodyPr wrap="square" rtlCol="0" anchor="ctr"/>
           <a:lstStyle/>
           <a:p>
-            <a:pPr indent="0" marL="0">
+            <a:pPr marL="0" indent="0">
               <a:buNone/>
             </a:pPr>
             <a:r>
@@ -18338,7 +18553,7 @@
       </p:sp>
       <p:sp>
         <p:nvSpPr>
-          <p:cNvPr id="15" name="Text 11"/>
+          <p:cNvPr id="7" name="Text 11"/>
           <p:cNvSpPr/>
           <p:nvPr/>
         </p:nvSpPr>
@@ -18357,7 +18572,7 @@
           <a:bodyPr wrap="square" rtlCol="0" anchor="ctr"/>
           <a:lstStyle/>
           <a:p>
-            <a:pPr indent="0" marL="0">
+            <a:pPr marL="0" indent="0">
               <a:buNone/>
             </a:pPr>
             <a:r>
@@ -18391,6 +18606,7 @@
         <a:solidFill>
           <a:srgbClr val="FFFFFF"/>
         </a:solidFill>
+        <a:effectLst/>
       </p:bgPr>
     </p:bg>
     <p:spTree>
@@ -18428,7 +18644,7 @@
           <a:bodyPr wrap="square" rtlCol="0" anchor="ctr"/>
           <a:lstStyle/>
           <a:p>
-            <a:pPr algn="ctr" indent="0" marL="0">
+            <a:pPr marL="0" indent="0" algn="ctr">
               <a:buNone/>
             </a:pPr>
             <a:r>
@@ -18467,11 +18683,11 @@
           <a:bodyPr wrap="square" rtlCol="0" anchor="ctr"/>
           <a:lstStyle/>
           <a:p>
-            <a:pPr indent="0" marL="0">
+            <a:pPr marL="0" indent="0">
               <a:buNone/>
             </a:pPr>
             <a:r>
-              <a:rPr lang="en-US" sz="1100" b="1" spc="200" kern="0" dirty="0">
+              <a:rPr lang="en-US" sz="1100" b="1" kern="0" spc="200" dirty="0">
                 <a:solidFill>
                   <a:srgbClr val="0E8A78"/>
                 </a:solidFill>
@@ -18506,7 +18722,7 @@
           <a:bodyPr wrap="square" rtlCol="0" anchor="ctr"/>
           <a:lstStyle/>
           <a:p>
-            <a:pPr algn="r" indent="0" marL="0">
+            <a:pPr marL="0" indent="0" algn="r">
               <a:buNone/>
             </a:pPr>
             <a:r>
@@ -18545,7 +18761,7 @@
           <a:bodyPr wrap="square" rtlCol="0" anchor="ctr"/>
           <a:lstStyle/>
           <a:p>
-            <a:pPr indent="0" marL="0">
+            <a:pPr marL="0" indent="0">
               <a:buNone/>
             </a:pPr>
             <a:r>
@@ -18584,7 +18800,7 @@
           <a:bodyPr wrap="square" rtlCol="0" anchor="ctr"/>
           <a:lstStyle/>
           <a:p>
-            <a:pPr indent="0" marL="0">
+            <a:pPr marL="0" indent="0">
               <a:lnSpc>
                 <a:spcPct val="105000"/>
               </a:lnSpc>
@@ -18624,6 +18840,13 @@
           </a:solidFill>
           <a:ln/>
         </p:spPr>
+        <p:txBody>
+          <a:bodyPr/>
+          <a:lstStyle/>
+          <a:p>
+            <a:endParaRPr lang="en-US"/>
+          </a:p>
+        </p:txBody>
       </p:sp>
       <p:sp>
         <p:nvSpPr>
@@ -18646,7 +18869,7 @@
           <a:bodyPr wrap="square" lIns="0" tIns="0" rIns="0" bIns="0" rtlCol="0" anchor="ctr"/>
           <a:lstStyle/>
           <a:p>
-            <a:pPr indent="0" marL="0">
+            <a:pPr marL="0" indent="0">
               <a:buNone/>
             </a:pPr>
             <a:r>
@@ -18685,11 +18908,11 @@
           <a:bodyPr wrap="square" lIns="0" tIns="0" rIns="0" bIns="0" rtlCol="0" anchor="ctr"/>
           <a:lstStyle/>
           <a:p>
-            <a:pPr indent="0" marL="0">
+            <a:pPr marL="0" indent="0">
               <a:buNone/>
             </a:pPr>
             <a:r>
-              <a:rPr lang="en-US" sz="1100" b="1" spc="100" kern="0" dirty="0">
+              <a:rPr lang="en-US" sz="1100" b="1" kern="0" spc="100" dirty="0">
                 <a:solidFill>
                   <a:srgbClr val="0E8A78"/>
                 </a:solidFill>
@@ -18724,7 +18947,7 @@
           <a:bodyPr wrap="square" lIns="0" tIns="0" rIns="0" bIns="0" rtlCol="0" anchor="ctr"/>
           <a:lstStyle/>
           <a:p>
-            <a:pPr indent="0" marL="0">
+            <a:pPr marL="0" indent="0">
               <a:buNone/>
             </a:pPr>
             <a:r>
@@ -18761,6 +18984,13 @@
           </a:solidFill>
           <a:ln/>
         </p:spPr>
+        <p:txBody>
+          <a:bodyPr/>
+          <a:lstStyle/>
+          <a:p>
+            <a:endParaRPr lang="en-US"/>
+          </a:p>
+        </p:txBody>
       </p:sp>
       <p:sp>
         <p:nvSpPr>
@@ -18783,7 +19013,7 @@
           <a:bodyPr wrap="square" lIns="0" tIns="0" rIns="0" bIns="0" rtlCol="0" anchor="ctr"/>
           <a:lstStyle/>
           <a:p>
-            <a:pPr indent="0" marL="0">
+            <a:pPr marL="0" indent="0">
               <a:buNone/>
             </a:pPr>
             <a:r>
@@ -18822,11 +19052,11 @@
           <a:bodyPr wrap="square" lIns="0" tIns="0" rIns="0" bIns="0" rtlCol="0" anchor="ctr"/>
           <a:lstStyle/>
           <a:p>
-            <a:pPr indent="0" marL="0">
+            <a:pPr marL="0" indent="0">
               <a:buNone/>
             </a:pPr>
             <a:r>
-              <a:rPr lang="en-US" sz="1100" b="1" spc="100" kern="0" dirty="0">
+              <a:rPr lang="en-US" sz="1100" b="1" kern="0" spc="100" dirty="0">
                 <a:solidFill>
                   <a:srgbClr val="16263F"/>
                 </a:solidFill>
@@ -18861,7 +19091,7 @@
           <a:bodyPr wrap="square" lIns="0" tIns="0" rIns="0" bIns="0" rtlCol="0" anchor="ctr"/>
           <a:lstStyle/>
           <a:p>
-            <a:pPr indent="0" marL="0">
+            <a:pPr marL="0" indent="0">
               <a:buNone/>
             </a:pPr>
             <a:r>
@@ -18898,6 +19128,13 @@
           </a:solidFill>
           <a:ln/>
         </p:spPr>
+        <p:txBody>
+          <a:bodyPr/>
+          <a:lstStyle/>
+          <a:p>
+            <a:endParaRPr lang="en-US"/>
+          </a:p>
+        </p:txBody>
       </p:sp>
       <p:sp>
         <p:nvSpPr>
@@ -18920,7 +19157,7 @@
           <a:bodyPr wrap="square" lIns="0" tIns="0" rIns="0" bIns="0" rtlCol="0" anchor="ctr"/>
           <a:lstStyle/>
           <a:p>
-            <a:pPr indent="0" marL="0">
+            <a:pPr marL="0" indent="0">
               <a:buNone/>
             </a:pPr>
             <a:r>
@@ -18959,11 +19196,11 @@
           <a:bodyPr wrap="square" lIns="0" tIns="0" rIns="0" bIns="0" rtlCol="0" anchor="ctr"/>
           <a:lstStyle/>
           <a:p>
-            <a:pPr indent="0" marL="0">
+            <a:pPr marL="0" indent="0">
               <a:buNone/>
             </a:pPr>
             <a:r>
-              <a:rPr lang="en-US" sz="1100" b="1" spc="100" kern="0" dirty="0">
+              <a:rPr lang="en-US" sz="1100" b="1" kern="0" spc="100" dirty="0">
                 <a:solidFill>
                   <a:srgbClr val="0E8A78"/>
                 </a:solidFill>
@@ -18998,7 +19235,7 @@
           <a:bodyPr wrap="square" lIns="0" tIns="0" rIns="0" bIns="0" rtlCol="0" anchor="ctr"/>
           <a:lstStyle/>
           <a:p>
-            <a:pPr indent="0" marL="0">
+            <a:pPr marL="0" indent="0">
               <a:buNone/>
             </a:pPr>
             <a:r>
@@ -19035,6 +19272,13 @@
           </a:solidFill>
           <a:ln/>
         </p:spPr>
+        <p:txBody>
+          <a:bodyPr/>
+          <a:lstStyle/>
+          <a:p>
+            <a:endParaRPr lang="en-US"/>
+          </a:p>
+        </p:txBody>
       </p:sp>
       <p:sp>
         <p:nvSpPr>
@@ -19057,7 +19301,7 @@
           <a:bodyPr wrap="square" lIns="0" tIns="0" rIns="0" bIns="0" rtlCol="0" anchor="ctr"/>
           <a:lstStyle/>
           <a:p>
-            <a:pPr indent="0" marL="0">
+            <a:pPr marL="0" indent="0">
               <a:buNone/>
             </a:pPr>
             <a:r>
@@ -19096,11 +19340,11 @@
           <a:bodyPr wrap="square" lIns="0" tIns="0" rIns="0" bIns="0" rtlCol="0" anchor="ctr"/>
           <a:lstStyle/>
           <a:p>
-            <a:pPr indent="0" marL="0">
+            <a:pPr marL="0" indent="0">
               <a:buNone/>
             </a:pPr>
             <a:r>
-              <a:rPr lang="en-US" sz="1100" b="1" spc="100" kern="0" dirty="0">
+              <a:rPr lang="en-US" sz="1100" b="1" kern="0" spc="100" dirty="0">
                 <a:solidFill>
                   <a:srgbClr val="D9912B"/>
                 </a:solidFill>
@@ -19135,7 +19379,7 @@
           <a:bodyPr wrap="square" lIns="0" tIns="0" rIns="0" bIns="0" rtlCol="0" anchor="ctr"/>
           <a:lstStyle/>
           <a:p>
-            <a:pPr indent="0" marL="0">
+            <a:pPr marL="0" indent="0">
               <a:buNone/>
             </a:pPr>
             <a:r>
@@ -19155,7 +19399,7 @@
       </p:sp>
       <p:graphicFrame>
         <p:nvGraphicFramePr>
-          <p:cNvPr id="23" name="Chart 0" descr=""/>
+          <p:cNvPr id="23" name="Chart 0"/>
           <p:cNvGraphicFramePr/>
           <p:nvPr/>
         </p:nvGraphicFramePr>
@@ -19163,9 +19407,9 @@
           <a:off x="457200" y="3657600"/>
           <a:ext cx="6309360" cy="2606040"/>
         </p:xfrm>
-        <a:graphic xmlns:a="http://schemas.openxmlformats.org/drawingml/2006/main">
+        <a:graphic>
           <a:graphicData uri="http://schemas.openxmlformats.org/drawingml/2006/chart">
-            <c:chart xmlns:c="http://schemas.openxmlformats.org/drawingml/2006/chart" r:id="rId1"/>
+            <c:chart xmlns:c="http://schemas.openxmlformats.org/drawingml/2006/chart" xmlns:r="http://schemas.openxmlformats.org/officeDocument/2006/relationships" r:id="rId3"/>
           </a:graphicData>
         </a:graphic>
       </p:graphicFrame>
@@ -19190,7 +19434,7 @@
           <a:bodyPr wrap="square" rtlCol="0" anchor="ctr"/>
           <a:lstStyle/>
           <a:p>
-            <a:pPr indent="0" marL="0">
+            <a:pPr marL="0" indent="0">
               <a:buNone/>
             </a:pPr>
             <a:r>
@@ -19229,7 +19473,7 @@
           <a:bodyPr wrap="square" rtlCol="0" anchor="ctr"/>
           <a:lstStyle/>
           <a:p>
-            <a:pPr indent="0" marL="0">
+            <a:pPr marL="0" indent="0">
               <a:lnSpc>
                 <a:spcPct val="104000"/>
               </a:lnSpc>
@@ -19271,7 +19515,7 @@
           <a:bodyPr wrap="square" rtlCol="0" anchor="ctr"/>
           <a:lstStyle/>
           <a:p>
-            <a:pPr indent="0" marL="0">
+            <a:pPr marL="0" indent="0">
               <a:lnSpc>
                 <a:spcPct val="110000"/>
               </a:lnSpc>
@@ -19313,7 +19557,7 @@
           <a:bodyPr wrap="square" rtlCol="0" anchor="ctr"/>
           <a:lstStyle/>
           <a:p>
-            <a:pPr indent="0" marL="0">
+            <a:pPr marL="0" indent="0">
               <a:buNone/>
             </a:pPr>
             <a:r>
@@ -19347,6 +19591,7 @@
         <a:solidFill>
           <a:srgbClr val="FFFFFF"/>
         </a:solidFill>
+        <a:effectLst/>
       </p:bgPr>
     </p:bg>
     <p:spTree>
@@ -19384,7 +19629,7 @@
           <a:bodyPr wrap="square" rtlCol="0" anchor="ctr"/>
           <a:lstStyle/>
           <a:p>
-            <a:pPr algn="ctr" indent="0" marL="0">
+            <a:pPr marL="0" indent="0" algn="ctr">
               <a:buNone/>
             </a:pPr>
             <a:r>
@@ -19423,11 +19668,11 @@
           <a:bodyPr wrap="square" rtlCol="0" anchor="ctr"/>
           <a:lstStyle/>
           <a:p>
-            <a:pPr indent="0" marL="0">
+            <a:pPr marL="0" indent="0">
               <a:buNone/>
             </a:pPr>
             <a:r>
-              <a:rPr lang="en-US" sz="1100" b="1" spc="200" kern="0" dirty="0">
+              <a:rPr lang="en-US" sz="1100" b="1" kern="0" spc="200" dirty="0">
                 <a:solidFill>
                   <a:srgbClr val="0E8A78"/>
                 </a:solidFill>
@@ -19462,7 +19707,7 @@
           <a:bodyPr wrap="square" rtlCol="0" anchor="ctr"/>
           <a:lstStyle/>
           <a:p>
-            <a:pPr algn="r" indent="0" marL="0">
+            <a:pPr marL="0" indent="0" algn="r">
               <a:buNone/>
             </a:pPr>
             <a:r>
@@ -19501,7 +19746,7 @@
           <a:bodyPr wrap="square" rtlCol="0" anchor="ctr"/>
           <a:lstStyle/>
           <a:p>
-            <a:pPr indent="0" marL="0">
+            <a:pPr marL="0" indent="0">
               <a:buNone/>
             </a:pPr>
             <a:r>
@@ -19540,7 +19785,7 @@
           <a:bodyPr wrap="square" rtlCol="0" anchor="ctr"/>
           <a:lstStyle/>
           <a:p>
-            <a:pPr indent="0" marL="0">
+            <a:pPr marL="0" indent="0">
               <a:lnSpc>
                 <a:spcPct val="105000"/>
               </a:lnSpc>
@@ -19577,16 +19822,34 @@
         </p:nvGraphicFramePr>
         <p:xfrm>
           <a:off x="548640" y="2286000"/>
-          <a:ext cx="11064240" cy="914400"/>
+          <a:ext cx="11064240" cy="2432304"/>
         </p:xfrm>
         <a:graphic>
           <a:graphicData uri="http://schemas.openxmlformats.org/drawingml/2006/table">
             <a:tbl>
               <a:tblPr/>
               <a:tblGrid>
-                <a:gridCol w="3931920"/>
-                <a:gridCol w="3566160"/>
-                <a:gridCol w="3566160"/>
+                <a:gridCol w="3931920">
+                  <a:extLst>
+                    <a:ext uri="{9D8B030D-6E8A-4147-A177-3AD203B41FA5}">
+                      <a16:colId xmlns:a16="http://schemas.microsoft.com/office/drawing/2014/main" val="20000"/>
+                    </a:ext>
+                  </a:extLst>
+                </a:gridCol>
+                <a:gridCol w="3566160">
+                  <a:extLst>
+                    <a:ext uri="{9D8B030D-6E8A-4147-A177-3AD203B41FA5}">
+                      <a16:colId xmlns:a16="http://schemas.microsoft.com/office/drawing/2014/main" val="20001"/>
+                    </a:ext>
+                  </a:extLst>
+                </a:gridCol>
+                <a:gridCol w="3566160">
+                  <a:extLst>
+                    <a:ext uri="{9D8B030D-6E8A-4147-A177-3AD203B41FA5}">
+                      <a16:colId xmlns:a16="http://schemas.microsoft.com/office/drawing/2014/main" val="20002"/>
+                    </a:ext>
+                  </a:extLst>
+                </a:gridCol>
               </a:tblGrid>
               <a:tr h="457200">
                 <a:tc>
@@ -19594,7 +19857,7 @@
                     <a:bodyPr/>
                     <a:lstStyle/>
                     <a:p>
-                      <a:pPr indent="0" marL="0">
+                      <a:pPr marL="0" indent="0">
                         <a:buNone/>
                       </a:pPr>
                       <a:r>
@@ -19662,7 +19925,7 @@
                     <a:bodyPr/>
                     <a:lstStyle/>
                     <a:p>
-                      <a:pPr indent="0" marL="0">
+                      <a:pPr marL="0" indent="0">
                         <a:buNone/>
                       </a:pPr>
                       <a:r>
@@ -19730,7 +19993,7 @@
                     <a:bodyPr/>
                     <a:lstStyle/>
                     <a:p>
-                      <a:pPr indent="0" marL="0">
+                      <a:pPr marL="0" indent="0">
                         <a:buNone/>
                       </a:pPr>
                       <a:r>
@@ -19793,6 +20056,11 @@
                     </a:solidFill>
                   </a:tcPr>
                 </a:tc>
+                <a:extLst>
+                  <a:ext uri="{0D108BD9-81ED-4DB2-BD59-A6C34878D82A}">
+                    <a16:rowId xmlns:a16="http://schemas.microsoft.com/office/drawing/2014/main" val="10000"/>
+                  </a:ext>
+                </a:extLst>
               </a:tr>
               <a:tr h="658368">
                 <a:tc>
@@ -19800,7 +20068,7 @@
                     <a:bodyPr/>
                     <a:lstStyle/>
                     <a:p>
-                      <a:pPr indent="0" marL="0">
+                      <a:pPr marL="0" indent="0">
                         <a:buNone/>
                       </a:pPr>
                       <a:r>
@@ -19868,7 +20136,7 @@
                     <a:bodyPr/>
                     <a:lstStyle/>
                     <a:p>
-                      <a:pPr indent="0" marL="0">
+                      <a:pPr marL="0" indent="0">
                         <a:buNone/>
                       </a:pPr>
                       <a:r>
@@ -19936,7 +20204,7 @@
                     <a:bodyPr/>
                     <a:lstStyle/>
                     <a:p>
-                      <a:pPr indent="0" marL="0">
+                      <a:pPr marL="0" indent="0">
                         <a:buNone/>
                       </a:pPr>
                       <a:r>
@@ -19999,6 +20267,11 @@
                     </a:solidFill>
                   </a:tcPr>
                 </a:tc>
+                <a:extLst>
+                  <a:ext uri="{0D108BD9-81ED-4DB2-BD59-A6C34878D82A}">
+                    <a16:rowId xmlns:a16="http://schemas.microsoft.com/office/drawing/2014/main" val="10001"/>
+                  </a:ext>
+                </a:extLst>
               </a:tr>
               <a:tr h="658368">
                 <a:tc>
@@ -20006,7 +20279,7 @@
                     <a:bodyPr/>
                     <a:lstStyle/>
                     <a:p>
-                      <a:pPr indent="0" marL="0">
+                      <a:pPr marL="0" indent="0">
                         <a:buNone/>
                       </a:pPr>
                       <a:r>
@@ -20074,7 +20347,7 @@
                     <a:bodyPr/>
                     <a:lstStyle/>
                     <a:p>
-                      <a:pPr indent="0" marL="0">
+                      <a:pPr marL="0" indent="0">
                         <a:buNone/>
                       </a:pPr>
                       <a:r>
@@ -20142,7 +20415,7 @@
                     <a:bodyPr/>
                     <a:lstStyle/>
                     <a:p>
-                      <a:pPr indent="0" marL="0">
+                      <a:pPr marL="0" indent="0">
                         <a:buNone/>
                       </a:pPr>
                       <a:r>
@@ -20205,6 +20478,11 @@
                     </a:solidFill>
                   </a:tcPr>
                 </a:tc>
+                <a:extLst>
+                  <a:ext uri="{0D108BD9-81ED-4DB2-BD59-A6C34878D82A}">
+                    <a16:rowId xmlns:a16="http://schemas.microsoft.com/office/drawing/2014/main" val="10002"/>
+                  </a:ext>
+                </a:extLst>
               </a:tr>
               <a:tr h="658368">
                 <a:tc>
@@ -20212,7 +20490,7 @@
                     <a:bodyPr/>
                     <a:lstStyle/>
                     <a:p>
-                      <a:pPr indent="0" marL="0">
+                      <a:pPr marL="0" indent="0">
                         <a:buNone/>
                       </a:pPr>
                       <a:r>
@@ -20280,7 +20558,7 @@
                     <a:bodyPr/>
                     <a:lstStyle/>
                     <a:p>
-                      <a:pPr indent="0" marL="0">
+                      <a:pPr marL="0" indent="0">
                         <a:buNone/>
                       </a:pPr>
                       <a:r>
@@ -20348,7 +20626,7 @@
                     <a:bodyPr/>
                     <a:lstStyle/>
                     <a:p>
-                      <a:pPr indent="0" marL="0">
+                      <a:pPr marL="0" indent="0">
                         <a:buNone/>
                       </a:pPr>
                       <a:r>
@@ -20411,6 +20689,11 @@
                     </a:solidFill>
                   </a:tcPr>
                 </a:tc>
+                <a:extLst>
+                  <a:ext uri="{0D108BD9-81ED-4DB2-BD59-A6C34878D82A}">
+                    <a16:rowId xmlns:a16="http://schemas.microsoft.com/office/drawing/2014/main" val="10003"/>
+                  </a:ext>
+                </a:extLst>
               </a:tr>
             </a:tbl>
           </a:graphicData>
@@ -20437,7 +20720,7 @@
           <a:bodyPr wrap="square" rtlCol="0" anchor="ctr"/>
           <a:lstStyle/>
           <a:p>
-            <a:pPr algn="r" indent="0" marL="0">
+            <a:pPr marL="0" indent="0" algn="r">
               <a:buNone/>
             </a:pPr>
             <a:r>
@@ -20476,7 +20759,7 @@
           <a:bodyPr wrap="square" rtlCol="0" anchor="ctr"/>
           <a:lstStyle/>
           <a:p>
-            <a:pPr indent="0" marL="0">
+            <a:pPr marL="0" indent="0">
               <a:buNone/>
             </a:pPr>
             <a:r>
@@ -20496,7 +20779,7 @@
       </p:sp>
       <p:sp>
         <p:nvSpPr>
-          <p:cNvPr id="10" name="Text 7"/>
+          <p:cNvPr id="7" name="Text 7"/>
           <p:cNvSpPr/>
           <p:nvPr/>
         </p:nvSpPr>
@@ -20515,7 +20798,7 @@
           <a:bodyPr wrap="square" rtlCol="0" anchor="ctr"/>
           <a:lstStyle/>
           <a:p>
-            <a:pPr indent="0" marL="0">
+            <a:pPr marL="0" indent="0">
               <a:lnSpc>
                 <a:spcPct val="105000"/>
               </a:lnSpc>
@@ -20557,7 +20840,7 @@
           <a:bodyPr wrap="square" rtlCol="0" anchor="ctr"/>
           <a:lstStyle/>
           <a:p>
-            <a:pPr indent="0" marL="0">
+            <a:pPr marL="0" indent="0">
               <a:buNone/>
             </a:pPr>
             <a:r>
@@ -20876,4 +21159,325 @@
     </a:ext>
   </a:extLst>
 </a:theme>
+</file>
+
+<file path=ppt/theme/theme2.xml><?xml version="1.0" encoding="utf-8"?>
+<a:theme xmlns:a="http://schemas.openxmlformats.org/drawingml/2006/main" name="Office Theme">
+  <a:themeElements>
+    <a:clrScheme name="Office">
+      <a:dk1>
+        <a:sysClr val="windowText" lastClr="000000"/>
+      </a:dk1>
+      <a:lt1>
+        <a:sysClr val="window" lastClr="FFFFFF"/>
+      </a:lt1>
+      <a:dk2>
+        <a:srgbClr val="0E2841"/>
+      </a:dk2>
+      <a:lt2>
+        <a:srgbClr val="E8E8E8"/>
+      </a:lt2>
+      <a:accent1>
+        <a:srgbClr val="156082"/>
+      </a:accent1>
+      <a:accent2>
+        <a:srgbClr val="E97132"/>
+      </a:accent2>
+      <a:accent3>
+        <a:srgbClr val="196B24"/>
+      </a:accent3>
+      <a:accent4>
+        <a:srgbClr val="0F9ED5"/>
+      </a:accent4>
+      <a:accent5>
+        <a:srgbClr val="A02B93"/>
+      </a:accent5>
+      <a:accent6>
+        <a:srgbClr val="4EA72E"/>
+      </a:accent6>
+      <a:hlink>
+        <a:srgbClr val="467886"/>
+      </a:hlink>
+      <a:folHlink>
+        <a:srgbClr val="96607D"/>
+      </a:folHlink>
+    </a:clrScheme>
+    <a:fontScheme name="Office">
+      <a:majorFont>
+        <a:latin typeface="Aptos Display" panose="02110004020202020204"/>
+        <a:ea typeface=""/>
+        <a:cs typeface=""/>
+        <a:font script="Jpan" typeface="游ゴシック Light"/>
+        <a:font script="Hang" typeface="맑은 고딕"/>
+        <a:font script="Hans" typeface="等线 Light"/>
+        <a:font script="Hant" typeface="新細明體"/>
+        <a:font script="Arab" typeface="Times New Roman"/>
+        <a:font script="Hebr" typeface="Times New Roman"/>
+        <a:font script="Thai" typeface="Angsana New"/>
+        <a:font script="Ethi" typeface="Nyala"/>
+        <a:font script="Beng" typeface="Vrinda"/>
+        <a:font script="Gujr" typeface="Shruti"/>
+        <a:font script="Khmr" typeface="MoolBoran"/>
+        <a:font script="Knda" typeface="Tunga"/>
+        <a:font script="Guru" typeface="Raavi"/>
+        <a:font script="Cans" typeface="Euphemia"/>
+        <a:font script="Cher" typeface="Plantagenet Cherokee"/>
+        <a:font script="Yiii" typeface="Microsoft Yi Baiti"/>
+        <a:font script="Tibt" typeface="Microsoft Himalaya"/>
+        <a:font script="Thaa" typeface="MV Boli"/>
+        <a:font script="Deva" typeface="Mangal"/>
+        <a:font script="Telu" typeface="Gautami"/>
+        <a:font script="Taml" typeface="Latha"/>
+        <a:font script="Syrc" typeface="Estrangelo Edessa"/>
+        <a:font script="Orya" typeface="Kalinga"/>
+        <a:font script="Mlym" typeface="Kartika"/>
+        <a:font script="Laoo" typeface="DokChampa"/>
+        <a:font script="Sinh" typeface="Iskoola Pota"/>
+        <a:font script="Mong" typeface="Mongolian Baiti"/>
+        <a:font script="Viet" typeface="Times New Roman"/>
+        <a:font script="Uigh" typeface="Microsoft Uighur"/>
+        <a:font script="Geor" typeface="Sylfaen"/>
+        <a:font script="Armn" typeface="Arial"/>
+        <a:font script="Bugi" typeface="Leelawadee UI"/>
+        <a:font script="Bopo" typeface="Microsoft JhengHei"/>
+        <a:font script="Java" typeface="Javanese Text"/>
+        <a:font script="Lisu" typeface="Segoe UI"/>
+        <a:font script="Mymr" typeface="Myanmar Text"/>
+        <a:font script="Nkoo" typeface="Ebrima"/>
+        <a:font script="Olck" typeface="Nirmala UI"/>
+        <a:font script="Osma" typeface="Ebrima"/>
+        <a:font script="Phag" typeface="Phagspa"/>
+        <a:font script="Syrn" typeface="Estrangelo Edessa"/>
+        <a:font script="Syrj" typeface="Estrangelo Edessa"/>
+        <a:font script="Syre" typeface="Estrangelo Edessa"/>
+        <a:font script="Sora" typeface="Nirmala UI"/>
+        <a:font script="Tale" typeface="Microsoft Tai Le"/>
+        <a:font script="Talu" typeface="Microsoft New Tai Lue"/>
+        <a:font script="Tfng" typeface="Ebrima"/>
+      </a:majorFont>
+      <a:minorFont>
+        <a:latin typeface="Aptos" panose="02110004020202020204"/>
+        <a:ea typeface=""/>
+        <a:cs typeface=""/>
+        <a:font script="Jpan" typeface="游ゴシック"/>
+        <a:font script="Hang" typeface="맑은 고딕"/>
+        <a:font script="Hans" typeface="等线"/>
+        <a:font script="Hant" typeface="新細明體"/>
+        <a:font script="Arab" typeface="Arial"/>
+        <a:font script="Hebr" typeface="Arial"/>
+        <a:font script="Thai" typeface="Cordia New"/>
+        <a:font script="Ethi" typeface="Nyala"/>
+        <a:font script="Beng" typeface="Vrinda"/>
+        <a:font script="Gujr" typeface="Shruti"/>
+        <a:font script="Khmr" typeface="DaunPenh"/>
+        <a:font script="Knda" typeface="Tunga"/>
+        <a:font script="Guru" typeface="Raavi"/>
+        <a:font script="Cans" typeface="Euphemia"/>
+        <a:font script="Cher" typeface="Plantagenet Cherokee"/>
+        <a:font script="Yiii" typeface="Microsoft Yi Baiti"/>
+        <a:font script="Tibt" typeface="Microsoft Himalaya"/>
+        <a:font script="Thaa" typeface="MV Boli"/>
+        <a:font script="Deva" typeface="Mangal"/>
+        <a:font script="Telu" typeface="Gautami"/>
+        <a:font script="Taml" typeface="Latha"/>
+        <a:font script="Syrc" typeface="Estrangelo Edessa"/>
+        <a:font script="Orya" typeface="Kalinga"/>
+        <a:font script="Mlym" typeface="Kartika"/>
+        <a:font script="Laoo" typeface="DokChampa"/>
+        <a:font script="Sinh" typeface="Iskoola Pota"/>
+        <a:font script="Mong" typeface="Mongolian Baiti"/>
+        <a:font script="Viet" typeface="Arial"/>
+        <a:font script="Uigh" typeface="Microsoft Uighur"/>
+        <a:font script="Geor" typeface="Sylfaen"/>
+        <a:font script="Armn" typeface="Arial"/>
+        <a:font script="Bugi" typeface="Leelawadee UI"/>
+        <a:font script="Bopo" typeface="Microsoft JhengHei"/>
+        <a:font script="Java" typeface="Javanese Text"/>
+        <a:font script="Lisu" typeface="Segoe UI"/>
+        <a:font script="Mymr" typeface="Myanmar Text"/>
+        <a:font script="Nkoo" typeface="Ebrima"/>
+        <a:font script="Olck" typeface="Nirmala UI"/>
+        <a:font script="Osma" typeface="Ebrima"/>
+        <a:font script="Phag" typeface="Phagspa"/>
+        <a:font script="Syrn" typeface="Estrangelo Edessa"/>
+        <a:font script="Syrj" typeface="Estrangelo Edessa"/>
+        <a:font script="Syre" typeface="Estrangelo Edessa"/>
+        <a:font script="Sora" typeface="Nirmala UI"/>
+        <a:font script="Tale" typeface="Microsoft Tai Le"/>
+        <a:font script="Talu" typeface="Microsoft New Tai Lue"/>
+        <a:font script="Tfng" typeface="Ebrima"/>
+      </a:minorFont>
+    </a:fontScheme>
+    <a:fmtScheme name="Office">
+      <a:fillStyleLst>
+        <a:solidFill>
+          <a:schemeClr val="phClr"/>
+        </a:solidFill>
+        <a:gradFill rotWithShape="1">
+          <a:gsLst>
+            <a:gs pos="0">
+              <a:schemeClr val="phClr">
+                <a:lumMod val="110000"/>
+                <a:satMod val="105000"/>
+                <a:tint val="67000"/>
+              </a:schemeClr>
+            </a:gs>
+            <a:gs pos="50000">
+              <a:schemeClr val="phClr">
+                <a:lumMod val="105000"/>
+                <a:satMod val="103000"/>
+                <a:tint val="73000"/>
+              </a:schemeClr>
+            </a:gs>
+            <a:gs pos="100000">
+              <a:schemeClr val="phClr">
+                <a:lumMod val="105000"/>
+                <a:satMod val="109000"/>
+                <a:tint val="81000"/>
+              </a:schemeClr>
+            </a:gs>
+          </a:gsLst>
+          <a:lin ang="5400000" scaled="0"/>
+        </a:gradFill>
+        <a:gradFill rotWithShape="1">
+          <a:gsLst>
+            <a:gs pos="0">
+              <a:schemeClr val="phClr">
+                <a:satMod val="103000"/>
+                <a:lumMod val="102000"/>
+                <a:tint val="94000"/>
+              </a:schemeClr>
+            </a:gs>
+            <a:gs pos="50000">
+              <a:schemeClr val="phClr">
+                <a:satMod val="110000"/>
+                <a:lumMod val="100000"/>
+                <a:shade val="100000"/>
+              </a:schemeClr>
+            </a:gs>
+            <a:gs pos="100000">
+              <a:schemeClr val="phClr">
+                <a:lumMod val="99000"/>
+                <a:satMod val="120000"/>
+                <a:shade val="78000"/>
+              </a:schemeClr>
+            </a:gs>
+          </a:gsLst>
+          <a:lin ang="5400000" scaled="0"/>
+        </a:gradFill>
+      </a:fillStyleLst>
+      <a:lnStyleLst>
+        <a:ln w="12700" cap="flat" cmpd="sng" algn="ctr">
+          <a:solidFill>
+            <a:schemeClr val="phClr"/>
+          </a:solidFill>
+          <a:prstDash val="solid"/>
+          <a:miter lim="800000"/>
+        </a:ln>
+        <a:ln w="19050" cap="flat" cmpd="sng" algn="ctr">
+          <a:solidFill>
+            <a:schemeClr val="phClr"/>
+          </a:solidFill>
+          <a:prstDash val="solid"/>
+          <a:miter lim="800000"/>
+        </a:ln>
+        <a:ln w="25400" cap="flat" cmpd="sng" algn="ctr">
+          <a:solidFill>
+            <a:schemeClr val="phClr"/>
+          </a:solidFill>
+          <a:prstDash val="solid"/>
+          <a:miter lim="800000"/>
+        </a:ln>
+      </a:lnStyleLst>
+      <a:effectStyleLst>
+        <a:effectStyle>
+          <a:effectLst/>
+        </a:effectStyle>
+        <a:effectStyle>
+          <a:effectLst/>
+        </a:effectStyle>
+        <a:effectStyle>
+          <a:effectLst>
+            <a:outerShdw blurRad="57150" dist="19050" dir="5400000" algn="ctr" rotWithShape="0">
+              <a:srgbClr val="000000">
+                <a:alpha val="63000"/>
+              </a:srgbClr>
+            </a:outerShdw>
+          </a:effectLst>
+        </a:effectStyle>
+      </a:effectStyleLst>
+      <a:bgFillStyleLst>
+        <a:solidFill>
+          <a:schemeClr val="phClr"/>
+        </a:solidFill>
+        <a:solidFill>
+          <a:schemeClr val="phClr">
+            <a:tint val="95000"/>
+            <a:satMod val="170000"/>
+          </a:schemeClr>
+        </a:solidFill>
+        <a:gradFill rotWithShape="1">
+          <a:gsLst>
+            <a:gs pos="0">
+              <a:schemeClr val="phClr">
+                <a:tint val="93000"/>
+                <a:satMod val="150000"/>
+                <a:shade val="98000"/>
+                <a:lumMod val="102000"/>
+              </a:schemeClr>
+            </a:gs>
+            <a:gs pos="50000">
+              <a:schemeClr val="phClr">
+                <a:tint val="98000"/>
+                <a:satMod val="130000"/>
+                <a:shade val="90000"/>
+                <a:lumMod val="103000"/>
+              </a:schemeClr>
+            </a:gs>
+            <a:gs pos="100000">
+              <a:schemeClr val="phClr">
+                <a:shade val="63000"/>
+                <a:satMod val="120000"/>
+              </a:schemeClr>
+            </a:gs>
+          </a:gsLst>
+          <a:lin ang="5400000" scaled="0"/>
+        </a:gradFill>
+      </a:bgFillStyleLst>
+    </a:fmtScheme>
+  </a:themeElements>
+  <a:objectDefaults>
+    <a:lnDef>
+      <a:spPr/>
+      <a:bodyPr/>
+      <a:lstStyle/>
+      <a:style>
+        <a:lnRef idx="2">
+          <a:schemeClr val="accent1"/>
+        </a:lnRef>
+        <a:fillRef idx="0">
+          <a:schemeClr val="accent1"/>
+        </a:fillRef>
+        <a:effectRef idx="1">
+          <a:schemeClr val="accent1"/>
+        </a:effectRef>
+        <a:fontRef idx="minor">
+          <a:schemeClr val="tx1"/>
+        </a:fontRef>
+      </a:style>
+    </a:lnDef>
+  </a:objectDefaults>
+  <a:extraClrSchemeLst/>
+  <a:extLst>
+    <a:ext uri="{05A4C25C-085E-4340-85A3-A5531E510DB2}">
+      <thm15:themeFamily xmlns:thm15="http://schemas.microsoft.com/office/thememl/2012/main" name="Office Theme" id="{2E142A2C-CD16-42D6-873A-C26D2A0506FA}" vid="{1BDDFF52-6CD6-40A5-AB3C-68EB2F1E4D0A}"/>
+    </a:ext>
+  </a:extLst>
+</a:theme>
+</file>
+
+<file path=docMetadata/LabelInfo.xml><?xml version="1.0" encoding="utf-8"?>
+<clbl:labelList xmlns:clbl="http://schemas.microsoft.com/office/2020/mipLabelMetadata">
+  <clbl:label id="{fe4bc684-102f-461d-a6dc-b1e58752f380}" enabled="1" method="Standard" siteId="{2d75a51b-29e5-45d5-a5c5-5aa979cb6a28}" contentBits="1" removed="0"/>
+</clbl:labelList>
 </file>